--- a/Webdesign.pptx
+++ b/Webdesign.pptx
@@ -5,10 +5,10 @@
     <p:sldMasterId id="2147483712" r:id="rId1"/>
   </p:sldMasterIdLst>
   <p:notesMasterIdLst>
-    <p:notesMasterId r:id="rId69"/>
+    <p:notesMasterId r:id="rId76"/>
   </p:notesMasterIdLst>
   <p:handoutMasterIdLst>
-    <p:handoutMasterId r:id="rId70"/>
+    <p:handoutMasterId r:id="rId77"/>
   </p:handoutMasterIdLst>
   <p:sldIdLst>
     <p:sldId id="257" r:id="rId2"/>
@@ -52,32 +52,39 @@
     <p:sldId id="312" r:id="rId40"/>
     <p:sldId id="306" r:id="rId41"/>
     <p:sldId id="311" r:id="rId42"/>
-    <p:sldId id="308" r:id="rId43"/>
-    <p:sldId id="309" r:id="rId44"/>
-    <p:sldId id="310" r:id="rId45"/>
-    <p:sldId id="289" r:id="rId46"/>
-    <p:sldId id="290" r:id="rId47"/>
-    <p:sldId id="295" r:id="rId48"/>
-    <p:sldId id="301" r:id="rId49"/>
-    <p:sldId id="291" r:id="rId50"/>
-    <p:sldId id="297" r:id="rId51"/>
-    <p:sldId id="292" r:id="rId52"/>
-    <p:sldId id="293" r:id="rId53"/>
-    <p:sldId id="300" r:id="rId54"/>
-    <p:sldId id="313" r:id="rId55"/>
-    <p:sldId id="298" r:id="rId56"/>
-    <p:sldId id="294" r:id="rId57"/>
-    <p:sldId id="314" r:id="rId58"/>
-    <p:sldId id="299" r:id="rId59"/>
-    <p:sldId id="296" r:id="rId60"/>
-    <p:sldId id="315" r:id="rId61"/>
-    <p:sldId id="316" r:id="rId62"/>
-    <p:sldId id="317" r:id="rId63"/>
-    <p:sldId id="318" r:id="rId64"/>
-    <p:sldId id="319" r:id="rId65"/>
-    <p:sldId id="320" r:id="rId66"/>
-    <p:sldId id="325" r:id="rId67"/>
-    <p:sldId id="321" r:id="rId68"/>
+    <p:sldId id="326" r:id="rId43"/>
+    <p:sldId id="308" r:id="rId44"/>
+    <p:sldId id="309" r:id="rId45"/>
+    <p:sldId id="310" r:id="rId46"/>
+    <p:sldId id="327" r:id="rId47"/>
+    <p:sldId id="328" r:id="rId48"/>
+    <p:sldId id="329" r:id="rId49"/>
+    <p:sldId id="330" r:id="rId50"/>
+    <p:sldId id="331" r:id="rId51"/>
+    <p:sldId id="332" r:id="rId52"/>
+    <p:sldId id="289" r:id="rId53"/>
+    <p:sldId id="290" r:id="rId54"/>
+    <p:sldId id="295" r:id="rId55"/>
+    <p:sldId id="301" r:id="rId56"/>
+    <p:sldId id="291" r:id="rId57"/>
+    <p:sldId id="297" r:id="rId58"/>
+    <p:sldId id="292" r:id="rId59"/>
+    <p:sldId id="293" r:id="rId60"/>
+    <p:sldId id="300" r:id="rId61"/>
+    <p:sldId id="313" r:id="rId62"/>
+    <p:sldId id="298" r:id="rId63"/>
+    <p:sldId id="294" r:id="rId64"/>
+    <p:sldId id="314" r:id="rId65"/>
+    <p:sldId id="299" r:id="rId66"/>
+    <p:sldId id="296" r:id="rId67"/>
+    <p:sldId id="315" r:id="rId68"/>
+    <p:sldId id="316" r:id="rId69"/>
+    <p:sldId id="317" r:id="rId70"/>
+    <p:sldId id="318" r:id="rId71"/>
+    <p:sldId id="319" r:id="rId72"/>
+    <p:sldId id="320" r:id="rId73"/>
+    <p:sldId id="325" r:id="rId74"/>
+    <p:sldId id="321" r:id="rId75"/>
   </p:sldIdLst>
   <p:sldSz cx="12192000" cy="6858000"/>
   <p:notesSz cx="6858000" cy="9144000"/>
@@ -190,7 +197,7 @@
 <file path=ppt/revisionInfo.xml><?xml version="1.0" encoding="utf-8"?>
 <p1510:revInfo xmlns:a="http://schemas.openxmlformats.org/drawingml/2006/main" xmlns:r="http://schemas.openxmlformats.org/officeDocument/2006/relationships" xmlns:p1510="http://schemas.microsoft.com/office/powerpoint/2015/10/main">
   <p1510:revLst>
-    <p1510:client id="{B2AA898E-DE0A-4EF9-847C-1F335EDE3A48}" v="3" dt="2026-01-09T04:55:38.466"/>
+    <p1510:client id="{1A605787-90CD-4106-8E6A-593E10A490FB}" v="7" dt="2026-05-28T03:15:59.361"/>
   </p1510:revLst>
 </p1510:revInfo>
 </file>
@@ -198,117 +205,204 @@
 <file path=ppt/changesInfos/changesInfo1.xml><?xml version="1.0" encoding="utf-8"?>
 <pc:chgInfo xmlns:a="http://schemas.openxmlformats.org/drawingml/2006/main" xmlns:r="http://schemas.openxmlformats.org/officeDocument/2006/relationships" xmlns:ac="http://schemas.microsoft.com/office/drawing/2013/main/command" xmlns:pc="http://schemas.microsoft.com/office/powerpoint/2013/main/command">
   <pc:docChgLst>
-    <pc:chgData name="Renaud Leroy" userId="135fb8da-5d77-4f74-8269-9536d61f18e3" providerId="ADAL" clId="{E78863E9-63F1-4351-B732-0F17272A4588}"/>
-    <pc:docChg chg="undo custSel addSld delSld modSld">
-      <pc:chgData name="Renaud Leroy" userId="135fb8da-5d77-4f74-8269-9536d61f18e3" providerId="ADAL" clId="{E78863E9-63F1-4351-B732-0F17272A4588}" dt="2026-01-09T04:58:51.923" v="7118" actId="20577"/>
+    <pc:chgData name="Renaud Leroy" userId="135fb8da-5d77-4f74-8269-9536d61f18e3" providerId="ADAL" clId="{B226C1E3-CEB0-47B2-AA19-D9A9FC1D34FF}"/>
+    <pc:docChg chg="undo custSel addSld modSld">
+      <pc:chgData name="Renaud Leroy" userId="135fb8da-5d77-4f74-8269-9536d61f18e3" providerId="ADAL" clId="{B226C1E3-CEB0-47B2-AA19-D9A9FC1D34FF}" dt="2026-05-28T03:27:54.223" v="2203" actId="5793"/>
       <pc:docMkLst>
         <pc:docMk/>
       </pc:docMkLst>
-      <pc:sldChg chg="addSp delSp modSp mod">
-        <pc:chgData name="Renaud Leroy" userId="135fb8da-5d77-4f74-8269-9536d61f18e3" providerId="ADAL" clId="{E78863E9-63F1-4351-B732-0F17272A4588}" dt="2026-01-09T04:39:51.172" v="6178" actId="20577"/>
+      <pc:sldChg chg="modSp new mod">
+        <pc:chgData name="Renaud Leroy" userId="135fb8da-5d77-4f74-8269-9536d61f18e3" providerId="ADAL" clId="{B226C1E3-CEB0-47B2-AA19-D9A9FC1D34FF}" dt="2026-05-28T02:58:39.960" v="653" actId="20577"/>
         <pc:sldMkLst>
           <pc:docMk/>
-          <pc:sldMk cId="4098174705" sldId="273"/>
+          <pc:sldMk cId="1732912673" sldId="326"/>
         </pc:sldMkLst>
         <pc:spChg chg="mod">
-          <ac:chgData name="Renaud Leroy" userId="135fb8da-5d77-4f74-8269-9536d61f18e3" providerId="ADAL" clId="{E78863E9-63F1-4351-B732-0F17272A4588}" dt="2026-01-09T04:39:51.172" v="6178" actId="20577"/>
+          <ac:chgData name="Renaud Leroy" userId="135fb8da-5d77-4f74-8269-9536d61f18e3" providerId="ADAL" clId="{B226C1E3-CEB0-47B2-AA19-D9A9FC1D34FF}" dt="2026-05-07T06:59:38.890" v="21" actId="20577"/>
           <ac:spMkLst>
             <pc:docMk/>
-            <pc:sldMk cId="4098174705" sldId="273"/>
-            <ac:spMk id="3" creationId="{85E9BE51-C998-A50C-A81E-1FC799BD0DFF}"/>
+            <pc:sldMk cId="1732912673" sldId="326"/>
+            <ac:spMk id="2" creationId="{E3D78D1B-1B6C-34C4-CC2E-ECDCCEF455F9}"/>
           </ac:spMkLst>
         </pc:spChg>
-        <pc:picChg chg="add del mod">
-          <ac:chgData name="Renaud Leroy" userId="135fb8da-5d77-4f74-8269-9536d61f18e3" providerId="ADAL" clId="{E78863E9-63F1-4351-B732-0F17272A4588}" dt="2026-01-09T04:37:55.712" v="6093" actId="478"/>
-          <ac:picMkLst>
-            <pc:docMk/>
-            <pc:sldMk cId="4098174705" sldId="273"/>
-            <ac:picMk id="5" creationId="{1BFD0294-E26D-488A-3280-A6D46FCFAC99}"/>
-          </ac:picMkLst>
-        </pc:picChg>
-      </pc:sldChg>
-      <pc:sldChg chg="modSp del mod">
-        <pc:chgData name="Renaud Leroy" userId="135fb8da-5d77-4f74-8269-9536d61f18e3" providerId="ADAL" clId="{E78863E9-63F1-4351-B732-0F17272A4588}" dt="2026-01-09T04:57:43.120" v="7083" actId="47"/>
-        <pc:sldMkLst>
-          <pc:docMk/>
-          <pc:sldMk cId="1489733937" sldId="288"/>
-        </pc:sldMkLst>
         <pc:spChg chg="mod">
-          <ac:chgData name="Renaud Leroy" userId="135fb8da-5d77-4f74-8269-9536d61f18e3" providerId="ADAL" clId="{E78863E9-63F1-4351-B732-0F17272A4588}" dt="2026-01-09T04:50:57.786" v="6866" actId="20577"/>
+          <ac:chgData name="Renaud Leroy" userId="135fb8da-5d77-4f74-8269-9536d61f18e3" providerId="ADAL" clId="{B226C1E3-CEB0-47B2-AA19-D9A9FC1D34FF}" dt="2026-05-28T02:58:39.960" v="653" actId="20577"/>
           <ac:spMkLst>
             <pc:docMk/>
-            <pc:sldMk cId="1489733937" sldId="288"/>
-            <ac:spMk id="3" creationId="{E45411DF-1442-8FAD-C9C4-711F8E5BBE84}"/>
+            <pc:sldMk cId="1732912673" sldId="326"/>
+            <ac:spMk id="3" creationId="{3838F039-1A9D-80EF-C020-B8C3DB2CFC97}"/>
           </ac:spMkLst>
         </pc:spChg>
       </pc:sldChg>
-      <pc:sldChg chg="modSp mod">
-        <pc:chgData name="Renaud Leroy" userId="135fb8da-5d77-4f74-8269-9536d61f18e3" providerId="ADAL" clId="{E78863E9-63F1-4351-B732-0F17272A4588}" dt="2026-01-09T04:58:27.434" v="7100" actId="20577"/>
+      <pc:sldChg chg="modSp new mod">
+        <pc:chgData name="Renaud Leroy" userId="135fb8da-5d77-4f74-8269-9536d61f18e3" providerId="ADAL" clId="{B226C1E3-CEB0-47B2-AA19-D9A9FC1D34FF}" dt="2026-05-07T08:27:08.230" v="521" actId="20577"/>
         <pc:sldMkLst>
           <pc:docMk/>
-          <pc:sldMk cId="4130628188" sldId="308"/>
+          <pc:sldMk cId="2516393351" sldId="327"/>
         </pc:sldMkLst>
         <pc:spChg chg="mod">
-          <ac:chgData name="Renaud Leroy" userId="135fb8da-5d77-4f74-8269-9536d61f18e3" providerId="ADAL" clId="{E78863E9-63F1-4351-B732-0F17272A4588}" dt="2026-01-09T04:58:27.434" v="7100" actId="20577"/>
+          <ac:chgData name="Renaud Leroy" userId="135fb8da-5d77-4f74-8269-9536d61f18e3" providerId="ADAL" clId="{B226C1E3-CEB0-47B2-AA19-D9A9FC1D34FF}" dt="2026-05-07T07:30:42.002" v="258" actId="20577"/>
           <ac:spMkLst>
             <pc:docMk/>
-            <pc:sldMk cId="4130628188" sldId="308"/>
-            <ac:spMk id="3" creationId="{F327F411-F1D4-9C78-AE6A-AF937B0D182C}"/>
+            <pc:sldMk cId="2516393351" sldId="327"/>
+            <ac:spMk id="2" creationId="{CC3D1337-4C7C-C30C-2E35-8EEF6FA1A297}"/>
           </ac:spMkLst>
         </pc:spChg>
-      </pc:sldChg>
-      <pc:sldChg chg="modSp mod">
-        <pc:chgData name="Renaud Leroy" userId="135fb8da-5d77-4f74-8269-9536d61f18e3" providerId="ADAL" clId="{E78863E9-63F1-4351-B732-0F17272A4588}" dt="2026-01-09T04:58:51.923" v="7118" actId="20577"/>
-        <pc:sldMkLst>
-          <pc:docMk/>
-          <pc:sldMk cId="2144668814" sldId="310"/>
-        </pc:sldMkLst>
         <pc:spChg chg="mod">
-          <ac:chgData name="Renaud Leroy" userId="135fb8da-5d77-4f74-8269-9536d61f18e3" providerId="ADAL" clId="{E78863E9-63F1-4351-B732-0F17272A4588}" dt="2026-01-09T04:58:51.923" v="7118" actId="20577"/>
+          <ac:chgData name="Renaud Leroy" userId="135fb8da-5d77-4f74-8269-9536d61f18e3" providerId="ADAL" clId="{B226C1E3-CEB0-47B2-AA19-D9A9FC1D34FF}" dt="2026-05-07T08:27:08.230" v="521" actId="20577"/>
           <ac:spMkLst>
             <pc:docMk/>
-            <pc:sldMk cId="2144668814" sldId="310"/>
-            <ac:spMk id="3" creationId="{6FB43E0E-C9ED-313F-1FB1-7F50DB877ABE}"/>
+            <pc:sldMk cId="2516393351" sldId="327"/>
+            <ac:spMk id="3" creationId="{4B2E592E-BB34-F2DA-E304-4DD33FC8FED9}"/>
           </ac:spMkLst>
         </pc:spChg>
       </pc:sldChg>
       <pc:sldChg chg="modSp add mod">
-        <pc:chgData name="Renaud Leroy" userId="135fb8da-5d77-4f74-8269-9536d61f18e3" providerId="ADAL" clId="{E78863E9-63F1-4351-B732-0F17272A4588}" dt="2026-01-09T04:49:04.669" v="6708" actId="20577"/>
+        <pc:chgData name="Renaud Leroy" userId="135fb8da-5d77-4f74-8269-9536d61f18e3" providerId="ADAL" clId="{B226C1E3-CEB0-47B2-AA19-D9A9FC1D34FF}" dt="2026-05-07T08:34:53.598" v="529" actId="27636"/>
         <pc:sldMkLst>
           <pc:docMk/>
-          <pc:sldMk cId="3857441359" sldId="322"/>
+          <pc:sldMk cId="190327432" sldId="328"/>
         </pc:sldMkLst>
         <pc:spChg chg="mod">
-          <ac:chgData name="Renaud Leroy" userId="135fb8da-5d77-4f74-8269-9536d61f18e3" providerId="ADAL" clId="{E78863E9-63F1-4351-B732-0F17272A4588}" dt="2026-01-09T04:49:04.669" v="6708" actId="20577"/>
+          <ac:chgData name="Renaud Leroy" userId="135fb8da-5d77-4f74-8269-9536d61f18e3" providerId="ADAL" clId="{B226C1E3-CEB0-47B2-AA19-D9A9FC1D34FF}" dt="2026-05-07T08:34:53.598" v="529" actId="27636"/>
           <ac:spMkLst>
             <pc:docMk/>
-            <pc:sldMk cId="3857441359" sldId="322"/>
-            <ac:spMk id="3" creationId="{66FCE825-B1F6-8C99-3DE1-77CC1B6C5EB6}"/>
+            <pc:sldMk cId="190327432" sldId="328"/>
+            <ac:spMk id="3" creationId="{7BCAB8F7-4A52-3DB8-C33A-45305238029E}"/>
           </ac:spMkLst>
         </pc:spChg>
       </pc:sldChg>
-      <pc:sldChg chg="addSp modSp add mod">
-        <pc:chgData name="Renaud Leroy" userId="135fb8da-5d77-4f74-8269-9536d61f18e3" providerId="ADAL" clId="{E78863E9-63F1-4351-B732-0F17272A4588}" dt="2026-01-09T04:57:21.768" v="7082" actId="13242"/>
+      <pc:sldChg chg="modSp new mod">
+        <pc:chgData name="Renaud Leroy" userId="135fb8da-5d77-4f74-8269-9536d61f18e3" providerId="ADAL" clId="{B226C1E3-CEB0-47B2-AA19-D9A9FC1D34FF}" dt="2026-05-28T03:12:32.374" v="1741" actId="20577"/>
         <pc:sldMkLst>
           <pc:docMk/>
-          <pc:sldMk cId="3792445182" sldId="323"/>
+          <pc:sldMk cId="164165087" sldId="329"/>
         </pc:sldMkLst>
         <pc:spChg chg="mod">
-          <ac:chgData name="Renaud Leroy" userId="135fb8da-5d77-4f74-8269-9536d61f18e3" providerId="ADAL" clId="{E78863E9-63F1-4351-B732-0F17272A4588}" dt="2026-01-09T04:53:10.946" v="6925" actId="27636"/>
+          <ac:chgData name="Renaud Leroy" userId="135fb8da-5d77-4f74-8269-9536d61f18e3" providerId="ADAL" clId="{B226C1E3-CEB0-47B2-AA19-D9A9FC1D34FF}" dt="2026-05-28T02:59:07.519" v="664" actId="20577"/>
           <ac:spMkLst>
             <pc:docMk/>
-            <pc:sldMk cId="3792445182" sldId="323"/>
-            <ac:spMk id="3" creationId="{10281C4D-4E30-E74A-9149-CB438B49C886}"/>
+            <pc:sldMk cId="164165087" sldId="329"/>
+            <ac:spMk id="2" creationId="{85BB3398-6BF5-86CE-A56E-E8F606F56398}"/>
           </ac:spMkLst>
         </pc:spChg>
-        <pc:graphicFrameChg chg="add mod modGraphic">
-          <ac:chgData name="Renaud Leroy" userId="135fb8da-5d77-4f74-8269-9536d61f18e3" providerId="ADAL" clId="{E78863E9-63F1-4351-B732-0F17272A4588}" dt="2026-01-09T04:57:21.768" v="7082" actId="13242"/>
-          <ac:graphicFrameMkLst>
+        <pc:spChg chg="mod">
+          <ac:chgData name="Renaud Leroy" userId="135fb8da-5d77-4f74-8269-9536d61f18e3" providerId="ADAL" clId="{B226C1E3-CEB0-47B2-AA19-D9A9FC1D34FF}" dt="2026-05-28T03:12:32.374" v="1741" actId="20577"/>
+          <ac:spMkLst>
             <pc:docMk/>
-            <pc:sldMk cId="3792445182" sldId="323"/>
-            <ac:graphicFrameMk id="4" creationId="{A2695B55-736F-4EE7-F2EE-D0C0D6C78892}"/>
-          </ac:graphicFrameMkLst>
-        </pc:graphicFrameChg>
+            <pc:sldMk cId="164165087" sldId="329"/>
+            <ac:spMk id="3" creationId="{A3DC4CD0-97C4-BE01-D999-2836F990B73F}"/>
+          </ac:spMkLst>
+        </pc:spChg>
+      </pc:sldChg>
+      <pc:sldChg chg="addSp modSp new mod">
+        <pc:chgData name="Renaud Leroy" userId="135fb8da-5d77-4f74-8269-9536d61f18e3" providerId="ADAL" clId="{B226C1E3-CEB0-47B2-AA19-D9A9FC1D34FF}" dt="2026-05-28T03:10:23.281" v="1610" actId="12"/>
+        <pc:sldMkLst>
+          <pc:docMk/>
+          <pc:sldMk cId="1987794899" sldId="330"/>
+        </pc:sldMkLst>
+        <pc:spChg chg="mod">
+          <ac:chgData name="Renaud Leroy" userId="135fb8da-5d77-4f74-8269-9536d61f18e3" providerId="ADAL" clId="{B226C1E3-CEB0-47B2-AA19-D9A9FC1D34FF}" dt="2026-05-28T03:08:21.924" v="1568" actId="20577"/>
+          <ac:spMkLst>
+            <pc:docMk/>
+            <pc:sldMk cId="1987794899" sldId="330"/>
+            <ac:spMk id="2" creationId="{288591D0-361E-F5AB-2777-44B263326A20}"/>
+          </ac:spMkLst>
+        </pc:spChg>
+        <pc:spChg chg="mod">
+          <ac:chgData name="Renaud Leroy" userId="135fb8da-5d77-4f74-8269-9536d61f18e3" providerId="ADAL" clId="{B226C1E3-CEB0-47B2-AA19-D9A9FC1D34FF}" dt="2026-05-28T03:10:23.281" v="1610" actId="12"/>
+          <ac:spMkLst>
+            <pc:docMk/>
+            <pc:sldMk cId="1987794899" sldId="330"/>
+            <ac:spMk id="3" creationId="{63BD5F90-BF3A-7231-125C-17253C9C1101}"/>
+          </ac:spMkLst>
+        </pc:spChg>
+        <pc:picChg chg="add mod">
+          <ac:chgData name="Renaud Leroy" userId="135fb8da-5d77-4f74-8269-9536d61f18e3" providerId="ADAL" clId="{B226C1E3-CEB0-47B2-AA19-D9A9FC1D34FF}" dt="2026-05-28T03:08:33.828" v="1572" actId="14100"/>
+          <ac:picMkLst>
+            <pc:docMk/>
+            <pc:sldMk cId="1987794899" sldId="330"/>
+            <ac:picMk id="5" creationId="{4636B50B-BADC-9AAE-2054-81FCB87BA57E}"/>
+          </ac:picMkLst>
+        </pc:picChg>
+      </pc:sldChg>
+      <pc:sldChg chg="addSp delSp modSp new mod">
+        <pc:chgData name="Renaud Leroy" userId="135fb8da-5d77-4f74-8269-9536d61f18e3" providerId="ADAL" clId="{B226C1E3-CEB0-47B2-AA19-D9A9FC1D34FF}" dt="2026-05-28T03:19:48.133" v="1781" actId="14100"/>
+        <pc:sldMkLst>
+          <pc:docMk/>
+          <pc:sldMk cId="4100006947" sldId="331"/>
+        </pc:sldMkLst>
+        <pc:spChg chg="mod">
+          <ac:chgData name="Renaud Leroy" userId="135fb8da-5d77-4f74-8269-9536d61f18e3" providerId="ADAL" clId="{B226C1E3-CEB0-47B2-AA19-D9A9FC1D34FF}" dt="2026-05-28T03:15:30.473" v="1745" actId="20577"/>
+          <ac:spMkLst>
+            <pc:docMk/>
+            <pc:sldMk cId="4100006947" sldId="331"/>
+            <ac:spMk id="2" creationId="{CCB847D8-AE48-F2F7-E559-15CB6E0C508C}"/>
+          </ac:spMkLst>
+        </pc:spChg>
+        <pc:spChg chg="mod">
+          <ac:chgData name="Renaud Leroy" userId="135fb8da-5d77-4f74-8269-9536d61f18e3" providerId="ADAL" clId="{B226C1E3-CEB0-47B2-AA19-D9A9FC1D34FF}" dt="2026-05-28T03:18:58.963" v="1775" actId="20577"/>
+          <ac:spMkLst>
+            <pc:docMk/>
+            <pc:sldMk cId="4100006947" sldId="331"/>
+            <ac:spMk id="3" creationId="{C11AE0FB-CDBF-1930-8920-FDC2FBDB047C}"/>
+          </ac:spMkLst>
+        </pc:spChg>
+        <pc:spChg chg="add del mod">
+          <ac:chgData name="Renaud Leroy" userId="135fb8da-5d77-4f74-8269-9536d61f18e3" providerId="ADAL" clId="{B226C1E3-CEB0-47B2-AA19-D9A9FC1D34FF}" dt="2026-05-28T03:19:40.731" v="1778" actId="478"/>
+          <ac:spMkLst>
+            <pc:docMk/>
+            <pc:sldMk cId="4100006947" sldId="331"/>
+            <ac:spMk id="4" creationId="{68C7D5E1-1430-B710-488B-559674DED8BA}"/>
+          </ac:spMkLst>
+        </pc:spChg>
+        <pc:spChg chg="add mod">
+          <ac:chgData name="Renaud Leroy" userId="135fb8da-5d77-4f74-8269-9536d61f18e3" providerId="ADAL" clId="{B226C1E3-CEB0-47B2-AA19-D9A9FC1D34FF}" dt="2026-05-28T03:19:48.133" v="1781" actId="14100"/>
+          <ac:spMkLst>
+            <pc:docMk/>
+            <pc:sldMk cId="4100006947" sldId="331"/>
+            <ac:spMk id="10" creationId="{EECE7483-8378-C90E-0624-12AEF56F473C}"/>
+          </ac:spMkLst>
+        </pc:spChg>
+        <pc:picChg chg="add del mod">
+          <ac:chgData name="Renaud Leroy" userId="135fb8da-5d77-4f74-8269-9536d61f18e3" providerId="ADAL" clId="{B226C1E3-CEB0-47B2-AA19-D9A9FC1D34FF}" dt="2026-05-28T03:18:43.064" v="1770" actId="478"/>
+          <ac:picMkLst>
+            <pc:docMk/>
+            <pc:sldMk cId="4100006947" sldId="331"/>
+            <ac:picMk id="6" creationId="{B1FDEE51-12EF-FD18-12EC-A31D5C6C3AC5}"/>
+          </ac:picMkLst>
+        </pc:picChg>
+        <pc:picChg chg="add mod">
+          <ac:chgData name="Renaud Leroy" userId="135fb8da-5d77-4f74-8269-9536d61f18e3" providerId="ADAL" clId="{B226C1E3-CEB0-47B2-AA19-D9A9FC1D34FF}" dt="2026-05-28T03:18:49.674" v="1774" actId="1076"/>
+          <ac:picMkLst>
+            <pc:docMk/>
+            <pc:sldMk cId="4100006947" sldId="331"/>
+            <ac:picMk id="8" creationId="{846C2A85-EB14-ED99-3F5C-D347D5C12C51}"/>
+          </ac:picMkLst>
+        </pc:picChg>
+      </pc:sldChg>
+      <pc:sldChg chg="modSp new mod">
+        <pc:chgData name="Renaud Leroy" userId="135fb8da-5d77-4f74-8269-9536d61f18e3" providerId="ADAL" clId="{B226C1E3-CEB0-47B2-AA19-D9A9FC1D34FF}" dt="2026-05-28T03:27:54.223" v="2203" actId="5793"/>
+        <pc:sldMkLst>
+          <pc:docMk/>
+          <pc:sldMk cId="837948858" sldId="332"/>
+        </pc:sldMkLst>
+        <pc:spChg chg="mod">
+          <ac:chgData name="Renaud Leroy" userId="135fb8da-5d77-4f74-8269-9536d61f18e3" providerId="ADAL" clId="{B226C1E3-CEB0-47B2-AA19-D9A9FC1D34FF}" dt="2026-05-28T03:24:50.856" v="1790" actId="20577"/>
+          <ac:spMkLst>
+            <pc:docMk/>
+            <pc:sldMk cId="837948858" sldId="332"/>
+            <ac:spMk id="2" creationId="{6E93D75B-3014-91FE-1B07-CA6BF57F6F2A}"/>
+          </ac:spMkLst>
+        </pc:spChg>
+        <pc:spChg chg="mod">
+          <ac:chgData name="Renaud Leroy" userId="135fb8da-5d77-4f74-8269-9536d61f18e3" providerId="ADAL" clId="{B226C1E3-CEB0-47B2-AA19-D9A9FC1D34FF}" dt="2026-05-28T03:27:54.223" v="2203" actId="5793"/>
+          <ac:spMkLst>
+            <pc:docMk/>
+            <pc:sldMk cId="837948858" sldId="332"/>
+            <ac:spMk id="3" creationId="{72331860-CE1C-03B4-A67B-8829360D0E0F}"/>
+          </ac:spMkLst>
+        </pc:spChg>
       </pc:sldChg>
     </pc:docChg>
   </pc:docChgLst>
@@ -399,7 +493,7 @@
             <a:pPr rtl="0"/>
             <a:fld id="{5A14EC35-A083-4CA2-A629-54FB374745AC}" type="datetime1">
               <a:rPr lang="nl-NL" smtClean="0"/>
-              <a:t>12-2-2026</a:t>
+              <a:t>28-5-2026</a:t>
             </a:fld>
             <a:endParaRPr lang="en-US" dirty="0"/>
           </a:p>
@@ -569,7 +663,7 @@
             <a:pPr rtl="0"/>
             <a:fld id="{B32F82C2-DE9F-479D-95B3-30B2F9C315A1}" type="datetime1">
               <a:rPr lang="nl-NL" smtClean="0"/>
-              <a:t>12-2-2026</a:t>
+              <a:t>28-5-2026</a:t>
             </a:fld>
             <a:endParaRPr lang="en-US"/>
           </a:p>
@@ -1090,7 +1184,7 @@
             <a:pPr rtl="0"/>
             <a:fld id="{A83A1771-3711-4549-B223-6BFD613711ED}" type="datetime1">
               <a:rPr lang="nl-NL" smtClean="0"/>
-              <a:t>12-2-2026</a:t>
+              <a:t>28-5-2026</a:t>
             </a:fld>
             <a:endParaRPr lang="en-US" dirty="0"/>
           </a:p>
@@ -1297,7 +1391,7 @@
             <a:pPr rtl="0"/>
             <a:fld id="{D08EE877-7E72-4A3F-BF87-CE406B3EE1C5}" type="datetime1">
               <a:rPr lang="nl-NL" smtClean="0"/>
-              <a:t>12-2-2026</a:t>
+              <a:t>28-5-2026</a:t>
             </a:fld>
             <a:endParaRPr lang="en-US" dirty="0"/>
           </a:p>
@@ -1663,7 +1757,7 @@
             <a:pPr rtl="0"/>
             <a:fld id="{4CC54E9F-8ACA-4714-84BB-74BA71865A3C}" type="datetime1">
               <a:rPr lang="nl-NL" smtClean="0"/>
-              <a:t>12-2-2026</a:t>
+              <a:t>28-5-2026</a:t>
             </a:fld>
             <a:endParaRPr lang="en-US" dirty="0"/>
           </a:p>
@@ -2102,7 +2196,7 @@
             <a:pPr rtl="0"/>
             <a:fld id="{66D3D282-C61A-41D7-9714-7814FA67361E}" type="datetime1">
               <a:rPr lang="nl-NL" smtClean="0"/>
-              <a:t>12-2-2026</a:t>
+              <a:t>28-5-2026</a:t>
             </a:fld>
             <a:endParaRPr lang="en-US" dirty="0"/>
           </a:p>
@@ -2359,7 +2453,7 @@
             <a:pPr rtl="0"/>
             <a:fld id="{55CAE64B-8D6D-4B8F-BAE1-453EBC33DDBA}" type="datetime1">
               <a:rPr lang="nl-NL" smtClean="0"/>
-              <a:t>12-2-2026</a:t>
+              <a:t>28-5-2026</a:t>
             </a:fld>
             <a:endParaRPr lang="en-US" dirty="0"/>
           </a:p>
@@ -2785,7 +2879,7 @@
             <a:pPr rtl="0"/>
             <a:fld id="{7DD41833-08F9-41B2-81FC-2883EDAAEF19}" type="datetime1">
               <a:rPr lang="nl-NL" smtClean="0"/>
-              <a:t>12-2-2026</a:t>
+              <a:t>28-5-2026</a:t>
             </a:fld>
             <a:endParaRPr lang="en-US" dirty="0"/>
           </a:p>
@@ -2912,7 +3006,7 @@
             <a:pPr rtl="0"/>
             <a:fld id="{5DC9B189-AE00-478F-84A9-63330A766802}" type="datetime1">
               <a:rPr lang="nl-NL" smtClean="0"/>
-              <a:t>12-2-2026</a:t>
+              <a:t>28-5-2026</a:t>
             </a:fld>
             <a:endParaRPr lang="en-US" dirty="0"/>
           </a:p>
@@ -3010,7 +3104,7 @@
             <a:pPr rtl="0"/>
             <a:fld id="{C4D93972-B93F-42C7-B487-83AAA3F36605}" type="datetime1">
               <a:rPr lang="nl-NL" smtClean="0"/>
-              <a:t>12-2-2026</a:t>
+              <a:t>28-5-2026</a:t>
             </a:fld>
             <a:endParaRPr lang="en-US" dirty="0"/>
           </a:p>
@@ -3391,7 +3485,7 @@
             <a:pPr rtl="0"/>
             <a:fld id="{41CBEB4C-81CC-455E-9331-682EF29A1EAB}" type="datetime1">
               <a:rPr lang="nl-NL" smtClean="0"/>
-              <a:t>12-2-2026</a:t>
+              <a:t>28-5-2026</a:t>
             </a:fld>
             <a:endParaRPr lang="en-US" dirty="0"/>
           </a:p>
@@ -3689,7 +3783,7 @@
             <a:pPr rtl="0"/>
             <a:fld id="{87691925-8A1E-4010-8BF9-64E08633B604}" type="datetime1">
               <a:rPr lang="nl-NL" smtClean="0"/>
-              <a:t>12-2-2026</a:t>
+              <a:t>28-5-2026</a:t>
             </a:fld>
             <a:endParaRPr lang="en-US" dirty="0"/>
           </a:p>
@@ -3907,7 +4001,7 @@
             <a:pPr rtl="0"/>
             <a:fld id="{18D3FD7C-4B51-47DA-BCF4-68F2F2963CDA}" type="datetime1">
               <a:rPr lang="nl-NL" smtClean="0"/>
-              <a:t>12-2-2026</a:t>
+              <a:t>28-5-2026</a:t>
             </a:fld>
             <a:endParaRPr lang="en-US" dirty="0"/>
           </a:p>
@@ -8437,7 +8531,7 @@
             <a:pPr rtl="0"/>
             <a:fld id="{66D3D282-C61A-41D7-9714-7814FA67361E}" type="datetime1">
               <a:rPr lang="nl-NL" smtClean="0"/>
-              <a:t>12-2-2026</a:t>
+              <a:t>28-5-2026</a:t>
             </a:fld>
             <a:endParaRPr lang="en-US" dirty="0"/>
           </a:p>
@@ -12211,7 +12305,7 @@
             <a:pPr rtl="0"/>
             <a:fld id="{66D3D282-C61A-41D7-9714-7814FA67361E}" type="datetime1">
               <a:rPr lang="nl-NL" smtClean="0"/>
-              <a:t>12-2-2026</a:t>
+              <a:t>28-5-2026</a:t>
             </a:fld>
             <a:endParaRPr lang="en-US" dirty="0"/>
           </a:p>
@@ -17255,6 +17349,215 @@
   <p:cSld>
     <p:spTree>
       <p:nvGrpSpPr>
+        <p:cNvPr id="1" name=""/>
+        <p:cNvGrpSpPr/>
+        <p:nvPr/>
+      </p:nvGrpSpPr>
+      <p:grpSpPr>
+        <a:xfrm>
+          <a:off x="0" y="0"/>
+          <a:ext cx="0" cy="0"/>
+          <a:chOff x="0" y="0"/>
+          <a:chExt cx="0" cy="0"/>
+        </a:xfrm>
+      </p:grpSpPr>
+      <p:sp>
+        <p:nvSpPr>
+          <p:cNvPr id="2" name="Titel 1">
+            <a:extLst>
+              <a:ext uri="{FF2B5EF4-FFF2-40B4-BE49-F238E27FC236}">
+                <a16:creationId xmlns:a16="http://schemas.microsoft.com/office/drawing/2014/main" id="{E3D78D1B-1B6C-34C4-CC2E-ECDCCEF455F9}"/>
+              </a:ext>
+            </a:extLst>
+          </p:cNvPr>
+          <p:cNvSpPr>
+            <a:spLocks noGrp="1"/>
+          </p:cNvSpPr>
+          <p:nvPr>
+            <p:ph type="title"/>
+          </p:nvPr>
+        </p:nvSpPr>
+        <p:spPr/>
+        <p:txBody>
+          <a:bodyPr/>
+          <a:lstStyle/>
+          <a:p>
+            <a:r>
+              <a:rPr lang="nl-BE" dirty="0"/>
+              <a:t>Eigenschappen: randen</a:t>
+            </a:r>
+          </a:p>
+        </p:txBody>
+      </p:sp>
+      <p:sp>
+        <p:nvSpPr>
+          <p:cNvPr id="3" name="Tijdelijke aanduiding voor inhoud 2">
+            <a:extLst>
+              <a:ext uri="{FF2B5EF4-FFF2-40B4-BE49-F238E27FC236}">
+                <a16:creationId xmlns:a16="http://schemas.microsoft.com/office/drawing/2014/main" id="{3838F039-1A9D-80EF-C020-B8C3DB2CFC97}"/>
+              </a:ext>
+            </a:extLst>
+          </p:cNvPr>
+          <p:cNvSpPr>
+            <a:spLocks noGrp="1"/>
+          </p:cNvSpPr>
+          <p:nvPr>
+            <p:ph idx="1"/>
+          </p:nvPr>
+        </p:nvSpPr>
+        <p:spPr/>
+        <p:txBody>
+          <a:bodyPr/>
+          <a:lstStyle/>
+          <a:p>
+            <a:pPr marL="0" indent="0">
+              <a:buNone/>
+            </a:pPr>
+            <a:r>
+              <a:rPr lang="nl-BE" dirty="0">
+                <a:hlinkClick r:id="rId2"/>
+              </a:rPr>
+              <a:t>https://developer.mozilla.org/en-US/docs/Web/CSS/Reference/Properties/border</a:t>
+            </a:r>
+            <a:r>
+              <a:rPr lang="nl-BE" dirty="0"/>
+              <a:t> </a:t>
+            </a:r>
+          </a:p>
+          <a:p>
+            <a:pPr marL="0" indent="0">
+              <a:buNone/>
+            </a:pPr>
+            <a:endParaRPr lang="nl-BE" dirty="0"/>
+          </a:p>
+          <a:p>
+            <a:r>
+              <a:rPr lang="nl-BE" dirty="0"/>
+              <a:t>Border: stelt een rand in rond het element.</a:t>
+            </a:r>
+          </a:p>
+          <a:p>
+            <a:pPr lvl="1"/>
+            <a:r>
+              <a:rPr lang="nl-BE" dirty="0"/>
+              <a:t>In te stellen als </a:t>
+            </a:r>
+            <a:r>
+              <a:rPr lang="nl-BE" i="1" dirty="0"/>
+              <a:t>dikte stijl kleur</a:t>
+            </a:r>
+            <a:r>
+              <a:rPr lang="nl-BE" dirty="0"/>
+              <a:t>:</a:t>
+            </a:r>
+          </a:p>
+          <a:p>
+            <a:pPr lvl="2"/>
+            <a:r>
+              <a:rPr lang="nl-BE" dirty="0"/>
+              <a:t>Dikte: bv. 2px</a:t>
+            </a:r>
+          </a:p>
+          <a:p>
+            <a:pPr lvl="2"/>
+            <a:r>
+              <a:rPr lang="nl-BE" dirty="0">
+                <a:hlinkClick r:id="rId3"/>
+              </a:rPr>
+              <a:t>Stijl</a:t>
+            </a:r>
+            <a:r>
+              <a:rPr lang="nl-BE" dirty="0"/>
+              <a:t>: </a:t>
+            </a:r>
+            <a:r>
+              <a:rPr lang="nl-BE" dirty="0" err="1"/>
+              <a:t>solid</a:t>
+            </a:r>
+            <a:r>
+              <a:rPr lang="nl-BE" dirty="0"/>
+              <a:t> (lijn), </a:t>
+            </a:r>
+            <a:r>
+              <a:rPr lang="nl-BE" dirty="0" err="1"/>
+              <a:t>dashed</a:t>
+            </a:r>
+            <a:r>
+              <a:rPr lang="nl-BE" dirty="0"/>
+              <a:t> (streepjes), </a:t>
+            </a:r>
+            <a:r>
+              <a:rPr lang="nl-BE" dirty="0" err="1"/>
+              <a:t>dotted</a:t>
+            </a:r>
+            <a:r>
+              <a:rPr lang="nl-BE" dirty="0"/>
+              <a:t> (puntjes), </a:t>
+            </a:r>
+          </a:p>
+          <a:p>
+            <a:pPr lvl="2"/>
+            <a:r>
+              <a:rPr lang="nl-BE" dirty="0"/>
+              <a:t>Kleur: RGB, </a:t>
+            </a:r>
+          </a:p>
+          <a:p>
+            <a:pPr lvl="1"/>
+            <a:r>
+              <a:rPr lang="nl-BE" dirty="0"/>
+              <a:t>Border-radius: afronding van de hoeken (</a:t>
+            </a:r>
+            <a:r>
+              <a:rPr lang="nl-BE" dirty="0">
+                <a:hlinkClick r:id="rId4"/>
+              </a:rPr>
+              <a:t>https://developer.mozilla.org/en-US/docs/Web/CSS/Reference/Properties/border-radius</a:t>
+            </a:r>
+            <a:r>
+              <a:rPr lang="nl-BE" dirty="0"/>
+              <a:t> ):</a:t>
+            </a:r>
+          </a:p>
+          <a:p>
+            <a:pPr lvl="2"/>
+            <a:r>
+              <a:rPr lang="nl-BE" dirty="0"/>
+              <a:t>In te stellen als </a:t>
+            </a:r>
+            <a:r>
+              <a:rPr lang="nl-BE" dirty="0" err="1"/>
+              <a:t>px</a:t>
+            </a:r>
+            <a:r>
+              <a:rPr lang="nl-BE" dirty="0"/>
+              <a:t> (vast) of percentage (variabel)</a:t>
+            </a:r>
+          </a:p>
+          <a:p>
+            <a:pPr lvl="1"/>
+            <a:endParaRPr lang="nl-BE" i="1" dirty="0"/>
+          </a:p>
+        </p:txBody>
+      </p:sp>
+    </p:spTree>
+    <p:extLst>
+      <p:ext uri="{BB962C8B-B14F-4D97-AF65-F5344CB8AC3E}">
+        <p14:creationId xmlns:p14="http://schemas.microsoft.com/office/powerpoint/2010/main" val="1732912673"/>
+      </p:ext>
+    </p:extLst>
+  </p:cSld>
+  <p:clrMapOvr>
+    <a:masterClrMapping/>
+  </p:clrMapOvr>
+</p:sld>
+</file>
+
+<file path=ppt/slides/slide43.xml><?xml version="1.0" encoding="utf-8"?>
+<p:sld xmlns:a="http://schemas.openxmlformats.org/drawingml/2006/main" xmlns:r="http://schemas.openxmlformats.org/officeDocument/2006/relationships" xmlns:p="http://schemas.openxmlformats.org/presentationml/2006/main">
+  <p:cSld>
+    <p:spTree>
+      <p:nvGrpSpPr>
         <p:cNvPr id="1" name="">
           <a:extLst>
             <a:ext uri="{FF2B5EF4-FFF2-40B4-BE49-F238E27FC236}">
@@ -17484,7 +17787,7 @@
 </p:sld>
 </file>
 
-<file path=ppt/slides/slide43.xml><?xml version="1.0" encoding="utf-8"?>
+<file path=ppt/slides/slide44.xml><?xml version="1.0" encoding="utf-8"?>
 <p:sld xmlns:a="http://schemas.openxmlformats.org/drawingml/2006/main" xmlns:r="http://schemas.openxmlformats.org/officeDocument/2006/relationships" xmlns:p="http://schemas.openxmlformats.org/presentationml/2006/main">
   <p:cSld>
     <p:spTree>
@@ -17766,7 +18069,7 @@
 </p:sld>
 </file>
 
-<file path=ppt/slides/slide44.xml><?xml version="1.0" encoding="utf-8"?>
+<file path=ppt/slides/slide45.xml><?xml version="1.0" encoding="utf-8"?>
 <p:sld xmlns:a="http://schemas.openxmlformats.org/drawingml/2006/main" xmlns:r="http://schemas.openxmlformats.org/officeDocument/2006/relationships" xmlns:p="http://schemas.openxmlformats.org/presentationml/2006/main">
   <p:cSld>
     <p:spTree>
@@ -18017,7 +18320,1743 @@
 </p:sld>
 </file>
 
-<file path=ppt/slides/slide45.xml><?xml version="1.0" encoding="utf-8"?>
+<file path=ppt/slides/slide46.xml><?xml version="1.0" encoding="utf-8"?>
+<p:sld xmlns:a="http://schemas.openxmlformats.org/drawingml/2006/main" xmlns:r="http://schemas.openxmlformats.org/officeDocument/2006/relationships" xmlns:p="http://schemas.openxmlformats.org/presentationml/2006/main">
+  <p:cSld>
+    <p:spTree>
+      <p:nvGrpSpPr>
+        <p:cNvPr id="1" name=""/>
+        <p:cNvGrpSpPr/>
+        <p:nvPr/>
+      </p:nvGrpSpPr>
+      <p:grpSpPr>
+        <a:xfrm>
+          <a:off x="0" y="0"/>
+          <a:ext cx="0" cy="0"/>
+          <a:chOff x="0" y="0"/>
+          <a:chExt cx="0" cy="0"/>
+        </a:xfrm>
+      </p:grpSpPr>
+      <p:sp>
+        <p:nvSpPr>
+          <p:cNvPr id="2" name="Titel 1">
+            <a:extLst>
+              <a:ext uri="{FF2B5EF4-FFF2-40B4-BE49-F238E27FC236}">
+                <a16:creationId xmlns:a16="http://schemas.microsoft.com/office/drawing/2014/main" id="{CC3D1337-4C7C-C30C-2E35-8EEF6FA1A297}"/>
+              </a:ext>
+            </a:extLst>
+          </p:cNvPr>
+          <p:cNvSpPr>
+            <a:spLocks noGrp="1"/>
+          </p:cNvSpPr>
+          <p:nvPr>
+            <p:ph type="title"/>
+          </p:nvPr>
+        </p:nvSpPr>
+        <p:spPr/>
+        <p:txBody>
+          <a:bodyPr/>
+          <a:lstStyle/>
+          <a:p>
+            <a:r>
+              <a:rPr lang="nl-BE" dirty="0"/>
+              <a:t>CSS - variabelen</a:t>
+            </a:r>
+          </a:p>
+        </p:txBody>
+      </p:sp>
+      <p:sp>
+        <p:nvSpPr>
+          <p:cNvPr id="3" name="Tijdelijke aanduiding voor inhoud 2">
+            <a:extLst>
+              <a:ext uri="{FF2B5EF4-FFF2-40B4-BE49-F238E27FC236}">
+                <a16:creationId xmlns:a16="http://schemas.microsoft.com/office/drawing/2014/main" id="{4B2E592E-BB34-F2DA-E304-4DD33FC8FED9}"/>
+              </a:ext>
+            </a:extLst>
+          </p:cNvPr>
+          <p:cNvSpPr>
+            <a:spLocks noGrp="1"/>
+          </p:cNvSpPr>
+          <p:nvPr>
+            <p:ph idx="1"/>
+          </p:nvPr>
+        </p:nvSpPr>
+        <p:spPr/>
+        <p:txBody>
+          <a:bodyPr/>
+          <a:lstStyle/>
+          <a:p>
+            <a:r>
+              <a:rPr lang="nl-BE" dirty="0"/>
+              <a:t>Handig als je bepaalde waarden meermaals opnieuw wil gebruiken.</a:t>
+            </a:r>
+          </a:p>
+          <a:p>
+            <a:r>
+              <a:rPr lang="nl-BE" dirty="0"/>
+              <a:t>Je definieert een variabele in jouw CSS-bestand (:root)</a:t>
+            </a:r>
+          </a:p>
+          <a:p>
+            <a:r>
+              <a:rPr lang="nl-BE" dirty="0"/>
+              <a:t>Roept de variabele op met de functie var()</a:t>
+            </a:r>
+          </a:p>
+          <a:p>
+            <a:pPr lvl="1"/>
+            <a:r>
+              <a:rPr lang="nl-BE" dirty="0"/>
+              <a:t>Gebruik - -  voor de naam de variabele</a:t>
+            </a:r>
+          </a:p>
+        </p:txBody>
+      </p:sp>
+    </p:spTree>
+    <p:extLst>
+      <p:ext uri="{BB962C8B-B14F-4D97-AF65-F5344CB8AC3E}">
+        <p14:creationId xmlns:p14="http://schemas.microsoft.com/office/powerpoint/2010/main" val="2516393351"/>
+      </p:ext>
+    </p:extLst>
+  </p:cSld>
+  <p:clrMapOvr>
+    <a:masterClrMapping/>
+  </p:clrMapOvr>
+</p:sld>
+</file>
+
+<file path=ppt/slides/slide47.xml><?xml version="1.0" encoding="utf-8"?>
+<p:sld xmlns:a="http://schemas.openxmlformats.org/drawingml/2006/main" xmlns:r="http://schemas.openxmlformats.org/officeDocument/2006/relationships" xmlns:p="http://schemas.openxmlformats.org/presentationml/2006/main">
+  <p:cSld>
+    <p:spTree>
+      <p:nvGrpSpPr>
+        <p:cNvPr id="1" name="">
+          <a:extLst>
+            <a:ext uri="{FF2B5EF4-FFF2-40B4-BE49-F238E27FC236}">
+              <a16:creationId xmlns:a16="http://schemas.microsoft.com/office/drawing/2014/main" id="{4F7CFAFE-4E4E-7F16-F715-7C5BD2661D35}"/>
+            </a:ext>
+          </a:extLst>
+        </p:cNvPr>
+        <p:cNvGrpSpPr/>
+        <p:nvPr/>
+      </p:nvGrpSpPr>
+      <p:grpSpPr>
+        <a:xfrm>
+          <a:off x="0" y="0"/>
+          <a:ext cx="0" cy="0"/>
+          <a:chOff x="0" y="0"/>
+          <a:chExt cx="0" cy="0"/>
+        </a:xfrm>
+      </p:grpSpPr>
+      <p:sp>
+        <p:nvSpPr>
+          <p:cNvPr id="2" name="Titel 1">
+            <a:extLst>
+              <a:ext uri="{FF2B5EF4-FFF2-40B4-BE49-F238E27FC236}">
+                <a16:creationId xmlns:a16="http://schemas.microsoft.com/office/drawing/2014/main" id="{A2447EA3-0130-6219-4B5B-4A905CAACD2C}"/>
+              </a:ext>
+            </a:extLst>
+          </p:cNvPr>
+          <p:cNvSpPr>
+            <a:spLocks noGrp="1"/>
+          </p:cNvSpPr>
+          <p:nvPr>
+            <p:ph type="title"/>
+          </p:nvPr>
+        </p:nvSpPr>
+        <p:spPr/>
+        <p:txBody>
+          <a:bodyPr/>
+          <a:lstStyle/>
+          <a:p>
+            <a:r>
+              <a:rPr lang="nl-BE" dirty="0"/>
+              <a:t>CSS - variabelen</a:t>
+            </a:r>
+          </a:p>
+        </p:txBody>
+      </p:sp>
+      <p:sp>
+        <p:nvSpPr>
+          <p:cNvPr id="3" name="Tijdelijke aanduiding voor inhoud 2">
+            <a:extLst>
+              <a:ext uri="{FF2B5EF4-FFF2-40B4-BE49-F238E27FC236}">
+                <a16:creationId xmlns:a16="http://schemas.microsoft.com/office/drawing/2014/main" id="{7BCAB8F7-4A52-3DB8-C33A-45305238029E}"/>
+              </a:ext>
+            </a:extLst>
+          </p:cNvPr>
+          <p:cNvSpPr>
+            <a:spLocks noGrp="1"/>
+          </p:cNvSpPr>
+          <p:nvPr>
+            <p:ph idx="1"/>
+          </p:nvPr>
+        </p:nvSpPr>
+        <p:spPr/>
+        <p:txBody>
+          <a:bodyPr>
+            <a:normAutofit fontScale="62500" lnSpcReduction="20000"/>
+          </a:bodyPr>
+          <a:lstStyle/>
+          <a:p>
+            <a:pPr marL="0" indent="0">
+              <a:buNone/>
+            </a:pPr>
+            <a:r>
+              <a:rPr lang="nl-BE" dirty="0"/>
+              <a:t>:root{</a:t>
+            </a:r>
+          </a:p>
+          <a:p>
+            <a:pPr marL="0" indent="0">
+              <a:buNone/>
+            </a:pPr>
+            <a:r>
+              <a:rPr lang="nl-BE" dirty="0"/>
+              <a:t>    --rood: </a:t>
+            </a:r>
+            <a:r>
+              <a:rPr lang="nl-BE" dirty="0" err="1"/>
+              <a:t>rgba</a:t>
+            </a:r>
+            <a:r>
+              <a:rPr lang="nl-BE" dirty="0"/>
+              <a:t>(228, 68, 32, 0.886);</a:t>
+            </a:r>
+          </a:p>
+          <a:p>
+            <a:pPr marL="0" indent="0">
+              <a:buNone/>
+            </a:pPr>
+            <a:r>
+              <a:rPr lang="nl-BE" dirty="0"/>
+              <a:t>    --groen: </a:t>
+            </a:r>
+            <a:r>
+              <a:rPr lang="nl-BE" dirty="0" err="1"/>
+              <a:t>rgba</a:t>
+            </a:r>
+            <a:r>
+              <a:rPr lang="nl-BE" dirty="0"/>
+              <a:t>(148, 235, 17, 0.897);</a:t>
+            </a:r>
+          </a:p>
+          <a:p>
+            <a:pPr marL="0" indent="0">
+              <a:buNone/>
+            </a:pPr>
+            <a:r>
+              <a:rPr lang="nl-BE" dirty="0"/>
+              <a:t>}</a:t>
+            </a:r>
+          </a:p>
+          <a:p>
+            <a:pPr marL="0" indent="0">
+              <a:buNone/>
+            </a:pPr>
+            <a:br>
+              <a:rPr lang="nl-BE" dirty="0"/>
+            </a:br>
+            <a:endParaRPr lang="nl-BE" dirty="0"/>
+          </a:p>
+          <a:p>
+            <a:pPr marL="0" indent="0">
+              <a:buNone/>
+            </a:pPr>
+            <a:r>
+              <a:rPr lang="nl-BE" dirty="0"/>
+              <a:t>body{</a:t>
+            </a:r>
+          </a:p>
+          <a:p>
+            <a:pPr marL="0" indent="0">
+              <a:buNone/>
+            </a:pPr>
+            <a:r>
+              <a:rPr lang="nl-BE" dirty="0"/>
+              <a:t>    background-</a:t>
+            </a:r>
+            <a:r>
+              <a:rPr lang="nl-BE" dirty="0" err="1"/>
+              <a:t>color</a:t>
+            </a:r>
+            <a:r>
+              <a:rPr lang="nl-BE" dirty="0"/>
+              <a:t>: var(--groen);</a:t>
+            </a:r>
+          </a:p>
+          <a:p>
+            <a:pPr marL="0" indent="0">
+              <a:buNone/>
+            </a:pPr>
+            <a:r>
+              <a:rPr lang="nl-BE" dirty="0"/>
+              <a:t>}</a:t>
+            </a:r>
+          </a:p>
+          <a:p>
+            <a:pPr marL="0" indent="0">
+              <a:buNone/>
+            </a:pPr>
+            <a:br>
+              <a:rPr lang="nl-BE" dirty="0"/>
+            </a:br>
+            <a:endParaRPr lang="nl-BE" dirty="0"/>
+          </a:p>
+          <a:p>
+            <a:pPr marL="0" indent="0">
+              <a:buNone/>
+            </a:pPr>
+            <a:r>
+              <a:rPr lang="nl-BE" dirty="0"/>
+              <a:t>p{</a:t>
+            </a:r>
+          </a:p>
+          <a:p>
+            <a:pPr marL="0" indent="0">
+              <a:buNone/>
+            </a:pPr>
+            <a:r>
+              <a:rPr lang="nl-BE" dirty="0"/>
+              <a:t>    background-</a:t>
+            </a:r>
+            <a:r>
+              <a:rPr lang="nl-BE" dirty="0" err="1"/>
+              <a:t>color</a:t>
+            </a:r>
+            <a:r>
+              <a:rPr lang="nl-BE" dirty="0"/>
+              <a:t>: var(--rood);</a:t>
+            </a:r>
+          </a:p>
+          <a:p>
+            <a:pPr marL="0" indent="0">
+              <a:buNone/>
+            </a:pPr>
+            <a:r>
+              <a:rPr lang="nl-BE" dirty="0"/>
+              <a:t>}</a:t>
+            </a:r>
+          </a:p>
+        </p:txBody>
+      </p:sp>
+    </p:spTree>
+    <p:extLst>
+      <p:ext uri="{BB962C8B-B14F-4D97-AF65-F5344CB8AC3E}">
+        <p14:creationId xmlns:p14="http://schemas.microsoft.com/office/powerpoint/2010/main" val="190327432"/>
+      </p:ext>
+    </p:extLst>
+  </p:cSld>
+  <p:clrMapOvr>
+    <a:masterClrMapping/>
+  </p:clrMapOvr>
+</p:sld>
+</file>
+
+<file path=ppt/slides/slide48.xml><?xml version="1.0" encoding="utf-8"?>
+<p:sld xmlns:a="http://schemas.openxmlformats.org/drawingml/2006/main" xmlns:r="http://schemas.openxmlformats.org/officeDocument/2006/relationships" xmlns:p="http://schemas.openxmlformats.org/presentationml/2006/main">
+  <p:cSld>
+    <p:spTree>
+      <p:nvGrpSpPr>
+        <p:cNvPr id="1" name=""/>
+        <p:cNvGrpSpPr/>
+        <p:nvPr/>
+      </p:nvGrpSpPr>
+      <p:grpSpPr>
+        <a:xfrm>
+          <a:off x="0" y="0"/>
+          <a:ext cx="0" cy="0"/>
+          <a:chOff x="0" y="0"/>
+          <a:chExt cx="0" cy="0"/>
+        </a:xfrm>
+      </p:grpSpPr>
+      <p:sp>
+        <p:nvSpPr>
+          <p:cNvPr id="2" name="Titel 1">
+            <a:extLst>
+              <a:ext uri="{FF2B5EF4-FFF2-40B4-BE49-F238E27FC236}">
+                <a16:creationId xmlns:a16="http://schemas.microsoft.com/office/drawing/2014/main" id="{85BB3398-6BF5-86CE-A56E-E8F606F56398}"/>
+              </a:ext>
+            </a:extLst>
+          </p:cNvPr>
+          <p:cNvSpPr>
+            <a:spLocks noGrp="1"/>
+          </p:cNvSpPr>
+          <p:nvPr>
+            <p:ph type="title"/>
+          </p:nvPr>
+        </p:nvSpPr>
+        <p:spPr/>
+        <p:txBody>
+          <a:bodyPr/>
+          <a:lstStyle/>
+          <a:p>
+            <a:r>
+              <a:rPr lang="nl-BE" dirty="0"/>
+              <a:t>EM / REM</a:t>
+            </a:r>
+          </a:p>
+        </p:txBody>
+      </p:sp>
+      <p:sp>
+        <p:nvSpPr>
+          <p:cNvPr id="3" name="Tijdelijke aanduiding voor inhoud 2">
+            <a:extLst>
+              <a:ext uri="{FF2B5EF4-FFF2-40B4-BE49-F238E27FC236}">
+                <a16:creationId xmlns:a16="http://schemas.microsoft.com/office/drawing/2014/main" id="{A3DC4CD0-97C4-BE01-D999-2836F990B73F}"/>
+              </a:ext>
+            </a:extLst>
+          </p:cNvPr>
+          <p:cNvSpPr>
+            <a:spLocks noGrp="1"/>
+          </p:cNvSpPr>
+          <p:nvPr>
+            <p:ph idx="1"/>
+          </p:nvPr>
+        </p:nvSpPr>
+        <p:spPr/>
+        <p:txBody>
+          <a:bodyPr/>
+          <a:lstStyle/>
+          <a:p>
+            <a:r>
+              <a:rPr lang="nl-BE" dirty="0"/>
+              <a:t>Vaak gebruik je verschillende soorten van groottes (tekst,  afstanden, …). Als je hier zelf steeds een vaste waarde aan koppelt (bv. 20 </a:t>
+            </a:r>
+            <a:r>
+              <a:rPr lang="nl-BE" dirty="0" err="1"/>
+              <a:t>px</a:t>
+            </a:r>
+            <a:r>
+              <a:rPr lang="nl-BE" dirty="0"/>
+              <a:t>), dan moet je dit goed nakijken als je een andere waarde instelt voor een andere tekst die groter/kleiner moet zijn.</a:t>
+            </a:r>
+          </a:p>
+          <a:p>
+            <a:r>
+              <a:rPr lang="nl-BE" dirty="0"/>
+              <a:t>Je kan hiervoor variabelen gebruiken, maar het aantal variabelen zou exploderen, wat niet handig is.</a:t>
+            </a:r>
+          </a:p>
+          <a:p>
+            <a:r>
+              <a:rPr lang="nl-BE" dirty="0"/>
+              <a:t>Oplossing: </a:t>
+            </a:r>
+            <a:r>
+              <a:rPr lang="nl-BE" dirty="0" err="1"/>
+              <a:t>em</a:t>
+            </a:r>
+            <a:r>
+              <a:rPr lang="nl-BE" dirty="0"/>
+              <a:t>/rem</a:t>
+            </a:r>
+          </a:p>
+          <a:p>
+            <a:r>
+              <a:rPr lang="nl-BE" dirty="0" err="1"/>
+              <a:t>em</a:t>
+            </a:r>
+            <a:r>
+              <a:rPr lang="nl-BE" dirty="0"/>
+              <a:t> = de factor voor de tekstgrootte van het </a:t>
+            </a:r>
+            <a:r>
+              <a:rPr lang="nl-BE" dirty="0" err="1"/>
+              <a:t>parent</a:t>
+            </a:r>
+            <a:r>
+              <a:rPr lang="nl-BE" dirty="0"/>
+              <a:t>-element. Als je bv. voor 0.5em kiest, dan zal jouw tekst half zo groot zijn als de tekst in de bovenliggende container.</a:t>
+            </a:r>
+          </a:p>
+          <a:p>
+            <a:r>
+              <a:rPr lang="nl-BE" dirty="0"/>
+              <a:t>rem = hetzelfde als </a:t>
+            </a:r>
+            <a:r>
+              <a:rPr lang="nl-BE" dirty="0" err="1"/>
+              <a:t>em</a:t>
+            </a:r>
+            <a:r>
+              <a:rPr lang="nl-BE" dirty="0"/>
+              <a:t>, maar dan wordt er steeds gekeken naar de font-</a:t>
+            </a:r>
+            <a:r>
+              <a:rPr lang="nl-BE" dirty="0" err="1"/>
+              <a:t>size</a:t>
+            </a:r>
+            <a:r>
+              <a:rPr lang="nl-BE" dirty="0"/>
+              <a:t> van de root-tag (rem = root </a:t>
+            </a:r>
+            <a:r>
+              <a:rPr lang="nl-BE" dirty="0" err="1"/>
+              <a:t>em</a:t>
+            </a:r>
+            <a:r>
+              <a:rPr lang="nl-BE" dirty="0"/>
+              <a:t>)</a:t>
+            </a:r>
+          </a:p>
+        </p:txBody>
+      </p:sp>
+    </p:spTree>
+    <p:extLst>
+      <p:ext uri="{BB962C8B-B14F-4D97-AF65-F5344CB8AC3E}">
+        <p14:creationId xmlns:p14="http://schemas.microsoft.com/office/powerpoint/2010/main" val="164165087"/>
+      </p:ext>
+    </p:extLst>
+  </p:cSld>
+  <p:clrMapOvr>
+    <a:masterClrMapping/>
+  </p:clrMapOvr>
+</p:sld>
+</file>
+
+<file path=ppt/slides/slide49.xml><?xml version="1.0" encoding="utf-8"?>
+<p:sld xmlns:a="http://schemas.openxmlformats.org/drawingml/2006/main" xmlns:r="http://schemas.openxmlformats.org/officeDocument/2006/relationships" xmlns:p="http://schemas.openxmlformats.org/presentationml/2006/main">
+  <p:cSld>
+    <p:spTree>
+      <p:nvGrpSpPr>
+        <p:cNvPr id="1" name=""/>
+        <p:cNvGrpSpPr/>
+        <p:nvPr/>
+      </p:nvGrpSpPr>
+      <p:grpSpPr>
+        <a:xfrm>
+          <a:off x="0" y="0"/>
+          <a:ext cx="0" cy="0"/>
+          <a:chOff x="0" y="0"/>
+          <a:chExt cx="0" cy="0"/>
+        </a:xfrm>
+      </p:grpSpPr>
+      <p:sp>
+        <p:nvSpPr>
+          <p:cNvPr id="2" name="Titel 1">
+            <a:extLst>
+              <a:ext uri="{FF2B5EF4-FFF2-40B4-BE49-F238E27FC236}">
+                <a16:creationId xmlns:a16="http://schemas.microsoft.com/office/drawing/2014/main" id="{288591D0-361E-F5AB-2777-44B263326A20}"/>
+              </a:ext>
+            </a:extLst>
+          </p:cNvPr>
+          <p:cNvSpPr>
+            <a:spLocks noGrp="1"/>
+          </p:cNvSpPr>
+          <p:nvPr>
+            <p:ph type="title"/>
+          </p:nvPr>
+        </p:nvSpPr>
+        <p:spPr/>
+        <p:txBody>
+          <a:bodyPr/>
+          <a:lstStyle/>
+          <a:p>
+            <a:r>
+              <a:rPr lang="nl-BE" dirty="0"/>
+              <a:t>EM</a:t>
+            </a:r>
+          </a:p>
+        </p:txBody>
+      </p:sp>
+      <p:sp>
+        <p:nvSpPr>
+          <p:cNvPr id="3" name="Tijdelijke aanduiding voor inhoud 2">
+            <a:extLst>
+              <a:ext uri="{FF2B5EF4-FFF2-40B4-BE49-F238E27FC236}">
+                <a16:creationId xmlns:a16="http://schemas.microsoft.com/office/drawing/2014/main" id="{63BD5F90-BF3A-7231-125C-17253C9C1101}"/>
+              </a:ext>
+            </a:extLst>
+          </p:cNvPr>
+          <p:cNvSpPr>
+            <a:spLocks noGrp="1"/>
+          </p:cNvSpPr>
+          <p:nvPr>
+            <p:ph idx="1"/>
+          </p:nvPr>
+        </p:nvSpPr>
+        <p:spPr/>
+        <p:txBody>
+          <a:bodyPr>
+            <a:normAutofit fontScale="92500" lnSpcReduction="10000"/>
+          </a:bodyPr>
+          <a:lstStyle/>
+          <a:p>
+            <a:pPr marL="0" indent="0">
+              <a:buNone/>
+            </a:pPr>
+            <a:r>
+              <a:rPr lang="nl-BE" dirty="0"/>
+              <a:t>&lt;p&gt;Dit is &lt;span&gt;kleinere&lt;/span&gt; tekst.&lt;/p&gt;</a:t>
+            </a:r>
+          </a:p>
+          <a:p>
+            <a:pPr marL="0" indent="0">
+              <a:buNone/>
+            </a:pPr>
+            <a:endParaRPr lang="nl-BE" dirty="0"/>
+          </a:p>
+          <a:p>
+            <a:pPr marL="0" indent="0">
+              <a:buNone/>
+            </a:pPr>
+            <a:r>
+              <a:rPr lang="nl-BE" dirty="0"/>
+              <a:t>p{</a:t>
+            </a:r>
+          </a:p>
+          <a:p>
+            <a:pPr marL="0" indent="0">
+              <a:buNone/>
+            </a:pPr>
+            <a:r>
+              <a:rPr lang="nl-BE" dirty="0"/>
+              <a:t>    font-</a:t>
+            </a:r>
+            <a:r>
+              <a:rPr lang="nl-BE" dirty="0" err="1"/>
+              <a:t>size</a:t>
+            </a:r>
+            <a:r>
+              <a:rPr lang="nl-BE" dirty="0"/>
+              <a:t>: 20px;</a:t>
+            </a:r>
+          </a:p>
+          <a:p>
+            <a:pPr marL="0" indent="0">
+              <a:buNone/>
+            </a:pPr>
+            <a:r>
+              <a:rPr lang="nl-BE" dirty="0"/>
+              <a:t>}</a:t>
+            </a:r>
+          </a:p>
+          <a:p>
+            <a:pPr marL="0" indent="0">
+              <a:buNone/>
+            </a:pPr>
+            <a:br>
+              <a:rPr lang="nl-BE" dirty="0"/>
+            </a:br>
+            <a:endParaRPr lang="nl-BE" dirty="0"/>
+          </a:p>
+          <a:p>
+            <a:pPr marL="0" indent="0">
+              <a:buNone/>
+            </a:pPr>
+            <a:r>
+              <a:rPr lang="nl-BE" dirty="0"/>
+              <a:t>span{</a:t>
+            </a:r>
+          </a:p>
+          <a:p>
+            <a:pPr marL="0" indent="0">
+              <a:buNone/>
+            </a:pPr>
+            <a:r>
+              <a:rPr lang="nl-BE" dirty="0"/>
+              <a:t>    font-</a:t>
+            </a:r>
+            <a:r>
+              <a:rPr lang="nl-BE" dirty="0" err="1"/>
+              <a:t>size</a:t>
+            </a:r>
+            <a:r>
+              <a:rPr lang="nl-BE" dirty="0"/>
+              <a:t>: 0.5em; /* 20px * 0.5 = 10px */</a:t>
+            </a:r>
+          </a:p>
+          <a:p>
+            <a:pPr marL="0" indent="0">
+              <a:buNone/>
+            </a:pPr>
+            <a:r>
+              <a:rPr lang="nl-BE" dirty="0"/>
+              <a:t>}</a:t>
+            </a:r>
+          </a:p>
+          <a:p>
+            <a:pPr marL="0" indent="0">
+              <a:buNone/>
+            </a:pPr>
+            <a:endParaRPr lang="nl-BE" dirty="0"/>
+          </a:p>
+        </p:txBody>
+      </p:sp>
+      <p:pic>
+        <p:nvPicPr>
+          <p:cNvPr id="5" name="Afbeelding 4">
+            <a:extLst>
+              <a:ext uri="{FF2B5EF4-FFF2-40B4-BE49-F238E27FC236}">
+                <a16:creationId xmlns:a16="http://schemas.microsoft.com/office/drawing/2014/main" id="{4636B50B-BADC-9AAE-2054-81FCB87BA57E}"/>
+              </a:ext>
+            </a:extLst>
+          </p:cNvPr>
+          <p:cNvPicPr>
+            <a:picLocks noChangeAspect="1"/>
+          </p:cNvPicPr>
+          <p:nvPr/>
+        </p:nvPicPr>
+        <p:blipFill>
+          <a:blip r:embed="rId2"/>
+          <a:stretch>
+            <a:fillRect/>
+          </a:stretch>
+        </p:blipFill>
+        <p:spPr>
+          <a:xfrm>
+            <a:off x="7459943" y="2841615"/>
+            <a:ext cx="3149413" cy="815985"/>
+          </a:xfrm>
+          <a:prstGeom prst="rect">
+            <a:avLst/>
+          </a:prstGeom>
+        </p:spPr>
+      </p:pic>
+    </p:spTree>
+    <p:extLst>
+      <p:ext uri="{BB962C8B-B14F-4D97-AF65-F5344CB8AC3E}">
+        <p14:creationId xmlns:p14="http://schemas.microsoft.com/office/powerpoint/2010/main" val="1987794899"/>
+      </p:ext>
+    </p:extLst>
+  </p:cSld>
+  <p:clrMapOvr>
+    <a:masterClrMapping/>
+  </p:clrMapOvr>
+</p:sld>
+</file>
+
+<file path=ppt/slides/slide5.xml><?xml version="1.0" encoding="utf-8"?>
+<p:sld xmlns:a="http://schemas.openxmlformats.org/drawingml/2006/main" xmlns:r="http://schemas.openxmlformats.org/officeDocument/2006/relationships" xmlns:p="http://schemas.openxmlformats.org/presentationml/2006/main">
+  <p:cSld>
+    <p:spTree>
+      <p:nvGrpSpPr>
+        <p:cNvPr id="1" name=""/>
+        <p:cNvGrpSpPr/>
+        <p:nvPr/>
+      </p:nvGrpSpPr>
+      <p:grpSpPr>
+        <a:xfrm>
+          <a:off x="0" y="0"/>
+          <a:ext cx="0" cy="0"/>
+          <a:chOff x="0" y="0"/>
+          <a:chExt cx="0" cy="0"/>
+        </a:xfrm>
+      </p:grpSpPr>
+      <p:sp>
+        <p:nvSpPr>
+          <p:cNvPr id="2" name="Titel 1">
+            <a:extLst>
+              <a:ext uri="{FF2B5EF4-FFF2-40B4-BE49-F238E27FC236}">
+                <a16:creationId xmlns:a16="http://schemas.microsoft.com/office/drawing/2014/main" id="{23391728-44D9-7E04-2E98-F840EAA6FA4E}"/>
+              </a:ext>
+            </a:extLst>
+          </p:cNvPr>
+          <p:cNvSpPr>
+            <a:spLocks noGrp="1"/>
+          </p:cNvSpPr>
+          <p:nvPr>
+            <p:ph type="title"/>
+          </p:nvPr>
+        </p:nvSpPr>
+        <p:spPr/>
+        <p:txBody>
+          <a:bodyPr/>
+          <a:lstStyle/>
+          <a:p>
+            <a:r>
+              <a:rPr lang="nl-BE" dirty="0"/>
+              <a:t>HTML</a:t>
+            </a:r>
+          </a:p>
+        </p:txBody>
+      </p:sp>
+      <p:sp>
+        <p:nvSpPr>
+          <p:cNvPr id="3" name="Tijdelijke aanduiding voor inhoud 2">
+            <a:extLst>
+              <a:ext uri="{FF2B5EF4-FFF2-40B4-BE49-F238E27FC236}">
+                <a16:creationId xmlns:a16="http://schemas.microsoft.com/office/drawing/2014/main" id="{3C0D5720-7289-3532-3E4D-957E526103E6}"/>
+              </a:ext>
+            </a:extLst>
+          </p:cNvPr>
+          <p:cNvSpPr>
+            <a:spLocks noGrp="1"/>
+          </p:cNvSpPr>
+          <p:nvPr>
+            <p:ph idx="1"/>
+          </p:nvPr>
+        </p:nvSpPr>
+        <p:spPr/>
+        <p:txBody>
+          <a:bodyPr/>
+          <a:lstStyle/>
+          <a:p>
+            <a:r>
+              <a:rPr lang="nl-BE"/>
+              <a:t>Bovenste tag die alle andere tags (rechtstreeks of onrechtstreeks) bevat</a:t>
+            </a:r>
+            <a:r>
+              <a:rPr lang="nl-BE" dirty="0"/>
+              <a:t>.</a:t>
+            </a:r>
+          </a:p>
+          <a:p>
+            <a:r>
+              <a:rPr lang="nl-BE" dirty="0"/>
+              <a:t>&lt;html&gt;&lt;/html&gt;</a:t>
+            </a:r>
+          </a:p>
+        </p:txBody>
+      </p:sp>
+    </p:spTree>
+    <p:extLst>
+      <p:ext uri="{BB962C8B-B14F-4D97-AF65-F5344CB8AC3E}">
+        <p14:creationId xmlns:p14="http://schemas.microsoft.com/office/powerpoint/2010/main" val="1660195467"/>
+      </p:ext>
+    </p:extLst>
+  </p:cSld>
+  <p:clrMapOvr>
+    <a:masterClrMapping/>
+  </p:clrMapOvr>
+</p:sld>
+</file>
+
+<file path=ppt/slides/slide50.xml><?xml version="1.0" encoding="utf-8"?>
+<p:sld xmlns:a="http://schemas.openxmlformats.org/drawingml/2006/main" xmlns:r="http://schemas.openxmlformats.org/officeDocument/2006/relationships" xmlns:p="http://schemas.openxmlformats.org/presentationml/2006/main">
+  <p:cSld>
+    <p:spTree>
+      <p:nvGrpSpPr>
+        <p:cNvPr id="1" name=""/>
+        <p:cNvGrpSpPr/>
+        <p:nvPr/>
+      </p:nvGrpSpPr>
+      <p:grpSpPr>
+        <a:xfrm>
+          <a:off x="0" y="0"/>
+          <a:ext cx="0" cy="0"/>
+          <a:chOff x="0" y="0"/>
+          <a:chExt cx="0" cy="0"/>
+        </a:xfrm>
+      </p:grpSpPr>
+      <p:sp>
+        <p:nvSpPr>
+          <p:cNvPr id="2" name="Titel 1">
+            <a:extLst>
+              <a:ext uri="{FF2B5EF4-FFF2-40B4-BE49-F238E27FC236}">
+                <a16:creationId xmlns:a16="http://schemas.microsoft.com/office/drawing/2014/main" id="{CCB847D8-AE48-F2F7-E559-15CB6E0C508C}"/>
+              </a:ext>
+            </a:extLst>
+          </p:cNvPr>
+          <p:cNvSpPr>
+            <a:spLocks noGrp="1"/>
+          </p:cNvSpPr>
+          <p:nvPr>
+            <p:ph type="title"/>
+          </p:nvPr>
+        </p:nvSpPr>
+        <p:spPr/>
+        <p:txBody>
+          <a:bodyPr/>
+          <a:lstStyle/>
+          <a:p>
+            <a:r>
+              <a:rPr lang="nl-BE" dirty="0"/>
+              <a:t>REM</a:t>
+            </a:r>
+          </a:p>
+        </p:txBody>
+      </p:sp>
+      <p:sp>
+        <p:nvSpPr>
+          <p:cNvPr id="3" name="Tijdelijke aanduiding voor inhoud 2">
+            <a:extLst>
+              <a:ext uri="{FF2B5EF4-FFF2-40B4-BE49-F238E27FC236}">
+                <a16:creationId xmlns:a16="http://schemas.microsoft.com/office/drawing/2014/main" id="{C11AE0FB-CDBF-1930-8920-FDC2FBDB047C}"/>
+              </a:ext>
+            </a:extLst>
+          </p:cNvPr>
+          <p:cNvSpPr>
+            <a:spLocks noGrp="1"/>
+          </p:cNvSpPr>
+          <p:nvPr>
+            <p:ph idx="1"/>
+          </p:nvPr>
+        </p:nvSpPr>
+        <p:spPr>
+          <a:xfrm>
+            <a:off x="581193" y="2340864"/>
+            <a:ext cx="4194008" cy="3634486"/>
+          </a:xfrm>
+        </p:spPr>
+        <p:txBody>
+          <a:bodyPr>
+            <a:normAutofit fontScale="77500" lnSpcReduction="20000"/>
+          </a:bodyPr>
+          <a:lstStyle/>
+          <a:p>
+            <a:pPr marL="0" indent="0">
+              <a:buNone/>
+            </a:pPr>
+            <a:r>
+              <a:rPr lang="nl-BE" dirty="0"/>
+              <a:t>html {</a:t>
+            </a:r>
+          </a:p>
+          <a:p>
+            <a:pPr marL="0" indent="0">
+              <a:buNone/>
+            </a:pPr>
+            <a:r>
+              <a:rPr lang="nl-BE" dirty="0"/>
+              <a:t>    font-</a:t>
+            </a:r>
+            <a:r>
+              <a:rPr lang="nl-BE" dirty="0" err="1"/>
+              <a:t>size</a:t>
+            </a:r>
+            <a:r>
+              <a:rPr lang="nl-BE" dirty="0"/>
+              <a:t>: 20px;</a:t>
+            </a:r>
+          </a:p>
+          <a:p>
+            <a:pPr marL="0" indent="0">
+              <a:buNone/>
+            </a:pPr>
+            <a:r>
+              <a:rPr lang="nl-BE" dirty="0"/>
+              <a:t>}</a:t>
+            </a:r>
+          </a:p>
+          <a:p>
+            <a:pPr marL="0" indent="0">
+              <a:buNone/>
+            </a:pPr>
+            <a:r>
+              <a:rPr lang="nl-BE" dirty="0"/>
+              <a:t>h1{</a:t>
+            </a:r>
+          </a:p>
+          <a:p>
+            <a:pPr marL="0" indent="0">
+              <a:buNone/>
+            </a:pPr>
+            <a:r>
+              <a:rPr lang="nl-BE" dirty="0"/>
+              <a:t>    font-</a:t>
+            </a:r>
+            <a:r>
+              <a:rPr lang="nl-BE" dirty="0" err="1"/>
+              <a:t>size</a:t>
+            </a:r>
+            <a:r>
+              <a:rPr lang="nl-BE" dirty="0"/>
+              <a:t>: 1.5rem; /* 20px * 1.5 = 30px */</a:t>
+            </a:r>
+          </a:p>
+          <a:p>
+            <a:pPr marL="0" indent="0">
+              <a:buNone/>
+            </a:pPr>
+            <a:r>
+              <a:rPr lang="nl-BE" dirty="0"/>
+              <a:t>}</a:t>
+            </a:r>
+          </a:p>
+          <a:p>
+            <a:pPr marL="0" indent="0">
+              <a:buNone/>
+            </a:pPr>
+            <a:r>
+              <a:rPr lang="nl-BE" dirty="0"/>
+              <a:t>p{</a:t>
+            </a:r>
+          </a:p>
+          <a:p>
+            <a:pPr marL="0" indent="0">
+              <a:buNone/>
+            </a:pPr>
+            <a:r>
+              <a:rPr lang="nl-BE" dirty="0"/>
+              <a:t>    font-</a:t>
+            </a:r>
+            <a:r>
+              <a:rPr lang="nl-BE" dirty="0" err="1"/>
+              <a:t>size</a:t>
+            </a:r>
+            <a:r>
+              <a:rPr lang="nl-BE" dirty="0"/>
+              <a:t>: 0.75rem; /* 20px * 0.75 = 15px */</a:t>
+            </a:r>
+          </a:p>
+          <a:p>
+            <a:pPr marL="0" indent="0">
+              <a:buNone/>
+            </a:pPr>
+            <a:r>
+              <a:rPr lang="nl-BE" dirty="0"/>
+              <a:t>}</a:t>
+            </a:r>
+          </a:p>
+          <a:p>
+            <a:pPr marL="0" indent="0">
+              <a:buNone/>
+            </a:pPr>
+            <a:r>
+              <a:rPr lang="nl-BE" dirty="0"/>
+              <a:t>span{</a:t>
+            </a:r>
+          </a:p>
+          <a:p>
+            <a:pPr marL="0" indent="0">
+              <a:buNone/>
+            </a:pPr>
+            <a:r>
+              <a:rPr lang="nl-BE" dirty="0"/>
+              <a:t>    font-</a:t>
+            </a:r>
+            <a:r>
+              <a:rPr lang="nl-BE" dirty="0" err="1"/>
+              <a:t>size</a:t>
+            </a:r>
+            <a:r>
+              <a:rPr lang="nl-BE" dirty="0"/>
+              <a:t>: 0.5rem; /* 20px * 0.5 = 10px */</a:t>
+            </a:r>
+          </a:p>
+          <a:p>
+            <a:pPr marL="0" indent="0">
+              <a:buNone/>
+            </a:pPr>
+            <a:r>
+              <a:rPr lang="nl-BE" dirty="0"/>
+              <a:t>}</a:t>
+            </a:r>
+          </a:p>
+        </p:txBody>
+      </p:sp>
+      <p:pic>
+        <p:nvPicPr>
+          <p:cNvPr id="8" name="Afbeelding 7">
+            <a:extLst>
+              <a:ext uri="{FF2B5EF4-FFF2-40B4-BE49-F238E27FC236}">
+                <a16:creationId xmlns:a16="http://schemas.microsoft.com/office/drawing/2014/main" id="{846C2A85-EB14-ED99-3F5C-D347D5C12C51}"/>
+              </a:ext>
+            </a:extLst>
+          </p:cNvPr>
+          <p:cNvPicPr>
+            <a:picLocks noChangeAspect="1"/>
+          </p:cNvPicPr>
+          <p:nvPr/>
+        </p:nvPicPr>
+        <p:blipFill>
+          <a:blip r:embed="rId2"/>
+          <a:stretch>
+            <a:fillRect/>
+          </a:stretch>
+        </p:blipFill>
+        <p:spPr>
+          <a:xfrm>
+            <a:off x="8034854" y="702156"/>
+            <a:ext cx="3658269" cy="2373412"/>
+          </a:xfrm>
+          <a:prstGeom prst="rect">
+            <a:avLst/>
+          </a:prstGeom>
+        </p:spPr>
+      </p:pic>
+      <p:sp>
+        <p:nvSpPr>
+          <p:cNvPr id="10" name="Tekstvak 9">
+            <a:extLst>
+              <a:ext uri="{FF2B5EF4-FFF2-40B4-BE49-F238E27FC236}">
+                <a16:creationId xmlns:a16="http://schemas.microsoft.com/office/drawing/2014/main" id="{EECE7483-8378-C90E-0624-12AEF56F473C}"/>
+              </a:ext>
+            </a:extLst>
+          </p:cNvPr>
+          <p:cNvSpPr txBox="1"/>
+          <p:nvPr/>
+        </p:nvSpPr>
+        <p:spPr>
+          <a:xfrm>
+            <a:off x="4986854" y="3534554"/>
+            <a:ext cx="6880026" cy="2261260"/>
+          </a:xfrm>
+          <a:prstGeom prst="rect">
+            <a:avLst/>
+          </a:prstGeom>
+          <a:noFill/>
+        </p:spPr>
+        <p:txBody>
+          <a:bodyPr wrap="square">
+            <a:spAutoFit/>
+          </a:bodyPr>
+          <a:lstStyle/>
+          <a:p>
+            <a:pPr>
+              <a:lnSpc>
+                <a:spcPts val="1425"/>
+              </a:lnSpc>
+              <a:buNone/>
+            </a:pPr>
+            <a:r>
+              <a:rPr lang="nl-BE" b="0" dirty="0">
+                <a:solidFill>
+                  <a:srgbClr val="0F4A85"/>
+                </a:solidFill>
+                <a:effectLst/>
+                <a:latin typeface="Consolas" panose="020B0609020204030204" pitchFamily="49" charset="0"/>
+              </a:rPr>
+              <a:t>&lt;html&gt;</a:t>
+            </a:r>
+            <a:endParaRPr lang="nl-BE" b="0" dirty="0">
+              <a:solidFill>
+                <a:srgbClr val="292929"/>
+              </a:solidFill>
+              <a:effectLst/>
+              <a:latin typeface="Consolas" panose="020B0609020204030204" pitchFamily="49" charset="0"/>
+            </a:endParaRPr>
+          </a:p>
+          <a:p>
+            <a:pPr>
+              <a:lnSpc>
+                <a:spcPts val="1425"/>
+              </a:lnSpc>
+              <a:buNone/>
+            </a:pPr>
+            <a:r>
+              <a:rPr lang="nl-BE" b="0" dirty="0">
+                <a:solidFill>
+                  <a:srgbClr val="292929"/>
+                </a:solidFill>
+                <a:effectLst/>
+                <a:latin typeface="Consolas" panose="020B0609020204030204" pitchFamily="49" charset="0"/>
+              </a:rPr>
+              <a:t>    </a:t>
+            </a:r>
+            <a:r>
+              <a:rPr lang="nl-BE" b="0" dirty="0">
+                <a:solidFill>
+                  <a:srgbClr val="0F4A85"/>
+                </a:solidFill>
+                <a:effectLst/>
+                <a:latin typeface="Consolas" panose="020B0609020204030204" pitchFamily="49" charset="0"/>
+              </a:rPr>
+              <a:t>&lt;</a:t>
+            </a:r>
+            <a:r>
+              <a:rPr lang="nl-BE" b="0" dirty="0" err="1">
+                <a:solidFill>
+                  <a:srgbClr val="0F4A85"/>
+                </a:solidFill>
+                <a:effectLst/>
+                <a:latin typeface="Consolas" panose="020B0609020204030204" pitchFamily="49" charset="0"/>
+              </a:rPr>
+              <a:t>head</a:t>
+            </a:r>
+            <a:r>
+              <a:rPr lang="nl-BE" b="0" dirty="0">
+                <a:solidFill>
+                  <a:srgbClr val="0F4A85"/>
+                </a:solidFill>
+                <a:effectLst/>
+                <a:latin typeface="Consolas" panose="020B0609020204030204" pitchFamily="49" charset="0"/>
+              </a:rPr>
+              <a:t>&gt;</a:t>
+            </a:r>
+            <a:endParaRPr lang="nl-BE" b="0" dirty="0">
+              <a:solidFill>
+                <a:srgbClr val="292929"/>
+              </a:solidFill>
+              <a:effectLst/>
+              <a:latin typeface="Consolas" panose="020B0609020204030204" pitchFamily="49" charset="0"/>
+            </a:endParaRPr>
+          </a:p>
+          <a:p>
+            <a:pPr>
+              <a:lnSpc>
+                <a:spcPts val="1425"/>
+              </a:lnSpc>
+              <a:buNone/>
+            </a:pPr>
+            <a:r>
+              <a:rPr lang="nl-BE" b="0" dirty="0">
+                <a:solidFill>
+                  <a:srgbClr val="292929"/>
+                </a:solidFill>
+                <a:effectLst/>
+                <a:latin typeface="Consolas" panose="020B0609020204030204" pitchFamily="49" charset="0"/>
+              </a:rPr>
+              <a:t>        </a:t>
+            </a:r>
+            <a:r>
+              <a:rPr lang="nl-BE" b="0" dirty="0">
+                <a:solidFill>
+                  <a:srgbClr val="0F4A85"/>
+                </a:solidFill>
+                <a:effectLst/>
+                <a:latin typeface="Consolas" panose="020B0609020204030204" pitchFamily="49" charset="0"/>
+              </a:rPr>
+              <a:t>&lt;link</a:t>
+            </a:r>
+            <a:r>
+              <a:rPr lang="nl-BE" b="0" dirty="0">
+                <a:solidFill>
+                  <a:srgbClr val="292929"/>
+                </a:solidFill>
+                <a:effectLst/>
+                <a:latin typeface="Consolas" panose="020B0609020204030204" pitchFamily="49" charset="0"/>
+              </a:rPr>
+              <a:t> </a:t>
+            </a:r>
+            <a:r>
+              <a:rPr lang="nl-BE" b="0" dirty="0">
+                <a:solidFill>
+                  <a:srgbClr val="264F78"/>
+                </a:solidFill>
+                <a:effectLst/>
+                <a:latin typeface="Consolas" panose="020B0609020204030204" pitchFamily="49" charset="0"/>
+              </a:rPr>
+              <a:t>rel</a:t>
+            </a:r>
+            <a:r>
+              <a:rPr lang="nl-BE" b="0" dirty="0">
+                <a:solidFill>
+                  <a:srgbClr val="292929"/>
+                </a:solidFill>
+                <a:effectLst/>
+                <a:latin typeface="Consolas" panose="020B0609020204030204" pitchFamily="49" charset="0"/>
+              </a:rPr>
+              <a:t>=</a:t>
+            </a:r>
+            <a:r>
+              <a:rPr lang="nl-BE" b="0" dirty="0">
+                <a:solidFill>
+                  <a:srgbClr val="0F4A85"/>
+                </a:solidFill>
+                <a:effectLst/>
+                <a:latin typeface="Consolas" panose="020B0609020204030204" pitchFamily="49" charset="0"/>
+              </a:rPr>
+              <a:t>"</a:t>
+            </a:r>
+            <a:r>
+              <a:rPr lang="nl-BE" b="0" dirty="0" err="1">
+                <a:solidFill>
+                  <a:srgbClr val="0F4A85"/>
+                </a:solidFill>
+                <a:effectLst/>
+                <a:latin typeface="Consolas" panose="020B0609020204030204" pitchFamily="49" charset="0"/>
+              </a:rPr>
+              <a:t>stylesheet</a:t>
+            </a:r>
+            <a:r>
+              <a:rPr lang="nl-BE" b="0" dirty="0">
+                <a:solidFill>
+                  <a:srgbClr val="0F4A85"/>
+                </a:solidFill>
+                <a:effectLst/>
+                <a:latin typeface="Consolas" panose="020B0609020204030204" pitchFamily="49" charset="0"/>
+              </a:rPr>
+              <a:t>"</a:t>
+            </a:r>
+            <a:r>
+              <a:rPr lang="nl-BE" b="0" dirty="0">
+                <a:solidFill>
+                  <a:srgbClr val="292929"/>
+                </a:solidFill>
+                <a:effectLst/>
+                <a:latin typeface="Consolas" panose="020B0609020204030204" pitchFamily="49" charset="0"/>
+              </a:rPr>
+              <a:t> </a:t>
+            </a:r>
+            <a:r>
+              <a:rPr lang="nl-BE" b="0" dirty="0" err="1">
+                <a:solidFill>
+                  <a:srgbClr val="264F78"/>
+                </a:solidFill>
+                <a:effectLst/>
+                <a:latin typeface="Consolas" panose="020B0609020204030204" pitchFamily="49" charset="0"/>
+              </a:rPr>
+              <a:t>href</a:t>
+            </a:r>
+            <a:r>
+              <a:rPr lang="nl-BE" b="0" dirty="0">
+                <a:solidFill>
+                  <a:srgbClr val="292929"/>
+                </a:solidFill>
+                <a:effectLst/>
+                <a:latin typeface="Consolas" panose="020B0609020204030204" pitchFamily="49" charset="0"/>
+              </a:rPr>
+              <a:t>=</a:t>
+            </a:r>
+            <a:r>
+              <a:rPr lang="nl-BE" b="0" dirty="0">
+                <a:solidFill>
+                  <a:srgbClr val="0F4A85"/>
+                </a:solidFill>
+                <a:effectLst/>
+                <a:latin typeface="Consolas" panose="020B0609020204030204" pitchFamily="49" charset="0"/>
+              </a:rPr>
+              <a:t>"Style.css"&gt;&lt;/link&gt;</a:t>
+            </a:r>
+            <a:endParaRPr lang="nl-BE" b="0" dirty="0">
+              <a:solidFill>
+                <a:srgbClr val="292929"/>
+              </a:solidFill>
+              <a:effectLst/>
+              <a:latin typeface="Consolas" panose="020B0609020204030204" pitchFamily="49" charset="0"/>
+            </a:endParaRPr>
+          </a:p>
+          <a:p>
+            <a:pPr>
+              <a:lnSpc>
+                <a:spcPts val="1425"/>
+              </a:lnSpc>
+              <a:buNone/>
+            </a:pPr>
+            <a:r>
+              <a:rPr lang="nl-BE" b="0" dirty="0">
+                <a:solidFill>
+                  <a:srgbClr val="292929"/>
+                </a:solidFill>
+                <a:effectLst/>
+                <a:latin typeface="Consolas" panose="020B0609020204030204" pitchFamily="49" charset="0"/>
+              </a:rPr>
+              <a:t>    </a:t>
+            </a:r>
+            <a:r>
+              <a:rPr lang="nl-BE" b="0" dirty="0">
+                <a:solidFill>
+                  <a:srgbClr val="0F4A85"/>
+                </a:solidFill>
+                <a:effectLst/>
+                <a:latin typeface="Consolas" panose="020B0609020204030204" pitchFamily="49" charset="0"/>
+              </a:rPr>
+              <a:t>&lt;/</a:t>
+            </a:r>
+            <a:r>
+              <a:rPr lang="nl-BE" b="0" dirty="0" err="1">
+                <a:solidFill>
+                  <a:srgbClr val="0F4A85"/>
+                </a:solidFill>
+                <a:effectLst/>
+                <a:latin typeface="Consolas" panose="020B0609020204030204" pitchFamily="49" charset="0"/>
+              </a:rPr>
+              <a:t>head</a:t>
+            </a:r>
+            <a:r>
+              <a:rPr lang="nl-BE" b="0" dirty="0">
+                <a:solidFill>
+                  <a:srgbClr val="0F4A85"/>
+                </a:solidFill>
+                <a:effectLst/>
+                <a:latin typeface="Consolas" panose="020B0609020204030204" pitchFamily="49" charset="0"/>
+              </a:rPr>
+              <a:t>&gt;</a:t>
+            </a:r>
+            <a:endParaRPr lang="nl-BE" b="0" dirty="0">
+              <a:solidFill>
+                <a:srgbClr val="292929"/>
+              </a:solidFill>
+              <a:effectLst/>
+              <a:latin typeface="Consolas" panose="020B0609020204030204" pitchFamily="49" charset="0"/>
+            </a:endParaRPr>
+          </a:p>
+          <a:p>
+            <a:pPr>
+              <a:lnSpc>
+                <a:spcPts val="1425"/>
+              </a:lnSpc>
+              <a:buNone/>
+            </a:pPr>
+            <a:r>
+              <a:rPr lang="nl-BE" b="0" dirty="0">
+                <a:solidFill>
+                  <a:srgbClr val="292929"/>
+                </a:solidFill>
+                <a:effectLst/>
+                <a:latin typeface="Consolas" panose="020B0609020204030204" pitchFamily="49" charset="0"/>
+              </a:rPr>
+              <a:t>    </a:t>
+            </a:r>
+            <a:r>
+              <a:rPr lang="nl-BE" b="0" dirty="0">
+                <a:solidFill>
+                  <a:srgbClr val="0F4A85"/>
+                </a:solidFill>
+                <a:effectLst/>
+                <a:latin typeface="Consolas" panose="020B0609020204030204" pitchFamily="49" charset="0"/>
+              </a:rPr>
+              <a:t>&lt;body&gt;</a:t>
+            </a:r>
+            <a:endParaRPr lang="nl-BE" b="0" dirty="0">
+              <a:solidFill>
+                <a:srgbClr val="292929"/>
+              </a:solidFill>
+              <a:effectLst/>
+              <a:latin typeface="Consolas" panose="020B0609020204030204" pitchFamily="49" charset="0"/>
+            </a:endParaRPr>
+          </a:p>
+          <a:p>
+            <a:pPr>
+              <a:lnSpc>
+                <a:spcPts val="1425"/>
+              </a:lnSpc>
+              <a:buNone/>
+            </a:pPr>
+            <a:r>
+              <a:rPr lang="nl-BE" b="0" dirty="0">
+                <a:solidFill>
+                  <a:srgbClr val="292929"/>
+                </a:solidFill>
+                <a:effectLst/>
+                <a:latin typeface="Consolas" panose="020B0609020204030204" pitchFamily="49" charset="0"/>
+              </a:rPr>
+              <a:t>        </a:t>
+            </a:r>
+            <a:r>
+              <a:rPr lang="nl-BE" b="0" dirty="0">
+                <a:solidFill>
+                  <a:srgbClr val="0F4A85"/>
+                </a:solidFill>
+                <a:effectLst/>
+                <a:latin typeface="Consolas" panose="020B0609020204030204" pitchFamily="49" charset="0"/>
+              </a:rPr>
+              <a:t>&lt;h1&gt;</a:t>
+            </a:r>
+            <a:r>
+              <a:rPr lang="nl-BE" b="0" dirty="0">
+                <a:solidFill>
+                  <a:srgbClr val="292929"/>
+                </a:solidFill>
+                <a:effectLst/>
+                <a:latin typeface="Consolas" panose="020B0609020204030204" pitchFamily="49" charset="0"/>
+              </a:rPr>
+              <a:t>Titel A</a:t>
+            </a:r>
+            <a:r>
+              <a:rPr lang="nl-BE" b="0" dirty="0">
+                <a:solidFill>
+                  <a:srgbClr val="0F4A85"/>
+                </a:solidFill>
+                <a:effectLst/>
+                <a:latin typeface="Consolas" panose="020B0609020204030204" pitchFamily="49" charset="0"/>
+              </a:rPr>
+              <a:t>&lt;/h1&gt;</a:t>
+            </a:r>
+            <a:endParaRPr lang="nl-BE" b="0" dirty="0">
+              <a:solidFill>
+                <a:srgbClr val="292929"/>
+              </a:solidFill>
+              <a:effectLst/>
+              <a:latin typeface="Consolas" panose="020B0609020204030204" pitchFamily="49" charset="0"/>
+            </a:endParaRPr>
+          </a:p>
+          <a:p>
+            <a:pPr>
+              <a:lnSpc>
+                <a:spcPts val="1425"/>
+              </a:lnSpc>
+              <a:buNone/>
+            </a:pPr>
+            <a:r>
+              <a:rPr lang="nl-BE" b="0" dirty="0">
+                <a:solidFill>
+                  <a:srgbClr val="292929"/>
+                </a:solidFill>
+                <a:effectLst/>
+                <a:latin typeface="Consolas" panose="020B0609020204030204" pitchFamily="49" charset="0"/>
+              </a:rPr>
+              <a:t>        </a:t>
+            </a:r>
+            <a:r>
+              <a:rPr lang="nl-BE" b="0" dirty="0">
+                <a:solidFill>
+                  <a:srgbClr val="0F4A85"/>
+                </a:solidFill>
+                <a:effectLst/>
+                <a:latin typeface="Consolas" panose="020B0609020204030204" pitchFamily="49" charset="0"/>
+              </a:rPr>
+              <a:t>&lt;p&gt;</a:t>
+            </a:r>
+            <a:r>
+              <a:rPr lang="nl-BE" b="0" dirty="0">
+                <a:solidFill>
+                  <a:srgbClr val="292929"/>
+                </a:solidFill>
+                <a:effectLst/>
+                <a:latin typeface="Consolas" panose="020B0609020204030204" pitchFamily="49" charset="0"/>
+              </a:rPr>
+              <a:t>Dit is </a:t>
+            </a:r>
+            <a:r>
+              <a:rPr lang="nl-BE" b="0" dirty="0">
+                <a:solidFill>
+                  <a:srgbClr val="0F4A85"/>
+                </a:solidFill>
+                <a:effectLst/>
+                <a:latin typeface="Consolas" panose="020B0609020204030204" pitchFamily="49" charset="0"/>
+              </a:rPr>
+              <a:t>&lt;span&gt;</a:t>
+            </a:r>
+            <a:r>
+              <a:rPr lang="nl-BE" b="0" dirty="0">
+                <a:solidFill>
+                  <a:srgbClr val="292929"/>
+                </a:solidFill>
+                <a:effectLst/>
+                <a:latin typeface="Consolas" panose="020B0609020204030204" pitchFamily="49" charset="0"/>
+              </a:rPr>
+              <a:t>kleinere</a:t>
+            </a:r>
+            <a:r>
+              <a:rPr lang="nl-BE" b="0" dirty="0">
+                <a:solidFill>
+                  <a:srgbClr val="0F4A85"/>
+                </a:solidFill>
+                <a:effectLst/>
+                <a:latin typeface="Consolas" panose="020B0609020204030204" pitchFamily="49" charset="0"/>
+              </a:rPr>
+              <a:t>&lt;/span&gt;</a:t>
+            </a:r>
+            <a:r>
+              <a:rPr lang="nl-BE" b="0" dirty="0">
+                <a:solidFill>
+                  <a:srgbClr val="292929"/>
+                </a:solidFill>
+                <a:effectLst/>
+                <a:latin typeface="Consolas" panose="020B0609020204030204" pitchFamily="49" charset="0"/>
+              </a:rPr>
+              <a:t> tekst.</a:t>
+            </a:r>
+            <a:r>
+              <a:rPr lang="nl-BE" b="0" dirty="0">
+                <a:solidFill>
+                  <a:srgbClr val="0F4A85"/>
+                </a:solidFill>
+                <a:effectLst/>
+                <a:latin typeface="Consolas" panose="020B0609020204030204" pitchFamily="49" charset="0"/>
+              </a:rPr>
+              <a:t>&lt;/p&gt;</a:t>
+            </a:r>
+            <a:endParaRPr lang="nl-BE" b="0" dirty="0">
+              <a:solidFill>
+                <a:srgbClr val="292929"/>
+              </a:solidFill>
+              <a:effectLst/>
+              <a:latin typeface="Consolas" panose="020B0609020204030204" pitchFamily="49" charset="0"/>
+            </a:endParaRPr>
+          </a:p>
+          <a:p>
+            <a:pPr>
+              <a:lnSpc>
+                <a:spcPts val="1425"/>
+              </a:lnSpc>
+              <a:buNone/>
+            </a:pPr>
+            <a:r>
+              <a:rPr lang="nl-BE" b="0" dirty="0">
+                <a:solidFill>
+                  <a:srgbClr val="292929"/>
+                </a:solidFill>
+                <a:effectLst/>
+                <a:latin typeface="Consolas" panose="020B0609020204030204" pitchFamily="49" charset="0"/>
+              </a:rPr>
+              <a:t>    </a:t>
+            </a:r>
+            <a:r>
+              <a:rPr lang="nl-BE" b="0" dirty="0">
+                <a:solidFill>
+                  <a:srgbClr val="0F4A85"/>
+                </a:solidFill>
+                <a:effectLst/>
+                <a:latin typeface="Consolas" panose="020B0609020204030204" pitchFamily="49" charset="0"/>
+              </a:rPr>
+              <a:t>&lt;/body&gt;</a:t>
+            </a:r>
+            <a:endParaRPr lang="nl-BE" b="0" dirty="0">
+              <a:solidFill>
+                <a:srgbClr val="292929"/>
+              </a:solidFill>
+              <a:effectLst/>
+              <a:latin typeface="Consolas" panose="020B0609020204030204" pitchFamily="49" charset="0"/>
+            </a:endParaRPr>
+          </a:p>
+          <a:p>
+            <a:pPr>
+              <a:lnSpc>
+                <a:spcPts val="1425"/>
+              </a:lnSpc>
+              <a:buNone/>
+            </a:pPr>
+            <a:r>
+              <a:rPr lang="nl-BE" b="0" dirty="0">
+                <a:solidFill>
+                  <a:srgbClr val="0F4A85"/>
+                </a:solidFill>
+                <a:effectLst/>
+                <a:latin typeface="Consolas" panose="020B0609020204030204" pitchFamily="49" charset="0"/>
+              </a:rPr>
+              <a:t>&lt;/html&gt;</a:t>
+            </a:r>
+            <a:endParaRPr lang="nl-BE" b="0" dirty="0">
+              <a:solidFill>
+                <a:srgbClr val="292929"/>
+              </a:solidFill>
+              <a:effectLst/>
+              <a:latin typeface="Consolas" panose="020B0609020204030204" pitchFamily="49" charset="0"/>
+            </a:endParaRPr>
+          </a:p>
+          <a:p>
+            <a:pPr>
+              <a:lnSpc>
+                <a:spcPts val="1425"/>
+              </a:lnSpc>
+              <a:buNone/>
+            </a:pPr>
+            <a:br>
+              <a:rPr lang="nl-BE" b="0" dirty="0">
+                <a:solidFill>
+                  <a:srgbClr val="292929"/>
+                </a:solidFill>
+                <a:effectLst/>
+                <a:latin typeface="Consolas" panose="020B0609020204030204" pitchFamily="49" charset="0"/>
+              </a:rPr>
+            </a:br>
+            <a:endParaRPr lang="nl-BE" b="0" dirty="0">
+              <a:solidFill>
+                <a:srgbClr val="292929"/>
+              </a:solidFill>
+              <a:effectLst/>
+              <a:latin typeface="Consolas" panose="020B0609020204030204" pitchFamily="49" charset="0"/>
+            </a:endParaRPr>
+          </a:p>
+        </p:txBody>
+      </p:sp>
+    </p:spTree>
+    <p:extLst>
+      <p:ext uri="{BB962C8B-B14F-4D97-AF65-F5344CB8AC3E}">
+        <p14:creationId xmlns:p14="http://schemas.microsoft.com/office/powerpoint/2010/main" val="4100006947"/>
+      </p:ext>
+    </p:extLst>
+  </p:cSld>
+  <p:clrMapOvr>
+    <a:masterClrMapping/>
+  </p:clrMapOvr>
+</p:sld>
+</file>
+
+<file path=ppt/slides/slide51.xml><?xml version="1.0" encoding="utf-8"?>
+<p:sld xmlns:a="http://schemas.openxmlformats.org/drawingml/2006/main" xmlns:r="http://schemas.openxmlformats.org/officeDocument/2006/relationships" xmlns:p="http://schemas.openxmlformats.org/presentationml/2006/main">
+  <p:cSld>
+    <p:spTree>
+      <p:nvGrpSpPr>
+        <p:cNvPr id="1" name=""/>
+        <p:cNvGrpSpPr/>
+        <p:nvPr/>
+      </p:nvGrpSpPr>
+      <p:grpSpPr>
+        <a:xfrm>
+          <a:off x="0" y="0"/>
+          <a:ext cx="0" cy="0"/>
+          <a:chOff x="0" y="0"/>
+          <a:chExt cx="0" cy="0"/>
+        </a:xfrm>
+      </p:grpSpPr>
+      <p:sp>
+        <p:nvSpPr>
+          <p:cNvPr id="2" name="Titel 1">
+            <a:extLst>
+              <a:ext uri="{FF2B5EF4-FFF2-40B4-BE49-F238E27FC236}">
+                <a16:creationId xmlns:a16="http://schemas.microsoft.com/office/drawing/2014/main" id="{6E93D75B-3014-91FE-1B07-CA6BF57F6F2A}"/>
+              </a:ext>
+            </a:extLst>
+          </p:cNvPr>
+          <p:cNvSpPr>
+            <a:spLocks noGrp="1"/>
+          </p:cNvSpPr>
+          <p:nvPr>
+            <p:ph type="title"/>
+          </p:nvPr>
+        </p:nvSpPr>
+        <p:spPr/>
+        <p:txBody>
+          <a:bodyPr/>
+          <a:lstStyle/>
+          <a:p>
+            <a:r>
+              <a:rPr lang="nl-BE" dirty="0"/>
+              <a:t>EM / REM</a:t>
+            </a:r>
+          </a:p>
+        </p:txBody>
+      </p:sp>
+      <p:sp>
+        <p:nvSpPr>
+          <p:cNvPr id="3" name="Tijdelijke aanduiding voor inhoud 2">
+            <a:extLst>
+              <a:ext uri="{FF2B5EF4-FFF2-40B4-BE49-F238E27FC236}">
+                <a16:creationId xmlns:a16="http://schemas.microsoft.com/office/drawing/2014/main" id="{72331860-CE1C-03B4-A67B-8829360D0E0F}"/>
+              </a:ext>
+            </a:extLst>
+          </p:cNvPr>
+          <p:cNvSpPr>
+            <a:spLocks noGrp="1"/>
+          </p:cNvSpPr>
+          <p:nvPr>
+            <p:ph idx="1"/>
+          </p:nvPr>
+        </p:nvSpPr>
+        <p:spPr/>
+        <p:txBody>
+          <a:bodyPr/>
+          <a:lstStyle/>
+          <a:p>
+            <a:r>
+              <a:rPr lang="nl-BE" dirty="0"/>
+              <a:t>Belangrijk voor gebruiker m.b.t. lettergrootte instellingen in de browser. Als je ‘</a:t>
+            </a:r>
+            <a:r>
+              <a:rPr lang="nl-BE" dirty="0" err="1"/>
+              <a:t>px</a:t>
+            </a:r>
+            <a:r>
+              <a:rPr lang="nl-BE" dirty="0"/>
+              <a:t>’ gebruikt, zal deze instelling niet worden toegepast.</a:t>
+            </a:r>
+          </a:p>
+          <a:p>
+            <a:r>
+              <a:rPr lang="nl-BE" dirty="0"/>
+              <a:t>Em/rem kan ook gebruikt worden voor andere groottes, bv. afstanden (</a:t>
+            </a:r>
+            <a:r>
+              <a:rPr lang="nl-BE" dirty="0" err="1"/>
+              <a:t>margin</a:t>
+            </a:r>
+            <a:r>
+              <a:rPr lang="nl-BE" dirty="0"/>
+              <a:t>/padding/border), border radius, …</a:t>
+            </a:r>
+          </a:p>
+        </p:txBody>
+      </p:sp>
+    </p:spTree>
+    <p:extLst>
+      <p:ext uri="{BB962C8B-B14F-4D97-AF65-F5344CB8AC3E}">
+        <p14:creationId xmlns:p14="http://schemas.microsoft.com/office/powerpoint/2010/main" val="837948858"/>
+      </p:ext>
+    </p:extLst>
+  </p:cSld>
+  <p:clrMapOvr>
+    <a:masterClrMapping/>
+  </p:clrMapOvr>
+</p:sld>
+</file>
+
+<file path=ppt/slides/slide52.xml><?xml version="1.0" encoding="utf-8"?>
 <p:sld xmlns:a="http://schemas.openxmlformats.org/drawingml/2006/main" xmlns:r="http://schemas.openxmlformats.org/officeDocument/2006/relationships" xmlns:p="http://schemas.openxmlformats.org/presentationml/2006/main">
   <p:cSld>
     <p:spTree>
@@ -18114,7 +20153,7 @@
             <a:pPr rtl="0"/>
             <a:fld id="{66D3D282-C61A-41D7-9714-7814FA67361E}" type="datetime1">
               <a:rPr lang="nl-NL" smtClean="0"/>
-              <a:t>12-2-2026</a:t>
+              <a:t>28-5-2026</a:t>
             </a:fld>
             <a:endParaRPr lang="en-US" dirty="0"/>
           </a:p>
@@ -18133,7 +20172,7 @@
 </p:sld>
 </file>
 
-<file path=ppt/slides/slide46.xml><?xml version="1.0" encoding="utf-8"?>
+<file path=ppt/slides/slide53.xml><?xml version="1.0" encoding="utf-8"?>
 <p:sld xmlns:a="http://schemas.openxmlformats.org/drawingml/2006/main" xmlns:r="http://schemas.openxmlformats.org/officeDocument/2006/relationships" xmlns:p="http://schemas.openxmlformats.org/presentationml/2006/main">
   <p:cSld>
     <p:spTree>
@@ -18241,7 +20280,7 @@
 </p:sld>
 </file>
 
-<file path=ppt/slides/slide47.xml><?xml version="1.0" encoding="utf-8"?>
+<file path=ppt/slides/slide54.xml><?xml version="1.0" encoding="utf-8"?>
 <p:sld xmlns:a="http://schemas.openxmlformats.org/drawingml/2006/main" xmlns:r="http://schemas.openxmlformats.org/officeDocument/2006/relationships" xmlns:p="http://schemas.openxmlformats.org/presentationml/2006/main">
   <p:cSld>
     <p:spTree>
@@ -18617,7 +20656,7 @@
 </p:sld>
 </file>
 
-<file path=ppt/slides/slide48.xml><?xml version="1.0" encoding="utf-8"?>
+<file path=ppt/slides/slide55.xml><?xml version="1.0" encoding="utf-8"?>
 <p:sld xmlns:a="http://schemas.openxmlformats.org/drawingml/2006/main" xmlns:r="http://schemas.openxmlformats.org/officeDocument/2006/relationships" xmlns:p="http://schemas.openxmlformats.org/presentationml/2006/main">
   <p:cSld>
     <p:spTree>
@@ -19226,7 +21265,7 @@
 </p:sld>
 </file>
 
-<file path=ppt/slides/slide49.xml><?xml version="1.0" encoding="utf-8"?>
+<file path=ppt/slides/slide56.xml><?xml version="1.0" encoding="utf-8"?>
 <p:sld xmlns:a="http://schemas.openxmlformats.org/drawingml/2006/main" xmlns:r="http://schemas.openxmlformats.org/officeDocument/2006/relationships" xmlns:p="http://schemas.openxmlformats.org/presentationml/2006/main">
   <p:cSld>
     <p:spTree>
@@ -19543,103 +21582,7 @@
 </p:sld>
 </file>
 
-<file path=ppt/slides/slide5.xml><?xml version="1.0" encoding="utf-8"?>
-<p:sld xmlns:a="http://schemas.openxmlformats.org/drawingml/2006/main" xmlns:r="http://schemas.openxmlformats.org/officeDocument/2006/relationships" xmlns:p="http://schemas.openxmlformats.org/presentationml/2006/main">
-  <p:cSld>
-    <p:spTree>
-      <p:nvGrpSpPr>
-        <p:cNvPr id="1" name=""/>
-        <p:cNvGrpSpPr/>
-        <p:nvPr/>
-      </p:nvGrpSpPr>
-      <p:grpSpPr>
-        <a:xfrm>
-          <a:off x="0" y="0"/>
-          <a:ext cx="0" cy="0"/>
-          <a:chOff x="0" y="0"/>
-          <a:chExt cx="0" cy="0"/>
-        </a:xfrm>
-      </p:grpSpPr>
-      <p:sp>
-        <p:nvSpPr>
-          <p:cNvPr id="2" name="Titel 1">
-            <a:extLst>
-              <a:ext uri="{FF2B5EF4-FFF2-40B4-BE49-F238E27FC236}">
-                <a16:creationId xmlns:a16="http://schemas.microsoft.com/office/drawing/2014/main" id="{23391728-44D9-7E04-2E98-F840EAA6FA4E}"/>
-              </a:ext>
-            </a:extLst>
-          </p:cNvPr>
-          <p:cNvSpPr>
-            <a:spLocks noGrp="1"/>
-          </p:cNvSpPr>
-          <p:nvPr>
-            <p:ph type="title"/>
-          </p:nvPr>
-        </p:nvSpPr>
-        <p:spPr/>
-        <p:txBody>
-          <a:bodyPr/>
-          <a:lstStyle/>
-          <a:p>
-            <a:r>
-              <a:rPr lang="nl-BE" dirty="0"/>
-              <a:t>HTML</a:t>
-            </a:r>
-          </a:p>
-        </p:txBody>
-      </p:sp>
-      <p:sp>
-        <p:nvSpPr>
-          <p:cNvPr id="3" name="Tijdelijke aanduiding voor inhoud 2">
-            <a:extLst>
-              <a:ext uri="{FF2B5EF4-FFF2-40B4-BE49-F238E27FC236}">
-                <a16:creationId xmlns:a16="http://schemas.microsoft.com/office/drawing/2014/main" id="{3C0D5720-7289-3532-3E4D-957E526103E6}"/>
-              </a:ext>
-            </a:extLst>
-          </p:cNvPr>
-          <p:cNvSpPr>
-            <a:spLocks noGrp="1"/>
-          </p:cNvSpPr>
-          <p:nvPr>
-            <p:ph idx="1"/>
-          </p:nvPr>
-        </p:nvSpPr>
-        <p:spPr/>
-        <p:txBody>
-          <a:bodyPr/>
-          <a:lstStyle/>
-          <a:p>
-            <a:r>
-              <a:rPr lang="nl-BE"/>
-              <a:t>Bovenste tag die alle andere tags (rechtstreeks of onrechtstreeks) bevat</a:t>
-            </a:r>
-            <a:r>
-              <a:rPr lang="nl-BE" dirty="0"/>
-              <a:t>.</a:t>
-            </a:r>
-          </a:p>
-          <a:p>
-            <a:r>
-              <a:rPr lang="nl-BE" dirty="0"/>
-              <a:t>&lt;html&gt;&lt;/html&gt;</a:t>
-            </a:r>
-          </a:p>
-        </p:txBody>
-      </p:sp>
-    </p:spTree>
-    <p:extLst>
-      <p:ext uri="{BB962C8B-B14F-4D97-AF65-F5344CB8AC3E}">
-        <p14:creationId xmlns:p14="http://schemas.microsoft.com/office/powerpoint/2010/main" val="1660195467"/>
-      </p:ext>
-    </p:extLst>
-  </p:cSld>
-  <p:clrMapOvr>
-    <a:masterClrMapping/>
-  </p:clrMapOvr>
-</p:sld>
-</file>
-
-<file path=ppt/slides/slide50.xml><?xml version="1.0" encoding="utf-8"?>
+<file path=ppt/slides/slide57.xml><?xml version="1.0" encoding="utf-8"?>
 <p:sld xmlns:a="http://schemas.openxmlformats.org/drawingml/2006/main" xmlns:r="http://schemas.openxmlformats.org/officeDocument/2006/relationships" xmlns:p="http://schemas.openxmlformats.org/presentationml/2006/main">
   <p:cSld>
     <p:spTree>
@@ -19989,7 +21932,7 @@
 </p:sld>
 </file>
 
-<file path=ppt/slides/slide51.xml><?xml version="1.0" encoding="utf-8"?>
+<file path=ppt/slides/slide58.xml><?xml version="1.0" encoding="utf-8"?>
 <p:sld xmlns:a="http://schemas.openxmlformats.org/drawingml/2006/main" xmlns:r="http://schemas.openxmlformats.org/officeDocument/2006/relationships" xmlns:p="http://schemas.openxmlformats.org/presentationml/2006/main">
   <p:cSld>
     <p:spTree>
@@ -20197,7 +22140,7 @@
 </p:sld>
 </file>
 
-<file path=ppt/slides/slide52.xml><?xml version="1.0" encoding="utf-8"?>
+<file path=ppt/slides/slide59.xml><?xml version="1.0" encoding="utf-8"?>
 <p:sld xmlns:a="http://schemas.openxmlformats.org/drawingml/2006/main" xmlns:r="http://schemas.openxmlformats.org/officeDocument/2006/relationships" xmlns:p="http://schemas.openxmlformats.org/presentationml/2006/main">
   <p:cSld>
     <p:spTree>
@@ -20710,2044 +22653,6 @@
     <p:extLst>
       <p:ext uri="{BB962C8B-B14F-4D97-AF65-F5344CB8AC3E}">
         <p14:creationId xmlns:p14="http://schemas.microsoft.com/office/powerpoint/2010/main" val="1472645518"/>
-      </p:ext>
-    </p:extLst>
-  </p:cSld>
-  <p:clrMapOvr>
-    <a:masterClrMapping/>
-  </p:clrMapOvr>
-</p:sld>
-</file>
-
-<file path=ppt/slides/slide53.xml><?xml version="1.0" encoding="utf-8"?>
-<p:sld xmlns:a="http://schemas.openxmlformats.org/drawingml/2006/main" xmlns:r="http://schemas.openxmlformats.org/officeDocument/2006/relationships" xmlns:p="http://schemas.openxmlformats.org/presentationml/2006/main">
-  <p:cSld>
-    <p:spTree>
-      <p:nvGrpSpPr>
-        <p:cNvPr id="1" name=""/>
-        <p:cNvGrpSpPr/>
-        <p:nvPr/>
-      </p:nvGrpSpPr>
-      <p:grpSpPr>
-        <a:xfrm>
-          <a:off x="0" y="0"/>
-          <a:ext cx="0" cy="0"/>
-          <a:chOff x="0" y="0"/>
-          <a:chExt cx="0" cy="0"/>
-        </a:xfrm>
-      </p:grpSpPr>
-      <p:sp>
-        <p:nvSpPr>
-          <p:cNvPr id="2" name="Titel 1">
-            <a:extLst>
-              <a:ext uri="{FF2B5EF4-FFF2-40B4-BE49-F238E27FC236}">
-                <a16:creationId xmlns:a16="http://schemas.microsoft.com/office/drawing/2014/main" id="{4DAFA998-36CE-8805-ADFD-BDC91B66C5F1}"/>
-              </a:ext>
-            </a:extLst>
-          </p:cNvPr>
-          <p:cNvSpPr>
-            <a:spLocks noGrp="1"/>
-          </p:cNvSpPr>
-          <p:nvPr>
-            <p:ph type="title"/>
-          </p:nvPr>
-        </p:nvSpPr>
-        <p:spPr/>
-        <p:txBody>
-          <a:bodyPr/>
-          <a:lstStyle/>
-          <a:p>
-            <a:r>
-              <a:rPr lang="nl-BE" dirty="0"/>
-              <a:t>Uitlezen attributen</a:t>
-            </a:r>
-          </a:p>
-        </p:txBody>
-      </p:sp>
-      <p:sp>
-        <p:nvSpPr>
-          <p:cNvPr id="3" name="Tijdelijke aanduiding voor inhoud 2">
-            <a:extLst>
-              <a:ext uri="{FF2B5EF4-FFF2-40B4-BE49-F238E27FC236}">
-                <a16:creationId xmlns:a16="http://schemas.microsoft.com/office/drawing/2014/main" id="{C836F053-5EF6-11BF-9078-583F9ADCB9CA}"/>
-              </a:ext>
-            </a:extLst>
-          </p:cNvPr>
-          <p:cNvSpPr>
-            <a:spLocks noGrp="1"/>
-          </p:cNvSpPr>
-          <p:nvPr>
-            <p:ph idx="1"/>
-          </p:nvPr>
-        </p:nvSpPr>
-        <p:spPr/>
-        <p:txBody>
-          <a:bodyPr>
-            <a:normAutofit fontScale="85000" lnSpcReduction="10000"/>
-          </a:bodyPr>
-          <a:lstStyle/>
-          <a:p>
-            <a:pPr>
-              <a:lnSpc>
-                <a:spcPct val="300000"/>
-              </a:lnSpc>
-            </a:pPr>
-            <a:r>
-              <a:rPr lang="nl-BE" i="1" dirty="0" err="1"/>
-              <a:t>element.hasAttribute</a:t>
-            </a:r>
-            <a:r>
-              <a:rPr lang="nl-BE" i="1" dirty="0"/>
-              <a:t>(“naam attribuut”)				</a:t>
-            </a:r>
-            <a:r>
-              <a:rPr lang="nl-BE" dirty="0"/>
-              <a:t>Bv. p1.hasAttribute(“data-waarde”)</a:t>
-            </a:r>
-          </a:p>
-          <a:p>
-            <a:pPr>
-              <a:lnSpc>
-                <a:spcPct val="300000"/>
-              </a:lnSpc>
-            </a:pPr>
-            <a:r>
-              <a:rPr lang="nl-BE" dirty="0" err="1"/>
-              <a:t>element.setAttribute</a:t>
-            </a:r>
-            <a:r>
-              <a:rPr lang="nl-BE" dirty="0"/>
-              <a:t>(“naam attribuut”, “waarde”)			Bv. p1.setAttribute(“data-waarde”, “</a:t>
-            </a:r>
-            <a:r>
-              <a:rPr lang="nl-BE" dirty="0" err="1"/>
-              <a:t>Azerty</a:t>
-            </a:r>
-            <a:r>
-              <a:rPr lang="nl-BE"/>
-              <a:t>”)</a:t>
-            </a:r>
-            <a:endParaRPr lang="nl-BE" dirty="0"/>
-          </a:p>
-          <a:p>
-            <a:pPr>
-              <a:lnSpc>
-                <a:spcPct val="300000"/>
-              </a:lnSpc>
-            </a:pPr>
-            <a:r>
-              <a:rPr lang="nl-BE" i="1" dirty="0" err="1"/>
-              <a:t>element.attribuut</a:t>
-            </a:r>
-            <a:r>
-              <a:rPr lang="nl-BE" i="1" dirty="0"/>
-              <a:t>								</a:t>
-            </a:r>
-            <a:r>
-              <a:rPr lang="nl-BE" dirty="0"/>
-              <a:t>Bv. p1.id</a:t>
-            </a:r>
-          </a:p>
-          <a:p>
-            <a:pPr>
-              <a:lnSpc>
-                <a:spcPct val="300000"/>
-              </a:lnSpc>
-            </a:pPr>
-            <a:r>
-              <a:rPr lang="nl-BE" i="1" dirty="0" err="1"/>
-              <a:t>element.getAttribute</a:t>
-            </a:r>
-            <a:r>
-              <a:rPr lang="nl-BE" i="1" dirty="0"/>
-              <a:t>("naam attribuut")				</a:t>
-            </a:r>
-            <a:r>
-              <a:rPr lang="nl-BE" dirty="0"/>
-              <a:t>Bv. p1.getAttribute("data-waarde")</a:t>
-            </a:r>
-          </a:p>
-          <a:p>
-            <a:pPr>
-              <a:lnSpc>
-                <a:spcPct val="300000"/>
-              </a:lnSpc>
-            </a:pPr>
-            <a:r>
-              <a:rPr lang="nl-BE" i="1" dirty="0" err="1"/>
-              <a:t>element.removeAttribute</a:t>
-            </a:r>
-            <a:r>
-              <a:rPr lang="nl-BE" i="1" dirty="0"/>
-              <a:t>(“naam attribuut”)			Bv. p1.removeAttribute(“</a:t>
-            </a:r>
-            <a:r>
-              <a:rPr lang="nl-BE" i="1" dirty="0" err="1"/>
-              <a:t>hidden</a:t>
-            </a:r>
-            <a:r>
-              <a:rPr lang="nl-BE" i="1" dirty="0"/>
-              <a:t>”)</a:t>
-            </a:r>
-          </a:p>
-        </p:txBody>
-      </p:sp>
-    </p:spTree>
-    <p:extLst>
-      <p:ext uri="{BB962C8B-B14F-4D97-AF65-F5344CB8AC3E}">
-        <p14:creationId xmlns:p14="http://schemas.microsoft.com/office/powerpoint/2010/main" val="1547160706"/>
-      </p:ext>
-    </p:extLst>
-  </p:cSld>
-  <p:clrMapOvr>
-    <a:masterClrMapping/>
-  </p:clrMapOvr>
-</p:sld>
-</file>
-
-<file path=ppt/slides/slide54.xml><?xml version="1.0" encoding="utf-8"?>
-<p:sld xmlns:a="http://schemas.openxmlformats.org/drawingml/2006/main" xmlns:r="http://schemas.openxmlformats.org/officeDocument/2006/relationships" xmlns:p="http://schemas.openxmlformats.org/presentationml/2006/main">
-  <p:cSld>
-    <p:spTree>
-      <p:nvGrpSpPr>
-        <p:cNvPr id="1" name="">
-          <a:extLst>
-            <a:ext uri="{FF2B5EF4-FFF2-40B4-BE49-F238E27FC236}">
-              <a16:creationId xmlns:a16="http://schemas.microsoft.com/office/drawing/2014/main" id="{91A5478D-0622-05BA-5D33-062F2A182EB3}"/>
-            </a:ext>
-          </a:extLst>
-        </p:cNvPr>
-        <p:cNvGrpSpPr/>
-        <p:nvPr/>
-      </p:nvGrpSpPr>
-      <p:grpSpPr>
-        <a:xfrm>
-          <a:off x="0" y="0"/>
-          <a:ext cx="0" cy="0"/>
-          <a:chOff x="0" y="0"/>
-          <a:chExt cx="0" cy="0"/>
-        </a:xfrm>
-      </p:grpSpPr>
-      <p:sp>
-        <p:nvSpPr>
-          <p:cNvPr id="2" name="Titel 1">
-            <a:extLst>
-              <a:ext uri="{FF2B5EF4-FFF2-40B4-BE49-F238E27FC236}">
-                <a16:creationId xmlns:a16="http://schemas.microsoft.com/office/drawing/2014/main" id="{5C4E335F-8143-1B7C-7A2E-4CC72C386903}"/>
-              </a:ext>
-            </a:extLst>
-          </p:cNvPr>
-          <p:cNvSpPr>
-            <a:spLocks noGrp="1"/>
-          </p:cNvSpPr>
-          <p:nvPr>
-            <p:ph type="title"/>
-          </p:nvPr>
-        </p:nvSpPr>
-        <p:spPr/>
-        <p:txBody>
-          <a:bodyPr/>
-          <a:lstStyle/>
-          <a:p>
-            <a:r>
-              <a:rPr lang="nl-BE" dirty="0"/>
-              <a:t>Uitlezen attributen: class</a:t>
-            </a:r>
-          </a:p>
-        </p:txBody>
-      </p:sp>
-      <p:sp>
-        <p:nvSpPr>
-          <p:cNvPr id="3" name="Tijdelijke aanduiding voor inhoud 2">
-            <a:extLst>
-              <a:ext uri="{FF2B5EF4-FFF2-40B4-BE49-F238E27FC236}">
-                <a16:creationId xmlns:a16="http://schemas.microsoft.com/office/drawing/2014/main" id="{B9127A27-F7F7-2B91-6E98-C8B341DC6D11}"/>
-              </a:ext>
-            </a:extLst>
-          </p:cNvPr>
-          <p:cNvSpPr>
-            <a:spLocks noGrp="1"/>
-          </p:cNvSpPr>
-          <p:nvPr>
-            <p:ph idx="1"/>
-          </p:nvPr>
-        </p:nvSpPr>
-        <p:spPr/>
-        <p:txBody>
-          <a:bodyPr/>
-          <a:lstStyle/>
-          <a:p>
-            <a:r>
-              <a:rPr lang="nl-BE" i="1" dirty="0"/>
-              <a:t>Classes van een element beschikbaar via .</a:t>
-            </a:r>
-            <a:r>
-              <a:rPr lang="nl-BE" i="1" dirty="0" err="1"/>
-              <a:t>classList</a:t>
-            </a:r>
-            <a:endParaRPr lang="nl-BE" i="1" dirty="0"/>
-          </a:p>
-          <a:p>
-            <a:r>
-              <a:rPr lang="nl-BE" i="1" dirty="0"/>
-              <a:t>Functies op </a:t>
-            </a:r>
-            <a:r>
-              <a:rPr lang="nl-BE" i="1" dirty="0" err="1"/>
-              <a:t>classList</a:t>
-            </a:r>
-            <a:r>
-              <a:rPr lang="nl-BE" i="1" dirty="0"/>
-              <a:t>:</a:t>
-            </a:r>
-          </a:p>
-          <a:p>
-            <a:pPr lvl="1"/>
-            <a:r>
-              <a:rPr lang="nl-BE" i="1" dirty="0" err="1"/>
-              <a:t>add</a:t>
-            </a:r>
-            <a:r>
-              <a:rPr lang="nl-BE" i="1" dirty="0"/>
-              <a:t>(class): voegt class toe aan de lijst van classes</a:t>
-            </a:r>
-          </a:p>
-          <a:p>
-            <a:pPr lvl="1"/>
-            <a:r>
-              <a:rPr lang="nl-BE" i="1" dirty="0" err="1"/>
-              <a:t>remove</a:t>
-            </a:r>
-            <a:r>
-              <a:rPr lang="nl-BE" i="1" dirty="0"/>
-              <a:t>(class): verwijdert class uit de lijst van classes</a:t>
-            </a:r>
-          </a:p>
-          <a:p>
-            <a:pPr lvl="1"/>
-            <a:r>
-              <a:rPr lang="nl-BE" i="1" dirty="0" err="1"/>
-              <a:t>Contains</a:t>
-            </a:r>
-            <a:r>
-              <a:rPr lang="nl-BE" i="1" dirty="0"/>
-              <a:t>(class): gaat na of de class voorkomt in de lijst van classes</a:t>
-            </a:r>
-            <a:endParaRPr lang="nl-BE" dirty="0"/>
-          </a:p>
-        </p:txBody>
-      </p:sp>
-    </p:spTree>
-    <p:extLst>
-      <p:ext uri="{BB962C8B-B14F-4D97-AF65-F5344CB8AC3E}">
-        <p14:creationId xmlns:p14="http://schemas.microsoft.com/office/powerpoint/2010/main" val="3570912639"/>
-      </p:ext>
-    </p:extLst>
-  </p:cSld>
-  <p:clrMapOvr>
-    <a:masterClrMapping/>
-  </p:clrMapOvr>
-</p:sld>
-</file>
-
-<file path=ppt/slides/slide55.xml><?xml version="1.0" encoding="utf-8"?>
-<p:sld xmlns:a="http://schemas.openxmlformats.org/drawingml/2006/main" xmlns:r="http://schemas.openxmlformats.org/officeDocument/2006/relationships" xmlns:p="http://schemas.openxmlformats.org/presentationml/2006/main">
-  <p:cSld>
-    <p:spTree>
-      <p:nvGrpSpPr>
-        <p:cNvPr id="1" name=""/>
-        <p:cNvGrpSpPr/>
-        <p:nvPr/>
-      </p:nvGrpSpPr>
-      <p:grpSpPr>
-        <a:xfrm>
-          <a:off x="0" y="0"/>
-          <a:ext cx="0" cy="0"/>
-          <a:chOff x="0" y="0"/>
-          <a:chExt cx="0" cy="0"/>
-        </a:xfrm>
-      </p:grpSpPr>
-      <p:sp>
-        <p:nvSpPr>
-          <p:cNvPr id="2" name="Titel 1">
-            <a:extLst>
-              <a:ext uri="{FF2B5EF4-FFF2-40B4-BE49-F238E27FC236}">
-                <a16:creationId xmlns:a16="http://schemas.microsoft.com/office/drawing/2014/main" id="{2E18B115-CFB0-DAA2-6213-76EED52452CA}"/>
-              </a:ext>
-            </a:extLst>
-          </p:cNvPr>
-          <p:cNvSpPr>
-            <a:spLocks noGrp="1"/>
-          </p:cNvSpPr>
-          <p:nvPr>
-            <p:ph type="title"/>
-          </p:nvPr>
-        </p:nvSpPr>
-        <p:spPr/>
-        <p:txBody>
-          <a:bodyPr/>
-          <a:lstStyle/>
-          <a:p>
-            <a:r>
-              <a:rPr lang="nl-BE" dirty="0"/>
-              <a:t>Eigenschappen van elementen</a:t>
-            </a:r>
-          </a:p>
-        </p:txBody>
-      </p:sp>
-      <p:sp>
-        <p:nvSpPr>
-          <p:cNvPr id="3" name="Tijdelijke aanduiding voor inhoud 2">
-            <a:extLst>
-              <a:ext uri="{FF2B5EF4-FFF2-40B4-BE49-F238E27FC236}">
-                <a16:creationId xmlns:a16="http://schemas.microsoft.com/office/drawing/2014/main" id="{8AA2CD61-9F66-24DD-D34D-6E56967FEEAA}"/>
-              </a:ext>
-            </a:extLst>
-          </p:cNvPr>
-          <p:cNvSpPr>
-            <a:spLocks noGrp="1"/>
-          </p:cNvSpPr>
-          <p:nvPr>
-            <p:ph idx="1"/>
-          </p:nvPr>
-        </p:nvSpPr>
-        <p:spPr/>
-        <p:txBody>
-          <a:bodyPr/>
-          <a:lstStyle/>
-          <a:p>
-            <a:r>
-              <a:rPr lang="nl-BE" dirty="0" err="1"/>
-              <a:t>tagName</a:t>
-            </a:r>
-            <a:r>
-              <a:rPr lang="nl-BE" dirty="0"/>
-              <a:t>: naam van de tag (bv. P, DIV, H1, H2, …)</a:t>
-            </a:r>
-          </a:p>
-          <a:p>
-            <a:pPr marL="0" indent="0">
-              <a:buNone/>
-            </a:pPr>
-            <a:endParaRPr lang="nl-BE" dirty="0"/>
-          </a:p>
-          <a:p>
-            <a:r>
-              <a:rPr lang="nl-BE" dirty="0" err="1"/>
-              <a:t>parentElement</a:t>
-            </a:r>
-            <a:r>
-              <a:rPr lang="nl-BE" dirty="0"/>
-              <a:t>: de bovenliggende tag. (Bv. bij &lt;p&gt;&lt;b&gt;Hallo&lt;/b&gt;&lt;p&gt; is de p-tag de </a:t>
-            </a:r>
-            <a:r>
-              <a:rPr lang="nl-BE" dirty="0" err="1"/>
-              <a:t>parent</a:t>
-            </a:r>
-            <a:r>
-              <a:rPr lang="nl-BE" dirty="0"/>
-              <a:t> van de b-tag)</a:t>
-            </a:r>
-          </a:p>
-          <a:p>
-            <a:pPr marL="0" indent="0">
-              <a:buNone/>
-            </a:pPr>
-            <a:endParaRPr lang="nl-BE" dirty="0"/>
-          </a:p>
-          <a:p>
-            <a:r>
-              <a:rPr lang="nl-BE" dirty="0" err="1"/>
-              <a:t>children</a:t>
-            </a:r>
-            <a:r>
-              <a:rPr lang="nl-BE" dirty="0"/>
-              <a:t>: de onderliggende tags.</a:t>
-            </a:r>
-          </a:p>
-        </p:txBody>
-      </p:sp>
-    </p:spTree>
-    <p:extLst>
-      <p:ext uri="{BB962C8B-B14F-4D97-AF65-F5344CB8AC3E}">
-        <p14:creationId xmlns:p14="http://schemas.microsoft.com/office/powerpoint/2010/main" val="4286566524"/>
-      </p:ext>
-    </p:extLst>
-  </p:cSld>
-  <p:clrMapOvr>
-    <a:masterClrMapping/>
-  </p:clrMapOvr>
-</p:sld>
-</file>
-
-<file path=ppt/slides/slide56.xml><?xml version="1.0" encoding="utf-8"?>
-<p:sld xmlns:a="http://schemas.openxmlformats.org/drawingml/2006/main" xmlns:r="http://schemas.openxmlformats.org/officeDocument/2006/relationships" xmlns:p="http://schemas.openxmlformats.org/presentationml/2006/main">
-  <p:cSld>
-    <p:spTree>
-      <p:nvGrpSpPr>
-        <p:cNvPr id="1" name=""/>
-        <p:cNvGrpSpPr/>
-        <p:nvPr/>
-      </p:nvGrpSpPr>
-      <p:grpSpPr>
-        <a:xfrm>
-          <a:off x="0" y="0"/>
-          <a:ext cx="0" cy="0"/>
-          <a:chOff x="0" y="0"/>
-          <a:chExt cx="0" cy="0"/>
-        </a:xfrm>
-      </p:grpSpPr>
-      <p:sp>
-        <p:nvSpPr>
-          <p:cNvPr id="2" name="Titel 1">
-            <a:extLst>
-              <a:ext uri="{FF2B5EF4-FFF2-40B4-BE49-F238E27FC236}">
-                <a16:creationId xmlns:a16="http://schemas.microsoft.com/office/drawing/2014/main" id="{21C867F1-C0E5-3584-41C3-689AD76D07BB}"/>
-              </a:ext>
-            </a:extLst>
-          </p:cNvPr>
-          <p:cNvSpPr>
-            <a:spLocks noGrp="1"/>
-          </p:cNvSpPr>
-          <p:nvPr>
-            <p:ph type="title"/>
-          </p:nvPr>
-        </p:nvSpPr>
-        <p:spPr/>
-        <p:txBody>
-          <a:bodyPr/>
-          <a:lstStyle/>
-          <a:p>
-            <a:r>
-              <a:rPr lang="nl-BE" dirty="0"/>
-              <a:t>Elementen overlopen (m.b.v. </a:t>
-            </a:r>
-            <a:r>
-              <a:rPr lang="nl-BE" dirty="0" err="1"/>
-              <a:t>for</a:t>
-            </a:r>
-            <a:r>
-              <a:rPr lang="nl-BE" dirty="0"/>
-              <a:t>-lus)</a:t>
-            </a:r>
-          </a:p>
-        </p:txBody>
-      </p:sp>
-      <p:sp>
-        <p:nvSpPr>
-          <p:cNvPr id="7" name="Tekstvak 6">
-            <a:extLst>
-              <a:ext uri="{FF2B5EF4-FFF2-40B4-BE49-F238E27FC236}">
-                <a16:creationId xmlns:a16="http://schemas.microsoft.com/office/drawing/2014/main" id="{B6B14811-0897-2F82-5CFC-B62CA2E6C8C2}"/>
-              </a:ext>
-            </a:extLst>
-          </p:cNvPr>
-          <p:cNvSpPr txBox="1"/>
-          <p:nvPr/>
-        </p:nvSpPr>
-        <p:spPr>
-          <a:xfrm>
-            <a:off x="1811867" y="3429000"/>
-            <a:ext cx="8331200" cy="1363578"/>
-          </a:xfrm>
-          <a:prstGeom prst="rect">
-            <a:avLst/>
-          </a:prstGeom>
-          <a:noFill/>
-        </p:spPr>
-        <p:txBody>
-          <a:bodyPr wrap="square">
-            <a:spAutoFit/>
-          </a:bodyPr>
-          <a:lstStyle/>
-          <a:p>
-            <a:pPr>
-              <a:lnSpc>
-                <a:spcPts val="1425"/>
-              </a:lnSpc>
-              <a:buNone/>
-            </a:pPr>
-            <a:r>
-              <a:rPr lang="nl-BE" b="0" dirty="0">
-                <a:solidFill>
-                  <a:srgbClr val="0000FF"/>
-                </a:solidFill>
-                <a:effectLst/>
-                <a:latin typeface="Consolas" panose="020B0609020204030204" pitchFamily="49" charset="0"/>
-              </a:rPr>
-              <a:t>let</a:t>
-            </a:r>
-            <a:r>
-              <a:rPr lang="nl-BE" b="0" dirty="0">
-                <a:solidFill>
-                  <a:srgbClr val="000000"/>
-                </a:solidFill>
-                <a:effectLst/>
-                <a:latin typeface="Consolas" panose="020B0609020204030204" pitchFamily="49" charset="0"/>
-              </a:rPr>
-              <a:t> elementen = </a:t>
-            </a:r>
-            <a:r>
-              <a:rPr lang="nl-BE" b="0" dirty="0" err="1">
-                <a:solidFill>
-                  <a:srgbClr val="000000"/>
-                </a:solidFill>
-                <a:effectLst/>
-                <a:latin typeface="Consolas" panose="020B0609020204030204" pitchFamily="49" charset="0"/>
-              </a:rPr>
-              <a:t>document.getElementsByClassName</a:t>
-            </a:r>
-            <a:r>
-              <a:rPr lang="nl-BE" b="0" dirty="0">
-                <a:solidFill>
-                  <a:srgbClr val="000000"/>
-                </a:solidFill>
-                <a:effectLst/>
-                <a:latin typeface="Consolas" panose="020B0609020204030204" pitchFamily="49" charset="0"/>
-              </a:rPr>
-              <a:t>(</a:t>
-            </a:r>
-            <a:r>
-              <a:rPr lang="nl-BE" b="0" dirty="0">
-                <a:solidFill>
-                  <a:srgbClr val="A31515"/>
-                </a:solidFill>
-                <a:effectLst/>
-                <a:latin typeface="Consolas" panose="020B0609020204030204" pitchFamily="49" charset="0"/>
-              </a:rPr>
-              <a:t>"abc"</a:t>
-            </a:r>
-            <a:r>
-              <a:rPr lang="nl-BE" b="0" dirty="0">
-                <a:solidFill>
-                  <a:srgbClr val="000000"/>
-                </a:solidFill>
-                <a:effectLst/>
-                <a:latin typeface="Consolas" panose="020B0609020204030204" pitchFamily="49" charset="0"/>
-              </a:rPr>
-              <a:t>);</a:t>
-            </a:r>
-          </a:p>
-          <a:p>
-            <a:pPr>
-              <a:lnSpc>
-                <a:spcPts val="1425"/>
-              </a:lnSpc>
-              <a:buNone/>
-            </a:pPr>
-            <a:r>
-              <a:rPr lang="nl-BE" b="0" dirty="0">
-                <a:solidFill>
-                  <a:srgbClr val="000000"/>
-                </a:solidFill>
-                <a:effectLst/>
-                <a:latin typeface="Consolas" panose="020B0609020204030204" pitchFamily="49" charset="0"/>
-              </a:rPr>
-              <a:t>    </a:t>
-            </a:r>
-          </a:p>
-          <a:p>
-            <a:pPr>
-              <a:lnSpc>
-                <a:spcPts val="1425"/>
-              </a:lnSpc>
-              <a:buNone/>
-            </a:pPr>
-            <a:r>
-              <a:rPr lang="nl-BE" b="0" dirty="0" err="1">
-                <a:solidFill>
-                  <a:srgbClr val="0000FF"/>
-                </a:solidFill>
-                <a:effectLst/>
-                <a:latin typeface="Consolas" panose="020B0609020204030204" pitchFamily="49" charset="0"/>
-              </a:rPr>
-              <a:t>for</a:t>
-            </a:r>
-            <a:r>
-              <a:rPr lang="nl-BE" b="0" dirty="0">
-                <a:solidFill>
-                  <a:srgbClr val="000000"/>
-                </a:solidFill>
-                <a:effectLst/>
-                <a:latin typeface="Consolas" panose="020B0609020204030204" pitchFamily="49" charset="0"/>
-              </a:rPr>
-              <a:t>(</a:t>
-            </a:r>
-            <a:r>
-              <a:rPr lang="nl-BE" b="0" dirty="0">
-                <a:solidFill>
-                  <a:srgbClr val="0000FF"/>
-                </a:solidFill>
-                <a:effectLst/>
-                <a:latin typeface="Consolas" panose="020B0609020204030204" pitchFamily="49" charset="0"/>
-              </a:rPr>
-              <a:t>let</a:t>
-            </a:r>
-            <a:r>
-              <a:rPr lang="nl-BE" b="0" dirty="0">
-                <a:solidFill>
-                  <a:srgbClr val="000000"/>
-                </a:solidFill>
-                <a:effectLst/>
-                <a:latin typeface="Consolas" panose="020B0609020204030204" pitchFamily="49" charset="0"/>
-              </a:rPr>
-              <a:t> i = </a:t>
-            </a:r>
-            <a:r>
-              <a:rPr lang="nl-BE" b="0" dirty="0">
-                <a:solidFill>
-                  <a:srgbClr val="098658"/>
-                </a:solidFill>
-                <a:effectLst/>
-                <a:latin typeface="Consolas" panose="020B0609020204030204" pitchFamily="49" charset="0"/>
-              </a:rPr>
-              <a:t>0</a:t>
-            </a:r>
-            <a:r>
-              <a:rPr lang="nl-BE" b="0" dirty="0">
-                <a:solidFill>
-                  <a:srgbClr val="000000"/>
-                </a:solidFill>
-                <a:effectLst/>
-                <a:latin typeface="Consolas" panose="020B0609020204030204" pitchFamily="49" charset="0"/>
-              </a:rPr>
-              <a:t>; i &lt; </a:t>
-            </a:r>
-            <a:r>
-              <a:rPr lang="nl-BE" b="0" dirty="0" err="1">
-                <a:solidFill>
-                  <a:srgbClr val="000000"/>
-                </a:solidFill>
-                <a:effectLst/>
-                <a:latin typeface="Consolas" panose="020B0609020204030204" pitchFamily="49" charset="0"/>
-              </a:rPr>
-              <a:t>elementen.length</a:t>
-            </a:r>
-            <a:r>
-              <a:rPr lang="nl-BE" b="0" dirty="0">
-                <a:solidFill>
-                  <a:srgbClr val="000000"/>
-                </a:solidFill>
-                <a:effectLst/>
-                <a:latin typeface="Consolas" panose="020B0609020204030204" pitchFamily="49" charset="0"/>
-              </a:rPr>
-              <a:t>; i++){</a:t>
-            </a:r>
-          </a:p>
-          <a:p>
-            <a:pPr>
-              <a:lnSpc>
-                <a:spcPts val="1425"/>
-              </a:lnSpc>
-              <a:buNone/>
-            </a:pPr>
-            <a:r>
-              <a:rPr lang="nl-BE" dirty="0">
-                <a:solidFill>
-                  <a:srgbClr val="000000"/>
-                </a:solidFill>
-                <a:latin typeface="Consolas" panose="020B0609020204030204" pitchFamily="49" charset="0"/>
-              </a:rPr>
-              <a:t>	</a:t>
-            </a:r>
-          </a:p>
-          <a:p>
-            <a:pPr>
-              <a:lnSpc>
-                <a:spcPts val="1425"/>
-              </a:lnSpc>
-              <a:buNone/>
-            </a:pPr>
-            <a:r>
-              <a:rPr lang="nl-BE" b="0" dirty="0">
-                <a:solidFill>
-                  <a:srgbClr val="000000"/>
-                </a:solidFill>
-                <a:effectLst/>
-                <a:latin typeface="Consolas" panose="020B0609020204030204" pitchFamily="49" charset="0"/>
-              </a:rPr>
-              <a:t>	elementen[i].</a:t>
-            </a:r>
-            <a:r>
-              <a:rPr lang="nl-BE" b="0" dirty="0" err="1">
-                <a:solidFill>
-                  <a:srgbClr val="000000"/>
-                </a:solidFill>
-                <a:effectLst/>
-                <a:latin typeface="Consolas" panose="020B0609020204030204" pitchFamily="49" charset="0"/>
-              </a:rPr>
-              <a:t>setAttribute</a:t>
-            </a:r>
-            <a:r>
-              <a:rPr lang="nl-BE" b="0" dirty="0">
-                <a:solidFill>
-                  <a:srgbClr val="000000"/>
-                </a:solidFill>
-                <a:effectLst/>
-                <a:latin typeface="Consolas" panose="020B0609020204030204" pitchFamily="49" charset="0"/>
-              </a:rPr>
-              <a:t>(</a:t>
-            </a:r>
-            <a:r>
-              <a:rPr lang="nl-BE" b="0" dirty="0">
-                <a:solidFill>
-                  <a:srgbClr val="A31515"/>
-                </a:solidFill>
-                <a:effectLst/>
-                <a:latin typeface="Consolas" panose="020B0609020204030204" pitchFamily="49" charset="0"/>
-              </a:rPr>
-              <a:t>"data-waarde", "1"</a:t>
-            </a:r>
-            <a:r>
-              <a:rPr lang="nl-BE" b="0" dirty="0">
-                <a:solidFill>
-                  <a:srgbClr val="000000"/>
-                </a:solidFill>
-                <a:effectLst/>
-                <a:latin typeface="Consolas" panose="020B0609020204030204" pitchFamily="49" charset="0"/>
-              </a:rPr>
-              <a:t>);</a:t>
-            </a:r>
-          </a:p>
-          <a:p>
-            <a:pPr>
-              <a:lnSpc>
-                <a:spcPts val="1425"/>
-              </a:lnSpc>
-              <a:buNone/>
-            </a:pPr>
-            <a:endParaRPr lang="nl-BE" dirty="0">
-              <a:solidFill>
-                <a:srgbClr val="000000"/>
-              </a:solidFill>
-              <a:latin typeface="Consolas" panose="020B0609020204030204" pitchFamily="49" charset="0"/>
-            </a:endParaRPr>
-          </a:p>
-          <a:p>
-            <a:pPr>
-              <a:lnSpc>
-                <a:spcPts val="1425"/>
-              </a:lnSpc>
-              <a:buNone/>
-            </a:pPr>
-            <a:r>
-              <a:rPr lang="nl-BE" b="0" dirty="0">
-                <a:solidFill>
-                  <a:srgbClr val="000000"/>
-                </a:solidFill>
-                <a:effectLst/>
-                <a:latin typeface="Consolas" panose="020B0609020204030204" pitchFamily="49" charset="0"/>
-              </a:rPr>
-              <a:t>}</a:t>
-            </a:r>
-          </a:p>
-        </p:txBody>
-      </p:sp>
-    </p:spTree>
-    <p:extLst>
-      <p:ext uri="{BB962C8B-B14F-4D97-AF65-F5344CB8AC3E}">
-        <p14:creationId xmlns:p14="http://schemas.microsoft.com/office/powerpoint/2010/main" val="2321844891"/>
-      </p:ext>
-    </p:extLst>
-  </p:cSld>
-  <p:clrMapOvr>
-    <a:masterClrMapping/>
-  </p:clrMapOvr>
-</p:sld>
-</file>
-
-<file path=ppt/slides/slide57.xml><?xml version="1.0" encoding="utf-8"?>
-<p:sld xmlns:a="http://schemas.openxmlformats.org/drawingml/2006/main" xmlns:r="http://schemas.openxmlformats.org/officeDocument/2006/relationships" xmlns:p="http://schemas.openxmlformats.org/presentationml/2006/main">
-  <p:cSld>
-    <p:spTree>
-      <p:nvGrpSpPr>
-        <p:cNvPr id="1" name="">
-          <a:extLst>
-            <a:ext uri="{FF2B5EF4-FFF2-40B4-BE49-F238E27FC236}">
-              <a16:creationId xmlns:a16="http://schemas.microsoft.com/office/drawing/2014/main" id="{EA36D1DA-4AD0-9BA9-3A54-7D1BAE20BFDD}"/>
-            </a:ext>
-          </a:extLst>
-        </p:cNvPr>
-        <p:cNvGrpSpPr/>
-        <p:nvPr/>
-      </p:nvGrpSpPr>
-      <p:grpSpPr>
-        <a:xfrm>
-          <a:off x="0" y="0"/>
-          <a:ext cx="0" cy="0"/>
-          <a:chOff x="0" y="0"/>
-          <a:chExt cx="0" cy="0"/>
-        </a:xfrm>
-      </p:grpSpPr>
-      <p:sp>
-        <p:nvSpPr>
-          <p:cNvPr id="2" name="Titel 1">
-            <a:extLst>
-              <a:ext uri="{FF2B5EF4-FFF2-40B4-BE49-F238E27FC236}">
-                <a16:creationId xmlns:a16="http://schemas.microsoft.com/office/drawing/2014/main" id="{D23151B2-BE39-0C83-723B-DD8CD01DC5C1}"/>
-              </a:ext>
-            </a:extLst>
-          </p:cNvPr>
-          <p:cNvSpPr>
-            <a:spLocks noGrp="1"/>
-          </p:cNvSpPr>
-          <p:nvPr>
-            <p:ph type="title"/>
-          </p:nvPr>
-        </p:nvSpPr>
-        <p:spPr/>
-        <p:txBody>
-          <a:bodyPr/>
-          <a:lstStyle/>
-          <a:p>
-            <a:r>
-              <a:rPr lang="nl-BE" dirty="0"/>
-              <a:t>Elementen overlopen (m.b.v. </a:t>
-            </a:r>
-            <a:r>
-              <a:rPr lang="nl-BE" dirty="0" err="1"/>
-              <a:t>for</a:t>
-            </a:r>
-            <a:r>
-              <a:rPr lang="nl-BE" dirty="0"/>
-              <a:t>-lus)</a:t>
-            </a:r>
-          </a:p>
-        </p:txBody>
-      </p:sp>
-      <p:sp>
-        <p:nvSpPr>
-          <p:cNvPr id="7" name="Tekstvak 6">
-            <a:extLst>
-              <a:ext uri="{FF2B5EF4-FFF2-40B4-BE49-F238E27FC236}">
-                <a16:creationId xmlns:a16="http://schemas.microsoft.com/office/drawing/2014/main" id="{A4C0ABFC-390F-8652-9867-86BB5B1305BF}"/>
-              </a:ext>
-            </a:extLst>
-          </p:cNvPr>
-          <p:cNvSpPr txBox="1"/>
-          <p:nvPr/>
-        </p:nvSpPr>
-        <p:spPr>
-          <a:xfrm>
-            <a:off x="1811867" y="3429000"/>
-            <a:ext cx="8331200" cy="2338204"/>
-          </a:xfrm>
-          <a:prstGeom prst="rect">
-            <a:avLst/>
-          </a:prstGeom>
-          <a:noFill/>
-        </p:spPr>
-        <p:txBody>
-          <a:bodyPr wrap="square">
-            <a:spAutoFit/>
-          </a:bodyPr>
-          <a:lstStyle/>
-          <a:p>
-            <a:pPr>
-              <a:lnSpc>
-                <a:spcPts val="1425"/>
-              </a:lnSpc>
-              <a:spcAft>
-                <a:spcPts val="600"/>
-              </a:spcAft>
-              <a:buNone/>
-            </a:pPr>
-            <a:r>
-              <a:rPr lang="nl-BE" b="0" dirty="0">
-                <a:solidFill>
-                  <a:srgbClr val="0000FF"/>
-                </a:solidFill>
-                <a:effectLst/>
-                <a:latin typeface="Consolas" panose="020B0609020204030204" pitchFamily="49" charset="0"/>
-              </a:rPr>
-              <a:t>let </a:t>
-            </a:r>
-            <a:r>
-              <a:rPr lang="nl-BE" dirty="0">
-                <a:solidFill>
-                  <a:srgbClr val="000000"/>
-                </a:solidFill>
-                <a:latin typeface="Consolas" panose="020B0609020204030204" pitchFamily="49" charset="0"/>
-              </a:rPr>
-              <a:t>element = </a:t>
-            </a:r>
-            <a:r>
-              <a:rPr lang="nl-BE" dirty="0" err="1">
-                <a:solidFill>
-                  <a:srgbClr val="000000"/>
-                </a:solidFill>
-                <a:latin typeface="Consolas" panose="020B0609020204030204" pitchFamily="49" charset="0"/>
-              </a:rPr>
-              <a:t>document.getElementById</a:t>
-            </a:r>
-            <a:r>
-              <a:rPr lang="nl-BE" dirty="0">
-                <a:solidFill>
-                  <a:srgbClr val="000000"/>
-                </a:solidFill>
-                <a:latin typeface="Consolas" panose="020B0609020204030204" pitchFamily="49" charset="0"/>
-              </a:rPr>
-              <a:t>(“p1”);</a:t>
-            </a:r>
-          </a:p>
-          <a:p>
-            <a:pPr>
-              <a:lnSpc>
-                <a:spcPts val="1425"/>
-              </a:lnSpc>
-              <a:spcAft>
-                <a:spcPts val="600"/>
-              </a:spcAft>
-              <a:buNone/>
-            </a:pPr>
-            <a:endParaRPr lang="nl-BE" b="0" dirty="0">
-              <a:solidFill>
-                <a:srgbClr val="0000FF"/>
-              </a:solidFill>
-              <a:effectLst/>
-              <a:latin typeface="Consolas" panose="020B0609020204030204" pitchFamily="49" charset="0"/>
-            </a:endParaRPr>
-          </a:p>
-          <a:p>
-            <a:pPr>
-              <a:lnSpc>
-                <a:spcPts val="1425"/>
-              </a:lnSpc>
-              <a:spcAft>
-                <a:spcPts val="600"/>
-              </a:spcAft>
-              <a:buNone/>
-            </a:pPr>
-            <a:r>
-              <a:rPr lang="nl-BE" b="0" dirty="0">
-                <a:solidFill>
-                  <a:srgbClr val="0000FF"/>
-                </a:solidFill>
-                <a:effectLst/>
-                <a:latin typeface="Consolas" panose="020B0609020204030204" pitchFamily="49" charset="0"/>
-              </a:rPr>
-              <a:t>let</a:t>
-            </a:r>
-            <a:r>
-              <a:rPr lang="nl-BE" b="0" dirty="0">
-                <a:solidFill>
-                  <a:srgbClr val="000000"/>
-                </a:solidFill>
-                <a:effectLst/>
-                <a:latin typeface="Consolas" panose="020B0609020204030204" pitchFamily="49" charset="0"/>
-              </a:rPr>
-              <a:t> </a:t>
-            </a:r>
-            <a:r>
-              <a:rPr lang="nl-BE" b="0" dirty="0" err="1">
-                <a:solidFill>
-                  <a:srgbClr val="000000"/>
-                </a:solidFill>
-                <a:effectLst/>
-                <a:latin typeface="Consolas" panose="020B0609020204030204" pitchFamily="49" charset="0"/>
-              </a:rPr>
-              <a:t>kindelementen</a:t>
-            </a:r>
-            <a:r>
-              <a:rPr lang="nl-BE" b="0" dirty="0">
-                <a:solidFill>
-                  <a:srgbClr val="000000"/>
-                </a:solidFill>
-                <a:effectLst/>
-                <a:latin typeface="Consolas" panose="020B0609020204030204" pitchFamily="49" charset="0"/>
-              </a:rPr>
-              <a:t> = </a:t>
-            </a:r>
-            <a:r>
-              <a:rPr lang="nl-BE" b="0" dirty="0" err="1">
-                <a:solidFill>
-                  <a:srgbClr val="000000"/>
-                </a:solidFill>
-                <a:effectLst/>
-                <a:latin typeface="Consolas" panose="020B0609020204030204" pitchFamily="49" charset="0"/>
-              </a:rPr>
-              <a:t>element.children</a:t>
-            </a:r>
-            <a:r>
-              <a:rPr lang="nl-BE" b="0" dirty="0">
-                <a:solidFill>
-                  <a:srgbClr val="000000"/>
-                </a:solidFill>
-                <a:effectLst/>
-                <a:latin typeface="Consolas" panose="020B0609020204030204" pitchFamily="49" charset="0"/>
-              </a:rPr>
-              <a:t>;</a:t>
-            </a:r>
-          </a:p>
-          <a:p>
-            <a:pPr>
-              <a:lnSpc>
-                <a:spcPts val="1425"/>
-              </a:lnSpc>
-              <a:spcAft>
-                <a:spcPts val="600"/>
-              </a:spcAft>
-              <a:buNone/>
-            </a:pPr>
-            <a:r>
-              <a:rPr lang="nl-BE" b="0" dirty="0">
-                <a:solidFill>
-                  <a:srgbClr val="000000"/>
-                </a:solidFill>
-                <a:effectLst/>
-                <a:latin typeface="Consolas" panose="020B0609020204030204" pitchFamily="49" charset="0"/>
-              </a:rPr>
-              <a:t>    </a:t>
-            </a:r>
-          </a:p>
-          <a:p>
-            <a:pPr>
-              <a:lnSpc>
-                <a:spcPts val="1425"/>
-              </a:lnSpc>
-              <a:spcAft>
-                <a:spcPts val="600"/>
-              </a:spcAft>
-              <a:buNone/>
-            </a:pPr>
-            <a:r>
-              <a:rPr lang="nl-BE" b="0" dirty="0" err="1">
-                <a:solidFill>
-                  <a:srgbClr val="0000FF"/>
-                </a:solidFill>
-                <a:effectLst/>
-                <a:latin typeface="Consolas" panose="020B0609020204030204" pitchFamily="49" charset="0"/>
-              </a:rPr>
-              <a:t>for</a:t>
-            </a:r>
-            <a:r>
-              <a:rPr lang="nl-BE" b="0" dirty="0">
-                <a:solidFill>
-                  <a:srgbClr val="000000"/>
-                </a:solidFill>
-                <a:effectLst/>
-                <a:latin typeface="Consolas" panose="020B0609020204030204" pitchFamily="49" charset="0"/>
-              </a:rPr>
-              <a:t>(</a:t>
-            </a:r>
-            <a:r>
-              <a:rPr lang="nl-BE" b="0" dirty="0">
-                <a:solidFill>
-                  <a:srgbClr val="0000FF"/>
-                </a:solidFill>
-                <a:effectLst/>
-                <a:latin typeface="Consolas" panose="020B0609020204030204" pitchFamily="49" charset="0"/>
-              </a:rPr>
-              <a:t>let</a:t>
-            </a:r>
-            <a:r>
-              <a:rPr lang="nl-BE" b="0" dirty="0">
-                <a:solidFill>
-                  <a:srgbClr val="000000"/>
-                </a:solidFill>
-                <a:effectLst/>
-                <a:latin typeface="Consolas" panose="020B0609020204030204" pitchFamily="49" charset="0"/>
-              </a:rPr>
-              <a:t> i = </a:t>
-            </a:r>
-            <a:r>
-              <a:rPr lang="nl-BE" b="0" dirty="0">
-                <a:solidFill>
-                  <a:srgbClr val="098658"/>
-                </a:solidFill>
-                <a:effectLst/>
-                <a:latin typeface="Consolas" panose="020B0609020204030204" pitchFamily="49" charset="0"/>
-              </a:rPr>
-              <a:t>0</a:t>
-            </a:r>
-            <a:r>
-              <a:rPr lang="nl-BE" b="0" dirty="0">
-                <a:solidFill>
-                  <a:srgbClr val="000000"/>
-                </a:solidFill>
-                <a:effectLst/>
-                <a:latin typeface="Consolas" panose="020B0609020204030204" pitchFamily="49" charset="0"/>
-              </a:rPr>
-              <a:t>; i &lt; </a:t>
-            </a:r>
-            <a:r>
-              <a:rPr lang="nl-BE" dirty="0" err="1">
-                <a:solidFill>
-                  <a:srgbClr val="000000"/>
-                </a:solidFill>
-                <a:latin typeface="Consolas" panose="020B0609020204030204" pitchFamily="49" charset="0"/>
-              </a:rPr>
-              <a:t>kindelementen</a:t>
-            </a:r>
-            <a:r>
-              <a:rPr lang="nl-BE" b="0" dirty="0" err="1">
-                <a:solidFill>
-                  <a:srgbClr val="000000"/>
-                </a:solidFill>
-                <a:effectLst/>
-                <a:latin typeface="Consolas" panose="020B0609020204030204" pitchFamily="49" charset="0"/>
-              </a:rPr>
-              <a:t>.length</a:t>
-            </a:r>
-            <a:r>
-              <a:rPr lang="nl-BE" b="0" dirty="0">
-                <a:solidFill>
-                  <a:srgbClr val="000000"/>
-                </a:solidFill>
-                <a:effectLst/>
-                <a:latin typeface="Consolas" panose="020B0609020204030204" pitchFamily="49" charset="0"/>
-              </a:rPr>
-              <a:t>; i++){</a:t>
-            </a:r>
-          </a:p>
-          <a:p>
-            <a:pPr>
-              <a:lnSpc>
-                <a:spcPts val="1425"/>
-              </a:lnSpc>
-              <a:spcAft>
-                <a:spcPts val="600"/>
-              </a:spcAft>
-              <a:buNone/>
-            </a:pPr>
-            <a:r>
-              <a:rPr lang="nl-BE" dirty="0">
-                <a:solidFill>
-                  <a:srgbClr val="000000"/>
-                </a:solidFill>
-                <a:latin typeface="Consolas" panose="020B0609020204030204" pitchFamily="49" charset="0"/>
-              </a:rPr>
-              <a:t>	</a:t>
-            </a:r>
-          </a:p>
-          <a:p>
-            <a:pPr>
-              <a:lnSpc>
-                <a:spcPts val="1425"/>
-              </a:lnSpc>
-              <a:spcAft>
-                <a:spcPts val="600"/>
-              </a:spcAft>
-              <a:buNone/>
-            </a:pPr>
-            <a:r>
-              <a:rPr lang="nl-BE" b="0" dirty="0">
-                <a:solidFill>
-                  <a:srgbClr val="000000"/>
-                </a:solidFill>
-                <a:effectLst/>
-                <a:latin typeface="Consolas" panose="020B0609020204030204" pitchFamily="49" charset="0"/>
-              </a:rPr>
-              <a:t>	</a:t>
-            </a:r>
-            <a:r>
-              <a:rPr lang="nl-BE" dirty="0">
-                <a:solidFill>
-                  <a:srgbClr val="000000"/>
-                </a:solidFill>
-                <a:latin typeface="Consolas" panose="020B0609020204030204" pitchFamily="49" charset="0"/>
-              </a:rPr>
-              <a:t> </a:t>
-            </a:r>
-            <a:r>
-              <a:rPr lang="nl-BE" dirty="0" err="1">
-                <a:solidFill>
-                  <a:srgbClr val="000000"/>
-                </a:solidFill>
-                <a:latin typeface="Consolas" panose="020B0609020204030204" pitchFamily="49" charset="0"/>
-              </a:rPr>
-              <a:t>kindelementen</a:t>
-            </a:r>
-            <a:r>
-              <a:rPr lang="nl-BE" b="0" dirty="0">
-                <a:solidFill>
-                  <a:srgbClr val="000000"/>
-                </a:solidFill>
-                <a:effectLst/>
-                <a:latin typeface="Consolas" panose="020B0609020204030204" pitchFamily="49" charset="0"/>
-              </a:rPr>
-              <a:t>[i].</a:t>
-            </a:r>
-            <a:r>
-              <a:rPr lang="nl-BE" b="0" dirty="0" err="1">
-                <a:solidFill>
-                  <a:srgbClr val="000000"/>
-                </a:solidFill>
-                <a:effectLst/>
-                <a:latin typeface="Consolas" panose="020B0609020204030204" pitchFamily="49" charset="0"/>
-              </a:rPr>
-              <a:t>setAttribute</a:t>
-            </a:r>
-            <a:r>
-              <a:rPr lang="nl-BE" b="0" dirty="0">
-                <a:solidFill>
-                  <a:srgbClr val="000000"/>
-                </a:solidFill>
-                <a:effectLst/>
-                <a:latin typeface="Consolas" panose="020B0609020204030204" pitchFamily="49" charset="0"/>
-              </a:rPr>
-              <a:t>(</a:t>
-            </a:r>
-            <a:r>
-              <a:rPr lang="nl-BE" b="0" dirty="0">
-                <a:solidFill>
-                  <a:srgbClr val="A31515"/>
-                </a:solidFill>
-                <a:effectLst/>
-                <a:latin typeface="Consolas" panose="020B0609020204030204" pitchFamily="49" charset="0"/>
-              </a:rPr>
-              <a:t>"data-waarde", "1"</a:t>
-            </a:r>
-            <a:r>
-              <a:rPr lang="nl-BE" b="0" dirty="0">
-                <a:solidFill>
-                  <a:srgbClr val="000000"/>
-                </a:solidFill>
-                <a:effectLst/>
-                <a:latin typeface="Consolas" panose="020B0609020204030204" pitchFamily="49" charset="0"/>
-              </a:rPr>
-              <a:t>);</a:t>
-            </a:r>
-          </a:p>
-          <a:p>
-            <a:pPr>
-              <a:lnSpc>
-                <a:spcPts val="1425"/>
-              </a:lnSpc>
-              <a:spcAft>
-                <a:spcPts val="600"/>
-              </a:spcAft>
-              <a:buNone/>
-            </a:pPr>
-            <a:endParaRPr lang="nl-BE" dirty="0">
-              <a:solidFill>
-                <a:srgbClr val="000000"/>
-              </a:solidFill>
-              <a:latin typeface="Consolas" panose="020B0609020204030204" pitchFamily="49" charset="0"/>
-            </a:endParaRPr>
-          </a:p>
-          <a:p>
-            <a:pPr>
-              <a:lnSpc>
-                <a:spcPts val="1425"/>
-              </a:lnSpc>
-              <a:spcAft>
-                <a:spcPts val="600"/>
-              </a:spcAft>
-              <a:buNone/>
-            </a:pPr>
-            <a:r>
-              <a:rPr lang="nl-BE" b="0" dirty="0">
-                <a:solidFill>
-                  <a:srgbClr val="000000"/>
-                </a:solidFill>
-                <a:effectLst/>
-                <a:latin typeface="Consolas" panose="020B0609020204030204" pitchFamily="49" charset="0"/>
-              </a:rPr>
-              <a:t>}</a:t>
-            </a:r>
-          </a:p>
-        </p:txBody>
-      </p:sp>
-    </p:spTree>
-    <p:extLst>
-      <p:ext uri="{BB962C8B-B14F-4D97-AF65-F5344CB8AC3E}">
-        <p14:creationId xmlns:p14="http://schemas.microsoft.com/office/powerpoint/2010/main" val="723633610"/>
-      </p:ext>
-    </p:extLst>
-  </p:cSld>
-  <p:clrMapOvr>
-    <a:masterClrMapping/>
-  </p:clrMapOvr>
-</p:sld>
-</file>
-
-<file path=ppt/slides/slide58.xml><?xml version="1.0" encoding="utf-8"?>
-<p:sld xmlns:a="http://schemas.openxmlformats.org/drawingml/2006/main" xmlns:r="http://schemas.openxmlformats.org/officeDocument/2006/relationships" xmlns:p="http://schemas.openxmlformats.org/presentationml/2006/main">
-  <p:cSld>
-    <p:spTree>
-      <p:nvGrpSpPr>
-        <p:cNvPr id="1" name=""/>
-        <p:cNvGrpSpPr/>
-        <p:nvPr/>
-      </p:nvGrpSpPr>
-      <p:grpSpPr>
-        <a:xfrm>
-          <a:off x="0" y="0"/>
-          <a:ext cx="0" cy="0"/>
-          <a:chOff x="0" y="0"/>
-          <a:chExt cx="0" cy="0"/>
-        </a:xfrm>
-      </p:grpSpPr>
-      <p:sp>
-        <p:nvSpPr>
-          <p:cNvPr id="2" name="Titel 1">
-            <a:extLst>
-              <a:ext uri="{FF2B5EF4-FFF2-40B4-BE49-F238E27FC236}">
-                <a16:creationId xmlns:a16="http://schemas.microsoft.com/office/drawing/2014/main" id="{C252A94B-7D43-C610-5D1F-A82D2EE54D82}"/>
-              </a:ext>
-            </a:extLst>
-          </p:cNvPr>
-          <p:cNvSpPr>
-            <a:spLocks noGrp="1"/>
-          </p:cNvSpPr>
-          <p:nvPr>
-            <p:ph type="title"/>
-          </p:nvPr>
-        </p:nvSpPr>
-        <p:spPr/>
-        <p:txBody>
-          <a:bodyPr/>
-          <a:lstStyle/>
-          <a:p>
-            <a:r>
-              <a:rPr lang="nl-BE" dirty="0"/>
-              <a:t>Elementen evalueren (M.b.v. </a:t>
-            </a:r>
-            <a:r>
-              <a:rPr lang="nl-BE" dirty="0" err="1"/>
-              <a:t>if-else</a:t>
-            </a:r>
-            <a:r>
-              <a:rPr lang="nl-BE" dirty="0"/>
-              <a:t>)</a:t>
-            </a:r>
-          </a:p>
-        </p:txBody>
-      </p:sp>
-      <p:sp>
-        <p:nvSpPr>
-          <p:cNvPr id="5" name="Tekstvak 4">
-            <a:extLst>
-              <a:ext uri="{FF2B5EF4-FFF2-40B4-BE49-F238E27FC236}">
-                <a16:creationId xmlns:a16="http://schemas.microsoft.com/office/drawing/2014/main" id="{CC30B339-17E8-3DC1-5998-6C8B1D75AEDF}"/>
-              </a:ext>
-            </a:extLst>
-          </p:cNvPr>
-          <p:cNvSpPr txBox="1"/>
-          <p:nvPr/>
-        </p:nvSpPr>
-        <p:spPr>
-          <a:xfrm>
-            <a:off x="2498652" y="2705865"/>
-            <a:ext cx="8601739" cy="3364126"/>
-          </a:xfrm>
-          <a:prstGeom prst="rect">
-            <a:avLst/>
-          </a:prstGeom>
-          <a:noFill/>
-        </p:spPr>
-        <p:txBody>
-          <a:bodyPr wrap="square">
-            <a:spAutoFit/>
-          </a:bodyPr>
-          <a:lstStyle/>
-          <a:p>
-            <a:pPr>
-              <a:lnSpc>
-                <a:spcPts val="1425"/>
-              </a:lnSpc>
-              <a:spcAft>
-                <a:spcPts val="600"/>
-              </a:spcAft>
-              <a:buNone/>
-            </a:pPr>
-            <a:r>
-              <a:rPr lang="nl-BE" b="0" dirty="0" err="1">
-                <a:solidFill>
-                  <a:srgbClr val="0000FF"/>
-                </a:solidFill>
-                <a:effectLst/>
-                <a:latin typeface="Consolas" panose="020B0609020204030204" pitchFamily="49" charset="0"/>
-              </a:rPr>
-              <a:t>function</a:t>
-            </a:r>
-            <a:r>
-              <a:rPr lang="nl-BE" b="0" dirty="0">
-                <a:solidFill>
-                  <a:srgbClr val="000000"/>
-                </a:solidFill>
-                <a:effectLst/>
-                <a:latin typeface="Consolas" panose="020B0609020204030204" pitchFamily="49" charset="0"/>
-              </a:rPr>
-              <a:t> test(e){</a:t>
-            </a:r>
-          </a:p>
-          <a:p>
-            <a:pPr>
-              <a:lnSpc>
-                <a:spcPts val="1425"/>
-              </a:lnSpc>
-              <a:spcAft>
-                <a:spcPts val="600"/>
-              </a:spcAft>
-              <a:buNone/>
-            </a:pPr>
-            <a:endParaRPr lang="nl-BE" b="0" dirty="0">
-              <a:solidFill>
-                <a:srgbClr val="000000"/>
-              </a:solidFill>
-              <a:effectLst/>
-              <a:latin typeface="Consolas" panose="020B0609020204030204" pitchFamily="49" charset="0"/>
-            </a:endParaRPr>
-          </a:p>
-          <a:p>
-            <a:pPr>
-              <a:lnSpc>
-                <a:spcPts val="1425"/>
-              </a:lnSpc>
-              <a:spcAft>
-                <a:spcPts val="600"/>
-              </a:spcAft>
-              <a:buNone/>
-            </a:pPr>
-            <a:r>
-              <a:rPr lang="nl-BE" b="0" dirty="0">
-                <a:solidFill>
-                  <a:srgbClr val="0000FF"/>
-                </a:solidFill>
-                <a:effectLst/>
-                <a:latin typeface="Consolas" panose="020B0609020204030204" pitchFamily="49" charset="0"/>
-              </a:rPr>
-              <a:t>	let</a:t>
-            </a:r>
-            <a:r>
-              <a:rPr lang="nl-BE" b="0" dirty="0">
-                <a:solidFill>
-                  <a:srgbClr val="000000"/>
-                </a:solidFill>
-                <a:effectLst/>
-                <a:latin typeface="Consolas" panose="020B0609020204030204" pitchFamily="49" charset="0"/>
-              </a:rPr>
-              <a:t> p1 = </a:t>
-            </a:r>
-            <a:r>
-              <a:rPr lang="nl-BE" b="0" dirty="0" err="1">
-                <a:solidFill>
-                  <a:srgbClr val="000000"/>
-                </a:solidFill>
-                <a:effectLst/>
-                <a:latin typeface="Consolas" panose="020B0609020204030204" pitchFamily="49" charset="0"/>
-              </a:rPr>
-              <a:t>document.getElementById</a:t>
-            </a:r>
-            <a:r>
-              <a:rPr lang="nl-BE" b="0" dirty="0">
-                <a:solidFill>
-                  <a:srgbClr val="000000"/>
-                </a:solidFill>
-                <a:effectLst/>
-                <a:latin typeface="Consolas" panose="020B0609020204030204" pitchFamily="49" charset="0"/>
-              </a:rPr>
-              <a:t>(</a:t>
-            </a:r>
-            <a:r>
-              <a:rPr lang="nl-BE" b="0" dirty="0">
-                <a:solidFill>
-                  <a:srgbClr val="A31515"/>
-                </a:solidFill>
-                <a:effectLst/>
-                <a:latin typeface="Consolas" panose="020B0609020204030204" pitchFamily="49" charset="0"/>
-              </a:rPr>
-              <a:t>"p1"</a:t>
-            </a:r>
-            <a:r>
-              <a:rPr lang="nl-BE" b="0" dirty="0">
-                <a:solidFill>
-                  <a:srgbClr val="000000"/>
-                </a:solidFill>
-                <a:effectLst/>
-                <a:latin typeface="Consolas" panose="020B0609020204030204" pitchFamily="49" charset="0"/>
-              </a:rPr>
-              <a:t>);</a:t>
-            </a:r>
-          </a:p>
-          <a:p>
-            <a:pPr>
-              <a:lnSpc>
-                <a:spcPts val="1425"/>
-              </a:lnSpc>
-              <a:spcAft>
-                <a:spcPts val="600"/>
-              </a:spcAft>
-              <a:buNone/>
-            </a:pPr>
-            <a:r>
-              <a:rPr lang="nl-BE" b="0" dirty="0">
-                <a:solidFill>
-                  <a:srgbClr val="000000"/>
-                </a:solidFill>
-                <a:effectLst/>
-                <a:latin typeface="Consolas" panose="020B0609020204030204" pitchFamily="49" charset="0"/>
-              </a:rPr>
-              <a:t>    </a:t>
-            </a:r>
-          </a:p>
-          <a:p>
-            <a:pPr>
-              <a:lnSpc>
-                <a:spcPts val="1425"/>
-              </a:lnSpc>
-              <a:spcAft>
-                <a:spcPts val="600"/>
-              </a:spcAft>
-              <a:buNone/>
-            </a:pPr>
-            <a:r>
-              <a:rPr lang="nl-BE" dirty="0">
-                <a:solidFill>
-                  <a:srgbClr val="000000"/>
-                </a:solidFill>
-                <a:latin typeface="Consolas" panose="020B0609020204030204" pitchFamily="49" charset="0"/>
-              </a:rPr>
-              <a:t>	</a:t>
-            </a:r>
-            <a:r>
-              <a:rPr lang="nl-BE" b="0" dirty="0" err="1">
-                <a:solidFill>
-                  <a:srgbClr val="0000FF"/>
-                </a:solidFill>
-                <a:effectLst/>
-                <a:latin typeface="Consolas" panose="020B0609020204030204" pitchFamily="49" charset="0"/>
-              </a:rPr>
-              <a:t>if</a:t>
-            </a:r>
-            <a:r>
-              <a:rPr lang="nl-BE" b="0" dirty="0">
-                <a:solidFill>
-                  <a:srgbClr val="000000"/>
-                </a:solidFill>
-                <a:effectLst/>
-                <a:latin typeface="Consolas" panose="020B0609020204030204" pitchFamily="49" charset="0"/>
-              </a:rPr>
-              <a:t>(p1.getAttribute(</a:t>
-            </a:r>
-            <a:r>
-              <a:rPr lang="nl-BE" b="0" dirty="0">
-                <a:solidFill>
-                  <a:srgbClr val="A31515"/>
-                </a:solidFill>
-                <a:effectLst/>
-                <a:latin typeface="Consolas" panose="020B0609020204030204" pitchFamily="49" charset="0"/>
-              </a:rPr>
-              <a:t>"data-waarde"</a:t>
-            </a:r>
-            <a:r>
-              <a:rPr lang="nl-BE" b="0" dirty="0">
-                <a:solidFill>
-                  <a:srgbClr val="000000"/>
-                </a:solidFill>
-                <a:effectLst/>
-                <a:latin typeface="Consolas" panose="020B0609020204030204" pitchFamily="49" charset="0"/>
-              </a:rPr>
-              <a:t>) == </a:t>
-            </a:r>
-            <a:r>
-              <a:rPr lang="nl-BE" b="0" dirty="0">
-                <a:solidFill>
-                  <a:srgbClr val="A31515"/>
-                </a:solidFill>
-                <a:effectLst/>
-                <a:latin typeface="Consolas" panose="020B0609020204030204" pitchFamily="49" charset="0"/>
-              </a:rPr>
-              <a:t>"A"</a:t>
-            </a:r>
-            <a:r>
-              <a:rPr lang="nl-BE" b="0" dirty="0">
-                <a:solidFill>
-                  <a:srgbClr val="000000"/>
-                </a:solidFill>
-                <a:effectLst/>
-                <a:latin typeface="Consolas" panose="020B0609020204030204" pitchFamily="49" charset="0"/>
-              </a:rPr>
-              <a:t>)</a:t>
-            </a:r>
-          </a:p>
-          <a:p>
-            <a:pPr>
-              <a:lnSpc>
-                <a:spcPts val="1425"/>
-              </a:lnSpc>
-              <a:spcAft>
-                <a:spcPts val="600"/>
-              </a:spcAft>
-              <a:buNone/>
-            </a:pPr>
-            <a:r>
-              <a:rPr lang="nl-BE" dirty="0">
-                <a:solidFill>
-                  <a:srgbClr val="000000"/>
-                </a:solidFill>
-                <a:latin typeface="Consolas" panose="020B0609020204030204" pitchFamily="49" charset="0"/>
-              </a:rPr>
-              <a:t>	{</a:t>
-            </a:r>
-            <a:endParaRPr lang="nl-BE" b="0" dirty="0">
-              <a:solidFill>
-                <a:srgbClr val="000000"/>
-              </a:solidFill>
-              <a:effectLst/>
-              <a:latin typeface="Consolas" panose="020B0609020204030204" pitchFamily="49" charset="0"/>
-            </a:endParaRPr>
-          </a:p>
-          <a:p>
-            <a:pPr>
-              <a:lnSpc>
-                <a:spcPts val="1425"/>
-              </a:lnSpc>
-              <a:spcAft>
-                <a:spcPts val="600"/>
-              </a:spcAft>
-              <a:buNone/>
-            </a:pPr>
-            <a:r>
-              <a:rPr lang="nl-BE" dirty="0">
-                <a:solidFill>
-                  <a:srgbClr val="000000"/>
-                </a:solidFill>
-                <a:latin typeface="Consolas" panose="020B0609020204030204" pitchFamily="49" charset="0"/>
-              </a:rPr>
-              <a:t>		</a:t>
-            </a:r>
-            <a:r>
-              <a:rPr lang="nl-BE" b="0" dirty="0">
-                <a:solidFill>
-                  <a:srgbClr val="000000"/>
-                </a:solidFill>
-                <a:effectLst/>
-                <a:latin typeface="Consolas" panose="020B0609020204030204" pitchFamily="49" charset="0"/>
-              </a:rPr>
-              <a:t>p1.innerText = </a:t>
-            </a:r>
-            <a:r>
-              <a:rPr lang="nl-BE" b="0" dirty="0">
-                <a:solidFill>
-                  <a:srgbClr val="A31515"/>
-                </a:solidFill>
-                <a:effectLst/>
-                <a:latin typeface="Consolas" panose="020B0609020204030204" pitchFamily="49" charset="0"/>
-              </a:rPr>
-              <a:t>"A"</a:t>
-            </a:r>
-            <a:r>
-              <a:rPr lang="nl-BE" b="0" dirty="0">
-                <a:solidFill>
-                  <a:srgbClr val="000000"/>
-                </a:solidFill>
-                <a:effectLst/>
-                <a:latin typeface="Consolas" panose="020B0609020204030204" pitchFamily="49" charset="0"/>
-              </a:rPr>
-              <a:t>;</a:t>
-            </a:r>
-          </a:p>
-          <a:p>
-            <a:pPr>
-              <a:lnSpc>
-                <a:spcPts val="1425"/>
-              </a:lnSpc>
-              <a:spcAft>
-                <a:spcPts val="600"/>
-              </a:spcAft>
-              <a:buNone/>
-            </a:pPr>
-            <a:r>
-              <a:rPr lang="nl-BE" b="0" dirty="0">
-                <a:solidFill>
-                  <a:srgbClr val="000000"/>
-                </a:solidFill>
-                <a:effectLst/>
-                <a:latin typeface="Consolas" panose="020B0609020204030204" pitchFamily="49" charset="0"/>
-              </a:rPr>
-              <a:t>    	}</a:t>
-            </a:r>
-          </a:p>
-          <a:p>
-            <a:pPr>
-              <a:lnSpc>
-                <a:spcPts val="1425"/>
-              </a:lnSpc>
-              <a:spcAft>
-                <a:spcPts val="600"/>
-              </a:spcAft>
-              <a:buNone/>
-            </a:pPr>
-            <a:r>
-              <a:rPr lang="nl-BE" dirty="0">
-                <a:solidFill>
-                  <a:srgbClr val="000000"/>
-                </a:solidFill>
-                <a:latin typeface="Consolas" panose="020B0609020204030204" pitchFamily="49" charset="0"/>
-              </a:rPr>
-              <a:t>	</a:t>
-            </a:r>
-            <a:r>
-              <a:rPr lang="nl-BE" b="0" dirty="0" err="1">
-                <a:solidFill>
-                  <a:srgbClr val="0000FF"/>
-                </a:solidFill>
-                <a:effectLst/>
-                <a:latin typeface="Consolas" panose="020B0609020204030204" pitchFamily="49" charset="0"/>
-              </a:rPr>
-              <a:t>else</a:t>
-            </a:r>
-            <a:endParaRPr lang="nl-BE" b="0" dirty="0">
-              <a:solidFill>
-                <a:srgbClr val="000000"/>
-              </a:solidFill>
-              <a:effectLst/>
-              <a:latin typeface="Consolas" panose="020B0609020204030204" pitchFamily="49" charset="0"/>
-            </a:endParaRPr>
-          </a:p>
-          <a:p>
-            <a:pPr>
-              <a:lnSpc>
-                <a:spcPts val="1425"/>
-              </a:lnSpc>
-              <a:spcAft>
-                <a:spcPts val="600"/>
-              </a:spcAft>
-              <a:buNone/>
-            </a:pPr>
-            <a:r>
-              <a:rPr lang="nl-BE" b="0" dirty="0">
-                <a:solidFill>
-                  <a:srgbClr val="000000"/>
-                </a:solidFill>
-                <a:effectLst/>
-                <a:latin typeface="Consolas" panose="020B0609020204030204" pitchFamily="49" charset="0"/>
-              </a:rPr>
-              <a:t>       {</a:t>
-            </a:r>
-          </a:p>
-          <a:p>
-            <a:pPr>
-              <a:lnSpc>
-                <a:spcPts val="1425"/>
-              </a:lnSpc>
-              <a:spcAft>
-                <a:spcPts val="600"/>
-              </a:spcAft>
-              <a:buNone/>
-            </a:pPr>
-            <a:r>
-              <a:rPr lang="nl-BE" dirty="0">
-                <a:solidFill>
-                  <a:srgbClr val="000000"/>
-                </a:solidFill>
-                <a:latin typeface="Consolas" panose="020B0609020204030204" pitchFamily="49" charset="0"/>
-              </a:rPr>
-              <a:t>		</a:t>
-            </a:r>
-            <a:r>
-              <a:rPr lang="nl-BE" b="0" dirty="0">
-                <a:solidFill>
-                  <a:srgbClr val="000000"/>
-                </a:solidFill>
-                <a:effectLst/>
-                <a:latin typeface="Consolas" panose="020B0609020204030204" pitchFamily="49" charset="0"/>
-              </a:rPr>
-              <a:t>p1.innerText = </a:t>
-            </a:r>
-            <a:r>
-              <a:rPr lang="nl-BE" b="0" dirty="0">
-                <a:solidFill>
-                  <a:srgbClr val="A31515"/>
-                </a:solidFill>
-                <a:effectLst/>
-                <a:latin typeface="Consolas" panose="020B0609020204030204" pitchFamily="49" charset="0"/>
-              </a:rPr>
-              <a:t>"B"</a:t>
-            </a:r>
-            <a:r>
-              <a:rPr lang="nl-BE" b="0" dirty="0">
-                <a:solidFill>
-                  <a:srgbClr val="000000"/>
-                </a:solidFill>
-                <a:effectLst/>
-                <a:latin typeface="Consolas" panose="020B0609020204030204" pitchFamily="49" charset="0"/>
-              </a:rPr>
-              <a:t>;</a:t>
-            </a:r>
-          </a:p>
-          <a:p>
-            <a:pPr>
-              <a:lnSpc>
-                <a:spcPts val="1425"/>
-              </a:lnSpc>
-              <a:spcAft>
-                <a:spcPts val="600"/>
-              </a:spcAft>
-              <a:buNone/>
-            </a:pPr>
-            <a:r>
-              <a:rPr lang="nl-BE" b="0" dirty="0">
-                <a:solidFill>
-                  <a:srgbClr val="000000"/>
-                </a:solidFill>
-                <a:effectLst/>
-                <a:latin typeface="Consolas" panose="020B0609020204030204" pitchFamily="49" charset="0"/>
-              </a:rPr>
-              <a:t>	}</a:t>
-            </a:r>
-          </a:p>
-          <a:p>
-            <a:pPr>
-              <a:lnSpc>
-                <a:spcPts val="1425"/>
-              </a:lnSpc>
-              <a:spcAft>
-                <a:spcPts val="600"/>
-              </a:spcAft>
-              <a:buNone/>
-            </a:pPr>
-            <a:r>
-              <a:rPr lang="nl-BE" b="0" dirty="0">
-                <a:solidFill>
-                  <a:srgbClr val="000000"/>
-                </a:solidFill>
-                <a:effectLst/>
-                <a:latin typeface="Consolas" panose="020B0609020204030204" pitchFamily="49" charset="0"/>
-              </a:rPr>
-              <a:t>}</a:t>
-            </a:r>
-          </a:p>
-        </p:txBody>
-      </p:sp>
-    </p:spTree>
-    <p:extLst>
-      <p:ext uri="{BB962C8B-B14F-4D97-AF65-F5344CB8AC3E}">
-        <p14:creationId xmlns:p14="http://schemas.microsoft.com/office/powerpoint/2010/main" val="3005535933"/>
-      </p:ext>
-    </p:extLst>
-  </p:cSld>
-  <p:clrMapOvr>
-    <a:masterClrMapping/>
-  </p:clrMapOvr>
-</p:sld>
-</file>
-
-<file path=ppt/slides/slide59.xml><?xml version="1.0" encoding="utf-8"?>
-<p:sld xmlns:a="http://schemas.openxmlformats.org/drawingml/2006/main" xmlns:r="http://schemas.openxmlformats.org/officeDocument/2006/relationships" xmlns:p="http://schemas.openxmlformats.org/presentationml/2006/main">
-  <p:cSld>
-    <p:spTree>
-      <p:nvGrpSpPr>
-        <p:cNvPr id="1" name=""/>
-        <p:cNvGrpSpPr/>
-        <p:nvPr/>
-      </p:nvGrpSpPr>
-      <p:grpSpPr>
-        <a:xfrm>
-          <a:off x="0" y="0"/>
-          <a:ext cx="0" cy="0"/>
-          <a:chOff x="0" y="0"/>
-          <a:chExt cx="0" cy="0"/>
-        </a:xfrm>
-      </p:grpSpPr>
-      <p:sp>
-        <p:nvSpPr>
-          <p:cNvPr id="2" name="Titel 1">
-            <a:extLst>
-              <a:ext uri="{FF2B5EF4-FFF2-40B4-BE49-F238E27FC236}">
-                <a16:creationId xmlns:a16="http://schemas.microsoft.com/office/drawing/2014/main" id="{8A1E1CD1-4679-4258-9F5A-8A87F23CD8E9}"/>
-              </a:ext>
-            </a:extLst>
-          </p:cNvPr>
-          <p:cNvSpPr>
-            <a:spLocks noGrp="1"/>
-          </p:cNvSpPr>
-          <p:nvPr>
-            <p:ph type="title"/>
-          </p:nvPr>
-        </p:nvSpPr>
-        <p:spPr/>
-        <p:txBody>
-          <a:bodyPr/>
-          <a:lstStyle/>
-          <a:p>
-            <a:r>
-              <a:rPr lang="nl-BE" dirty="0"/>
-              <a:t>Opdrachten</a:t>
-            </a:r>
-          </a:p>
-        </p:txBody>
-      </p:sp>
-      <p:sp>
-        <p:nvSpPr>
-          <p:cNvPr id="3" name="Tijdelijke aanduiding voor inhoud 2">
-            <a:extLst>
-              <a:ext uri="{FF2B5EF4-FFF2-40B4-BE49-F238E27FC236}">
-                <a16:creationId xmlns:a16="http://schemas.microsoft.com/office/drawing/2014/main" id="{88043A32-EE52-64EB-FCD5-5DBAEF80E0ED}"/>
-              </a:ext>
-            </a:extLst>
-          </p:cNvPr>
-          <p:cNvSpPr>
-            <a:spLocks noGrp="1"/>
-          </p:cNvSpPr>
-          <p:nvPr>
-            <p:ph idx="1"/>
-          </p:nvPr>
-        </p:nvSpPr>
-        <p:spPr>
-          <a:xfrm>
-            <a:off x="581192" y="1890876"/>
-            <a:ext cx="11029615" cy="4967124"/>
-          </a:xfrm>
-        </p:spPr>
-        <p:txBody>
-          <a:bodyPr>
-            <a:normAutofit/>
-          </a:bodyPr>
-          <a:lstStyle/>
-          <a:p>
-            <a:pPr>
-              <a:spcAft>
-                <a:spcPts val="3000"/>
-              </a:spcAft>
-            </a:pPr>
-            <a:r>
-              <a:rPr lang="nl-BE" dirty="0"/>
-              <a:t>Maak een webpagina met een paragraaf en een knop. Zorg ervoor dat als je op de knop klikt, de volgende tekst in de paragraaf komt: "Op de knop geklikt“.</a:t>
-            </a:r>
-          </a:p>
-          <a:p>
-            <a:pPr>
-              <a:spcAft>
-                <a:spcPts val="3000"/>
-              </a:spcAft>
-            </a:pPr>
-            <a:r>
-              <a:rPr lang="nl-BE" dirty="0"/>
-              <a:t>Breid de vorige oefening uit, waarbij je nu toont hoeveel keer er op de knop werd geklikt. Bv. “1 keer geklikt”, “2 keer geklikt”, …</a:t>
-            </a:r>
-          </a:p>
-          <a:p>
-            <a:pPr>
-              <a:spcAft>
-                <a:spcPts val="3000"/>
-              </a:spcAft>
-            </a:pPr>
-            <a:r>
-              <a:rPr lang="nl-BE" dirty="0"/>
-              <a:t>Maak een webpagina met een paragraaf, met een zelfgekozen zin (minstens 5 woorden). Zorg ervoor dat als je met de muis over de paragraaf beweegt, alle woorden worden getoond. Als je muis de paragraaf verlaat, toon je slechts de eerste 3 woorden.</a:t>
-            </a:r>
-          </a:p>
-          <a:p>
-            <a:pPr>
-              <a:spcAft>
-                <a:spcPts val="3000"/>
-              </a:spcAft>
-            </a:pPr>
-            <a:r>
-              <a:rPr lang="nl-BE" dirty="0"/>
-              <a:t>Maak een webpagina met 2 div-elementen. Neem in elk div-element 3 paragraaf-elementen op, met tekst. Zorg ervoor dat als je op een paragraaf klikt, de andere verdwijnen binnen deze div.</a:t>
-            </a:r>
-          </a:p>
-        </p:txBody>
-      </p:sp>
-    </p:spTree>
-    <p:extLst>
-      <p:ext uri="{BB962C8B-B14F-4D97-AF65-F5344CB8AC3E}">
-        <p14:creationId xmlns:p14="http://schemas.microsoft.com/office/powerpoint/2010/main" val="2505658942"/>
       </p:ext>
     </p:extLst>
   </p:cSld>
@@ -22865,6 +22770,2044 @@
   <p:cSld>
     <p:spTree>
       <p:nvGrpSpPr>
+        <p:cNvPr id="1" name=""/>
+        <p:cNvGrpSpPr/>
+        <p:nvPr/>
+      </p:nvGrpSpPr>
+      <p:grpSpPr>
+        <a:xfrm>
+          <a:off x="0" y="0"/>
+          <a:ext cx="0" cy="0"/>
+          <a:chOff x="0" y="0"/>
+          <a:chExt cx="0" cy="0"/>
+        </a:xfrm>
+      </p:grpSpPr>
+      <p:sp>
+        <p:nvSpPr>
+          <p:cNvPr id="2" name="Titel 1">
+            <a:extLst>
+              <a:ext uri="{FF2B5EF4-FFF2-40B4-BE49-F238E27FC236}">
+                <a16:creationId xmlns:a16="http://schemas.microsoft.com/office/drawing/2014/main" id="{4DAFA998-36CE-8805-ADFD-BDC91B66C5F1}"/>
+              </a:ext>
+            </a:extLst>
+          </p:cNvPr>
+          <p:cNvSpPr>
+            <a:spLocks noGrp="1"/>
+          </p:cNvSpPr>
+          <p:nvPr>
+            <p:ph type="title"/>
+          </p:nvPr>
+        </p:nvSpPr>
+        <p:spPr/>
+        <p:txBody>
+          <a:bodyPr/>
+          <a:lstStyle/>
+          <a:p>
+            <a:r>
+              <a:rPr lang="nl-BE" dirty="0"/>
+              <a:t>Uitlezen attributen</a:t>
+            </a:r>
+          </a:p>
+        </p:txBody>
+      </p:sp>
+      <p:sp>
+        <p:nvSpPr>
+          <p:cNvPr id="3" name="Tijdelijke aanduiding voor inhoud 2">
+            <a:extLst>
+              <a:ext uri="{FF2B5EF4-FFF2-40B4-BE49-F238E27FC236}">
+                <a16:creationId xmlns:a16="http://schemas.microsoft.com/office/drawing/2014/main" id="{C836F053-5EF6-11BF-9078-583F9ADCB9CA}"/>
+              </a:ext>
+            </a:extLst>
+          </p:cNvPr>
+          <p:cNvSpPr>
+            <a:spLocks noGrp="1"/>
+          </p:cNvSpPr>
+          <p:nvPr>
+            <p:ph idx="1"/>
+          </p:nvPr>
+        </p:nvSpPr>
+        <p:spPr/>
+        <p:txBody>
+          <a:bodyPr>
+            <a:normAutofit fontScale="85000" lnSpcReduction="10000"/>
+          </a:bodyPr>
+          <a:lstStyle/>
+          <a:p>
+            <a:pPr>
+              <a:lnSpc>
+                <a:spcPct val="300000"/>
+              </a:lnSpc>
+            </a:pPr>
+            <a:r>
+              <a:rPr lang="nl-BE" i="1" dirty="0" err="1"/>
+              <a:t>element.hasAttribute</a:t>
+            </a:r>
+            <a:r>
+              <a:rPr lang="nl-BE" i="1" dirty="0"/>
+              <a:t>(“naam attribuut”)				</a:t>
+            </a:r>
+            <a:r>
+              <a:rPr lang="nl-BE" dirty="0"/>
+              <a:t>Bv. p1.hasAttribute(“data-waarde”)</a:t>
+            </a:r>
+          </a:p>
+          <a:p>
+            <a:pPr>
+              <a:lnSpc>
+                <a:spcPct val="300000"/>
+              </a:lnSpc>
+            </a:pPr>
+            <a:r>
+              <a:rPr lang="nl-BE" dirty="0" err="1"/>
+              <a:t>element.setAttribute</a:t>
+            </a:r>
+            <a:r>
+              <a:rPr lang="nl-BE" dirty="0"/>
+              <a:t>(“naam attribuut”, “waarde”)			Bv. p1.setAttribute(“data-waarde”, “</a:t>
+            </a:r>
+            <a:r>
+              <a:rPr lang="nl-BE" dirty="0" err="1"/>
+              <a:t>Azerty</a:t>
+            </a:r>
+            <a:r>
+              <a:rPr lang="nl-BE"/>
+              <a:t>”)</a:t>
+            </a:r>
+            <a:endParaRPr lang="nl-BE" dirty="0"/>
+          </a:p>
+          <a:p>
+            <a:pPr>
+              <a:lnSpc>
+                <a:spcPct val="300000"/>
+              </a:lnSpc>
+            </a:pPr>
+            <a:r>
+              <a:rPr lang="nl-BE" i="1" dirty="0" err="1"/>
+              <a:t>element.attribuut</a:t>
+            </a:r>
+            <a:r>
+              <a:rPr lang="nl-BE" i="1" dirty="0"/>
+              <a:t>								</a:t>
+            </a:r>
+            <a:r>
+              <a:rPr lang="nl-BE" dirty="0"/>
+              <a:t>Bv. p1.id</a:t>
+            </a:r>
+          </a:p>
+          <a:p>
+            <a:pPr>
+              <a:lnSpc>
+                <a:spcPct val="300000"/>
+              </a:lnSpc>
+            </a:pPr>
+            <a:r>
+              <a:rPr lang="nl-BE" i="1" dirty="0" err="1"/>
+              <a:t>element.getAttribute</a:t>
+            </a:r>
+            <a:r>
+              <a:rPr lang="nl-BE" i="1" dirty="0"/>
+              <a:t>("naam attribuut")				</a:t>
+            </a:r>
+            <a:r>
+              <a:rPr lang="nl-BE" dirty="0"/>
+              <a:t>Bv. p1.getAttribute("data-waarde")</a:t>
+            </a:r>
+          </a:p>
+          <a:p>
+            <a:pPr>
+              <a:lnSpc>
+                <a:spcPct val="300000"/>
+              </a:lnSpc>
+            </a:pPr>
+            <a:r>
+              <a:rPr lang="nl-BE" i="1" dirty="0" err="1"/>
+              <a:t>element.removeAttribute</a:t>
+            </a:r>
+            <a:r>
+              <a:rPr lang="nl-BE" i="1" dirty="0"/>
+              <a:t>(“naam attribuut”)			Bv. p1.removeAttribute(“</a:t>
+            </a:r>
+            <a:r>
+              <a:rPr lang="nl-BE" i="1" dirty="0" err="1"/>
+              <a:t>hidden</a:t>
+            </a:r>
+            <a:r>
+              <a:rPr lang="nl-BE" i="1" dirty="0"/>
+              <a:t>”)</a:t>
+            </a:r>
+          </a:p>
+        </p:txBody>
+      </p:sp>
+    </p:spTree>
+    <p:extLst>
+      <p:ext uri="{BB962C8B-B14F-4D97-AF65-F5344CB8AC3E}">
+        <p14:creationId xmlns:p14="http://schemas.microsoft.com/office/powerpoint/2010/main" val="1547160706"/>
+      </p:ext>
+    </p:extLst>
+  </p:cSld>
+  <p:clrMapOvr>
+    <a:masterClrMapping/>
+  </p:clrMapOvr>
+</p:sld>
+</file>
+
+<file path=ppt/slides/slide61.xml><?xml version="1.0" encoding="utf-8"?>
+<p:sld xmlns:a="http://schemas.openxmlformats.org/drawingml/2006/main" xmlns:r="http://schemas.openxmlformats.org/officeDocument/2006/relationships" xmlns:p="http://schemas.openxmlformats.org/presentationml/2006/main">
+  <p:cSld>
+    <p:spTree>
+      <p:nvGrpSpPr>
+        <p:cNvPr id="1" name="">
+          <a:extLst>
+            <a:ext uri="{FF2B5EF4-FFF2-40B4-BE49-F238E27FC236}">
+              <a16:creationId xmlns:a16="http://schemas.microsoft.com/office/drawing/2014/main" id="{91A5478D-0622-05BA-5D33-062F2A182EB3}"/>
+            </a:ext>
+          </a:extLst>
+        </p:cNvPr>
+        <p:cNvGrpSpPr/>
+        <p:nvPr/>
+      </p:nvGrpSpPr>
+      <p:grpSpPr>
+        <a:xfrm>
+          <a:off x="0" y="0"/>
+          <a:ext cx="0" cy="0"/>
+          <a:chOff x="0" y="0"/>
+          <a:chExt cx="0" cy="0"/>
+        </a:xfrm>
+      </p:grpSpPr>
+      <p:sp>
+        <p:nvSpPr>
+          <p:cNvPr id="2" name="Titel 1">
+            <a:extLst>
+              <a:ext uri="{FF2B5EF4-FFF2-40B4-BE49-F238E27FC236}">
+                <a16:creationId xmlns:a16="http://schemas.microsoft.com/office/drawing/2014/main" id="{5C4E335F-8143-1B7C-7A2E-4CC72C386903}"/>
+              </a:ext>
+            </a:extLst>
+          </p:cNvPr>
+          <p:cNvSpPr>
+            <a:spLocks noGrp="1"/>
+          </p:cNvSpPr>
+          <p:nvPr>
+            <p:ph type="title"/>
+          </p:nvPr>
+        </p:nvSpPr>
+        <p:spPr/>
+        <p:txBody>
+          <a:bodyPr/>
+          <a:lstStyle/>
+          <a:p>
+            <a:r>
+              <a:rPr lang="nl-BE" dirty="0"/>
+              <a:t>Uitlezen attributen: class</a:t>
+            </a:r>
+          </a:p>
+        </p:txBody>
+      </p:sp>
+      <p:sp>
+        <p:nvSpPr>
+          <p:cNvPr id="3" name="Tijdelijke aanduiding voor inhoud 2">
+            <a:extLst>
+              <a:ext uri="{FF2B5EF4-FFF2-40B4-BE49-F238E27FC236}">
+                <a16:creationId xmlns:a16="http://schemas.microsoft.com/office/drawing/2014/main" id="{B9127A27-F7F7-2B91-6E98-C8B341DC6D11}"/>
+              </a:ext>
+            </a:extLst>
+          </p:cNvPr>
+          <p:cNvSpPr>
+            <a:spLocks noGrp="1"/>
+          </p:cNvSpPr>
+          <p:nvPr>
+            <p:ph idx="1"/>
+          </p:nvPr>
+        </p:nvSpPr>
+        <p:spPr/>
+        <p:txBody>
+          <a:bodyPr/>
+          <a:lstStyle/>
+          <a:p>
+            <a:r>
+              <a:rPr lang="nl-BE" i="1" dirty="0"/>
+              <a:t>Classes van een element beschikbaar via .</a:t>
+            </a:r>
+            <a:r>
+              <a:rPr lang="nl-BE" i="1" dirty="0" err="1"/>
+              <a:t>classList</a:t>
+            </a:r>
+            <a:endParaRPr lang="nl-BE" i="1" dirty="0"/>
+          </a:p>
+          <a:p>
+            <a:r>
+              <a:rPr lang="nl-BE" i="1" dirty="0"/>
+              <a:t>Functies op </a:t>
+            </a:r>
+            <a:r>
+              <a:rPr lang="nl-BE" i="1" dirty="0" err="1"/>
+              <a:t>classList</a:t>
+            </a:r>
+            <a:r>
+              <a:rPr lang="nl-BE" i="1" dirty="0"/>
+              <a:t>:</a:t>
+            </a:r>
+          </a:p>
+          <a:p>
+            <a:pPr lvl="1"/>
+            <a:r>
+              <a:rPr lang="nl-BE" i="1" dirty="0" err="1"/>
+              <a:t>add</a:t>
+            </a:r>
+            <a:r>
+              <a:rPr lang="nl-BE" i="1" dirty="0"/>
+              <a:t>(class): voegt class toe aan de lijst van classes</a:t>
+            </a:r>
+          </a:p>
+          <a:p>
+            <a:pPr lvl="1"/>
+            <a:r>
+              <a:rPr lang="nl-BE" i="1" dirty="0" err="1"/>
+              <a:t>remove</a:t>
+            </a:r>
+            <a:r>
+              <a:rPr lang="nl-BE" i="1" dirty="0"/>
+              <a:t>(class): verwijdert class uit de lijst van classes</a:t>
+            </a:r>
+          </a:p>
+          <a:p>
+            <a:pPr lvl="1"/>
+            <a:r>
+              <a:rPr lang="nl-BE" i="1" dirty="0" err="1"/>
+              <a:t>Contains</a:t>
+            </a:r>
+            <a:r>
+              <a:rPr lang="nl-BE" i="1" dirty="0"/>
+              <a:t>(class): gaat na of de class voorkomt in de lijst van classes</a:t>
+            </a:r>
+            <a:endParaRPr lang="nl-BE" dirty="0"/>
+          </a:p>
+        </p:txBody>
+      </p:sp>
+    </p:spTree>
+    <p:extLst>
+      <p:ext uri="{BB962C8B-B14F-4D97-AF65-F5344CB8AC3E}">
+        <p14:creationId xmlns:p14="http://schemas.microsoft.com/office/powerpoint/2010/main" val="3570912639"/>
+      </p:ext>
+    </p:extLst>
+  </p:cSld>
+  <p:clrMapOvr>
+    <a:masterClrMapping/>
+  </p:clrMapOvr>
+</p:sld>
+</file>
+
+<file path=ppt/slides/slide62.xml><?xml version="1.0" encoding="utf-8"?>
+<p:sld xmlns:a="http://schemas.openxmlformats.org/drawingml/2006/main" xmlns:r="http://schemas.openxmlformats.org/officeDocument/2006/relationships" xmlns:p="http://schemas.openxmlformats.org/presentationml/2006/main">
+  <p:cSld>
+    <p:spTree>
+      <p:nvGrpSpPr>
+        <p:cNvPr id="1" name=""/>
+        <p:cNvGrpSpPr/>
+        <p:nvPr/>
+      </p:nvGrpSpPr>
+      <p:grpSpPr>
+        <a:xfrm>
+          <a:off x="0" y="0"/>
+          <a:ext cx="0" cy="0"/>
+          <a:chOff x="0" y="0"/>
+          <a:chExt cx="0" cy="0"/>
+        </a:xfrm>
+      </p:grpSpPr>
+      <p:sp>
+        <p:nvSpPr>
+          <p:cNvPr id="2" name="Titel 1">
+            <a:extLst>
+              <a:ext uri="{FF2B5EF4-FFF2-40B4-BE49-F238E27FC236}">
+                <a16:creationId xmlns:a16="http://schemas.microsoft.com/office/drawing/2014/main" id="{2E18B115-CFB0-DAA2-6213-76EED52452CA}"/>
+              </a:ext>
+            </a:extLst>
+          </p:cNvPr>
+          <p:cNvSpPr>
+            <a:spLocks noGrp="1"/>
+          </p:cNvSpPr>
+          <p:nvPr>
+            <p:ph type="title"/>
+          </p:nvPr>
+        </p:nvSpPr>
+        <p:spPr/>
+        <p:txBody>
+          <a:bodyPr/>
+          <a:lstStyle/>
+          <a:p>
+            <a:r>
+              <a:rPr lang="nl-BE" dirty="0"/>
+              <a:t>Eigenschappen van elementen</a:t>
+            </a:r>
+          </a:p>
+        </p:txBody>
+      </p:sp>
+      <p:sp>
+        <p:nvSpPr>
+          <p:cNvPr id="3" name="Tijdelijke aanduiding voor inhoud 2">
+            <a:extLst>
+              <a:ext uri="{FF2B5EF4-FFF2-40B4-BE49-F238E27FC236}">
+                <a16:creationId xmlns:a16="http://schemas.microsoft.com/office/drawing/2014/main" id="{8AA2CD61-9F66-24DD-D34D-6E56967FEEAA}"/>
+              </a:ext>
+            </a:extLst>
+          </p:cNvPr>
+          <p:cNvSpPr>
+            <a:spLocks noGrp="1"/>
+          </p:cNvSpPr>
+          <p:nvPr>
+            <p:ph idx="1"/>
+          </p:nvPr>
+        </p:nvSpPr>
+        <p:spPr/>
+        <p:txBody>
+          <a:bodyPr/>
+          <a:lstStyle/>
+          <a:p>
+            <a:r>
+              <a:rPr lang="nl-BE" dirty="0" err="1"/>
+              <a:t>tagName</a:t>
+            </a:r>
+            <a:r>
+              <a:rPr lang="nl-BE" dirty="0"/>
+              <a:t>: naam van de tag (bv. P, DIV, H1, H2, …)</a:t>
+            </a:r>
+          </a:p>
+          <a:p>
+            <a:pPr marL="0" indent="0">
+              <a:buNone/>
+            </a:pPr>
+            <a:endParaRPr lang="nl-BE" dirty="0"/>
+          </a:p>
+          <a:p>
+            <a:r>
+              <a:rPr lang="nl-BE" dirty="0" err="1"/>
+              <a:t>parentElement</a:t>
+            </a:r>
+            <a:r>
+              <a:rPr lang="nl-BE" dirty="0"/>
+              <a:t>: de bovenliggende tag. (Bv. bij &lt;p&gt;&lt;b&gt;Hallo&lt;/b&gt;&lt;p&gt; is de p-tag de </a:t>
+            </a:r>
+            <a:r>
+              <a:rPr lang="nl-BE" dirty="0" err="1"/>
+              <a:t>parent</a:t>
+            </a:r>
+            <a:r>
+              <a:rPr lang="nl-BE" dirty="0"/>
+              <a:t> van de b-tag)</a:t>
+            </a:r>
+          </a:p>
+          <a:p>
+            <a:pPr marL="0" indent="0">
+              <a:buNone/>
+            </a:pPr>
+            <a:endParaRPr lang="nl-BE" dirty="0"/>
+          </a:p>
+          <a:p>
+            <a:r>
+              <a:rPr lang="nl-BE" dirty="0" err="1"/>
+              <a:t>children</a:t>
+            </a:r>
+            <a:r>
+              <a:rPr lang="nl-BE" dirty="0"/>
+              <a:t>: de onderliggende tags.</a:t>
+            </a:r>
+          </a:p>
+        </p:txBody>
+      </p:sp>
+    </p:spTree>
+    <p:extLst>
+      <p:ext uri="{BB962C8B-B14F-4D97-AF65-F5344CB8AC3E}">
+        <p14:creationId xmlns:p14="http://schemas.microsoft.com/office/powerpoint/2010/main" val="4286566524"/>
+      </p:ext>
+    </p:extLst>
+  </p:cSld>
+  <p:clrMapOvr>
+    <a:masterClrMapping/>
+  </p:clrMapOvr>
+</p:sld>
+</file>
+
+<file path=ppt/slides/slide63.xml><?xml version="1.0" encoding="utf-8"?>
+<p:sld xmlns:a="http://schemas.openxmlformats.org/drawingml/2006/main" xmlns:r="http://schemas.openxmlformats.org/officeDocument/2006/relationships" xmlns:p="http://schemas.openxmlformats.org/presentationml/2006/main">
+  <p:cSld>
+    <p:spTree>
+      <p:nvGrpSpPr>
+        <p:cNvPr id="1" name=""/>
+        <p:cNvGrpSpPr/>
+        <p:nvPr/>
+      </p:nvGrpSpPr>
+      <p:grpSpPr>
+        <a:xfrm>
+          <a:off x="0" y="0"/>
+          <a:ext cx="0" cy="0"/>
+          <a:chOff x="0" y="0"/>
+          <a:chExt cx="0" cy="0"/>
+        </a:xfrm>
+      </p:grpSpPr>
+      <p:sp>
+        <p:nvSpPr>
+          <p:cNvPr id="2" name="Titel 1">
+            <a:extLst>
+              <a:ext uri="{FF2B5EF4-FFF2-40B4-BE49-F238E27FC236}">
+                <a16:creationId xmlns:a16="http://schemas.microsoft.com/office/drawing/2014/main" id="{21C867F1-C0E5-3584-41C3-689AD76D07BB}"/>
+              </a:ext>
+            </a:extLst>
+          </p:cNvPr>
+          <p:cNvSpPr>
+            <a:spLocks noGrp="1"/>
+          </p:cNvSpPr>
+          <p:nvPr>
+            <p:ph type="title"/>
+          </p:nvPr>
+        </p:nvSpPr>
+        <p:spPr/>
+        <p:txBody>
+          <a:bodyPr/>
+          <a:lstStyle/>
+          <a:p>
+            <a:r>
+              <a:rPr lang="nl-BE" dirty="0"/>
+              <a:t>Elementen overlopen (m.b.v. </a:t>
+            </a:r>
+            <a:r>
+              <a:rPr lang="nl-BE" dirty="0" err="1"/>
+              <a:t>for</a:t>
+            </a:r>
+            <a:r>
+              <a:rPr lang="nl-BE" dirty="0"/>
+              <a:t>-lus)</a:t>
+            </a:r>
+          </a:p>
+        </p:txBody>
+      </p:sp>
+      <p:sp>
+        <p:nvSpPr>
+          <p:cNvPr id="7" name="Tekstvak 6">
+            <a:extLst>
+              <a:ext uri="{FF2B5EF4-FFF2-40B4-BE49-F238E27FC236}">
+                <a16:creationId xmlns:a16="http://schemas.microsoft.com/office/drawing/2014/main" id="{B6B14811-0897-2F82-5CFC-B62CA2E6C8C2}"/>
+              </a:ext>
+            </a:extLst>
+          </p:cNvPr>
+          <p:cNvSpPr txBox="1"/>
+          <p:nvPr/>
+        </p:nvSpPr>
+        <p:spPr>
+          <a:xfrm>
+            <a:off x="1811867" y="3429000"/>
+            <a:ext cx="8331200" cy="1363578"/>
+          </a:xfrm>
+          <a:prstGeom prst="rect">
+            <a:avLst/>
+          </a:prstGeom>
+          <a:noFill/>
+        </p:spPr>
+        <p:txBody>
+          <a:bodyPr wrap="square">
+            <a:spAutoFit/>
+          </a:bodyPr>
+          <a:lstStyle/>
+          <a:p>
+            <a:pPr>
+              <a:lnSpc>
+                <a:spcPts val="1425"/>
+              </a:lnSpc>
+              <a:buNone/>
+            </a:pPr>
+            <a:r>
+              <a:rPr lang="nl-BE" b="0" dirty="0">
+                <a:solidFill>
+                  <a:srgbClr val="0000FF"/>
+                </a:solidFill>
+                <a:effectLst/>
+                <a:latin typeface="Consolas" panose="020B0609020204030204" pitchFamily="49" charset="0"/>
+              </a:rPr>
+              <a:t>let</a:t>
+            </a:r>
+            <a:r>
+              <a:rPr lang="nl-BE" b="0" dirty="0">
+                <a:solidFill>
+                  <a:srgbClr val="000000"/>
+                </a:solidFill>
+                <a:effectLst/>
+                <a:latin typeface="Consolas" panose="020B0609020204030204" pitchFamily="49" charset="0"/>
+              </a:rPr>
+              <a:t> elementen = </a:t>
+            </a:r>
+            <a:r>
+              <a:rPr lang="nl-BE" b="0" dirty="0" err="1">
+                <a:solidFill>
+                  <a:srgbClr val="000000"/>
+                </a:solidFill>
+                <a:effectLst/>
+                <a:latin typeface="Consolas" panose="020B0609020204030204" pitchFamily="49" charset="0"/>
+              </a:rPr>
+              <a:t>document.getElementsByClassName</a:t>
+            </a:r>
+            <a:r>
+              <a:rPr lang="nl-BE" b="0" dirty="0">
+                <a:solidFill>
+                  <a:srgbClr val="000000"/>
+                </a:solidFill>
+                <a:effectLst/>
+                <a:latin typeface="Consolas" panose="020B0609020204030204" pitchFamily="49" charset="0"/>
+              </a:rPr>
+              <a:t>(</a:t>
+            </a:r>
+            <a:r>
+              <a:rPr lang="nl-BE" b="0" dirty="0">
+                <a:solidFill>
+                  <a:srgbClr val="A31515"/>
+                </a:solidFill>
+                <a:effectLst/>
+                <a:latin typeface="Consolas" panose="020B0609020204030204" pitchFamily="49" charset="0"/>
+              </a:rPr>
+              <a:t>"abc"</a:t>
+            </a:r>
+            <a:r>
+              <a:rPr lang="nl-BE" b="0" dirty="0">
+                <a:solidFill>
+                  <a:srgbClr val="000000"/>
+                </a:solidFill>
+                <a:effectLst/>
+                <a:latin typeface="Consolas" panose="020B0609020204030204" pitchFamily="49" charset="0"/>
+              </a:rPr>
+              <a:t>);</a:t>
+            </a:r>
+          </a:p>
+          <a:p>
+            <a:pPr>
+              <a:lnSpc>
+                <a:spcPts val="1425"/>
+              </a:lnSpc>
+              <a:buNone/>
+            </a:pPr>
+            <a:r>
+              <a:rPr lang="nl-BE" b="0" dirty="0">
+                <a:solidFill>
+                  <a:srgbClr val="000000"/>
+                </a:solidFill>
+                <a:effectLst/>
+                <a:latin typeface="Consolas" panose="020B0609020204030204" pitchFamily="49" charset="0"/>
+              </a:rPr>
+              <a:t>    </a:t>
+            </a:r>
+          </a:p>
+          <a:p>
+            <a:pPr>
+              <a:lnSpc>
+                <a:spcPts val="1425"/>
+              </a:lnSpc>
+              <a:buNone/>
+            </a:pPr>
+            <a:r>
+              <a:rPr lang="nl-BE" b="0" dirty="0" err="1">
+                <a:solidFill>
+                  <a:srgbClr val="0000FF"/>
+                </a:solidFill>
+                <a:effectLst/>
+                <a:latin typeface="Consolas" panose="020B0609020204030204" pitchFamily="49" charset="0"/>
+              </a:rPr>
+              <a:t>for</a:t>
+            </a:r>
+            <a:r>
+              <a:rPr lang="nl-BE" b="0" dirty="0">
+                <a:solidFill>
+                  <a:srgbClr val="000000"/>
+                </a:solidFill>
+                <a:effectLst/>
+                <a:latin typeface="Consolas" panose="020B0609020204030204" pitchFamily="49" charset="0"/>
+              </a:rPr>
+              <a:t>(</a:t>
+            </a:r>
+            <a:r>
+              <a:rPr lang="nl-BE" b="0" dirty="0">
+                <a:solidFill>
+                  <a:srgbClr val="0000FF"/>
+                </a:solidFill>
+                <a:effectLst/>
+                <a:latin typeface="Consolas" panose="020B0609020204030204" pitchFamily="49" charset="0"/>
+              </a:rPr>
+              <a:t>let</a:t>
+            </a:r>
+            <a:r>
+              <a:rPr lang="nl-BE" b="0" dirty="0">
+                <a:solidFill>
+                  <a:srgbClr val="000000"/>
+                </a:solidFill>
+                <a:effectLst/>
+                <a:latin typeface="Consolas" panose="020B0609020204030204" pitchFamily="49" charset="0"/>
+              </a:rPr>
+              <a:t> i = </a:t>
+            </a:r>
+            <a:r>
+              <a:rPr lang="nl-BE" b="0" dirty="0">
+                <a:solidFill>
+                  <a:srgbClr val="098658"/>
+                </a:solidFill>
+                <a:effectLst/>
+                <a:latin typeface="Consolas" panose="020B0609020204030204" pitchFamily="49" charset="0"/>
+              </a:rPr>
+              <a:t>0</a:t>
+            </a:r>
+            <a:r>
+              <a:rPr lang="nl-BE" b="0" dirty="0">
+                <a:solidFill>
+                  <a:srgbClr val="000000"/>
+                </a:solidFill>
+                <a:effectLst/>
+                <a:latin typeface="Consolas" panose="020B0609020204030204" pitchFamily="49" charset="0"/>
+              </a:rPr>
+              <a:t>; i &lt; </a:t>
+            </a:r>
+            <a:r>
+              <a:rPr lang="nl-BE" b="0" dirty="0" err="1">
+                <a:solidFill>
+                  <a:srgbClr val="000000"/>
+                </a:solidFill>
+                <a:effectLst/>
+                <a:latin typeface="Consolas" panose="020B0609020204030204" pitchFamily="49" charset="0"/>
+              </a:rPr>
+              <a:t>elementen.length</a:t>
+            </a:r>
+            <a:r>
+              <a:rPr lang="nl-BE" b="0" dirty="0">
+                <a:solidFill>
+                  <a:srgbClr val="000000"/>
+                </a:solidFill>
+                <a:effectLst/>
+                <a:latin typeface="Consolas" panose="020B0609020204030204" pitchFamily="49" charset="0"/>
+              </a:rPr>
+              <a:t>; i++){</a:t>
+            </a:r>
+          </a:p>
+          <a:p>
+            <a:pPr>
+              <a:lnSpc>
+                <a:spcPts val="1425"/>
+              </a:lnSpc>
+              <a:buNone/>
+            </a:pPr>
+            <a:r>
+              <a:rPr lang="nl-BE" dirty="0">
+                <a:solidFill>
+                  <a:srgbClr val="000000"/>
+                </a:solidFill>
+                <a:latin typeface="Consolas" panose="020B0609020204030204" pitchFamily="49" charset="0"/>
+              </a:rPr>
+              <a:t>	</a:t>
+            </a:r>
+          </a:p>
+          <a:p>
+            <a:pPr>
+              <a:lnSpc>
+                <a:spcPts val="1425"/>
+              </a:lnSpc>
+              <a:buNone/>
+            </a:pPr>
+            <a:r>
+              <a:rPr lang="nl-BE" b="0" dirty="0">
+                <a:solidFill>
+                  <a:srgbClr val="000000"/>
+                </a:solidFill>
+                <a:effectLst/>
+                <a:latin typeface="Consolas" panose="020B0609020204030204" pitchFamily="49" charset="0"/>
+              </a:rPr>
+              <a:t>	elementen[i].</a:t>
+            </a:r>
+            <a:r>
+              <a:rPr lang="nl-BE" b="0" dirty="0" err="1">
+                <a:solidFill>
+                  <a:srgbClr val="000000"/>
+                </a:solidFill>
+                <a:effectLst/>
+                <a:latin typeface="Consolas" panose="020B0609020204030204" pitchFamily="49" charset="0"/>
+              </a:rPr>
+              <a:t>setAttribute</a:t>
+            </a:r>
+            <a:r>
+              <a:rPr lang="nl-BE" b="0" dirty="0">
+                <a:solidFill>
+                  <a:srgbClr val="000000"/>
+                </a:solidFill>
+                <a:effectLst/>
+                <a:latin typeface="Consolas" panose="020B0609020204030204" pitchFamily="49" charset="0"/>
+              </a:rPr>
+              <a:t>(</a:t>
+            </a:r>
+            <a:r>
+              <a:rPr lang="nl-BE" b="0" dirty="0">
+                <a:solidFill>
+                  <a:srgbClr val="A31515"/>
+                </a:solidFill>
+                <a:effectLst/>
+                <a:latin typeface="Consolas" panose="020B0609020204030204" pitchFamily="49" charset="0"/>
+              </a:rPr>
+              <a:t>"data-waarde", "1"</a:t>
+            </a:r>
+            <a:r>
+              <a:rPr lang="nl-BE" b="0" dirty="0">
+                <a:solidFill>
+                  <a:srgbClr val="000000"/>
+                </a:solidFill>
+                <a:effectLst/>
+                <a:latin typeface="Consolas" panose="020B0609020204030204" pitchFamily="49" charset="0"/>
+              </a:rPr>
+              <a:t>);</a:t>
+            </a:r>
+          </a:p>
+          <a:p>
+            <a:pPr>
+              <a:lnSpc>
+                <a:spcPts val="1425"/>
+              </a:lnSpc>
+              <a:buNone/>
+            </a:pPr>
+            <a:endParaRPr lang="nl-BE" dirty="0">
+              <a:solidFill>
+                <a:srgbClr val="000000"/>
+              </a:solidFill>
+              <a:latin typeface="Consolas" panose="020B0609020204030204" pitchFamily="49" charset="0"/>
+            </a:endParaRPr>
+          </a:p>
+          <a:p>
+            <a:pPr>
+              <a:lnSpc>
+                <a:spcPts val="1425"/>
+              </a:lnSpc>
+              <a:buNone/>
+            </a:pPr>
+            <a:r>
+              <a:rPr lang="nl-BE" b="0" dirty="0">
+                <a:solidFill>
+                  <a:srgbClr val="000000"/>
+                </a:solidFill>
+                <a:effectLst/>
+                <a:latin typeface="Consolas" panose="020B0609020204030204" pitchFamily="49" charset="0"/>
+              </a:rPr>
+              <a:t>}</a:t>
+            </a:r>
+          </a:p>
+        </p:txBody>
+      </p:sp>
+    </p:spTree>
+    <p:extLst>
+      <p:ext uri="{BB962C8B-B14F-4D97-AF65-F5344CB8AC3E}">
+        <p14:creationId xmlns:p14="http://schemas.microsoft.com/office/powerpoint/2010/main" val="2321844891"/>
+      </p:ext>
+    </p:extLst>
+  </p:cSld>
+  <p:clrMapOvr>
+    <a:masterClrMapping/>
+  </p:clrMapOvr>
+</p:sld>
+</file>
+
+<file path=ppt/slides/slide64.xml><?xml version="1.0" encoding="utf-8"?>
+<p:sld xmlns:a="http://schemas.openxmlformats.org/drawingml/2006/main" xmlns:r="http://schemas.openxmlformats.org/officeDocument/2006/relationships" xmlns:p="http://schemas.openxmlformats.org/presentationml/2006/main">
+  <p:cSld>
+    <p:spTree>
+      <p:nvGrpSpPr>
+        <p:cNvPr id="1" name="">
+          <a:extLst>
+            <a:ext uri="{FF2B5EF4-FFF2-40B4-BE49-F238E27FC236}">
+              <a16:creationId xmlns:a16="http://schemas.microsoft.com/office/drawing/2014/main" id="{EA36D1DA-4AD0-9BA9-3A54-7D1BAE20BFDD}"/>
+            </a:ext>
+          </a:extLst>
+        </p:cNvPr>
+        <p:cNvGrpSpPr/>
+        <p:nvPr/>
+      </p:nvGrpSpPr>
+      <p:grpSpPr>
+        <a:xfrm>
+          <a:off x="0" y="0"/>
+          <a:ext cx="0" cy="0"/>
+          <a:chOff x="0" y="0"/>
+          <a:chExt cx="0" cy="0"/>
+        </a:xfrm>
+      </p:grpSpPr>
+      <p:sp>
+        <p:nvSpPr>
+          <p:cNvPr id="2" name="Titel 1">
+            <a:extLst>
+              <a:ext uri="{FF2B5EF4-FFF2-40B4-BE49-F238E27FC236}">
+                <a16:creationId xmlns:a16="http://schemas.microsoft.com/office/drawing/2014/main" id="{D23151B2-BE39-0C83-723B-DD8CD01DC5C1}"/>
+              </a:ext>
+            </a:extLst>
+          </p:cNvPr>
+          <p:cNvSpPr>
+            <a:spLocks noGrp="1"/>
+          </p:cNvSpPr>
+          <p:nvPr>
+            <p:ph type="title"/>
+          </p:nvPr>
+        </p:nvSpPr>
+        <p:spPr/>
+        <p:txBody>
+          <a:bodyPr/>
+          <a:lstStyle/>
+          <a:p>
+            <a:r>
+              <a:rPr lang="nl-BE" dirty="0"/>
+              <a:t>Elementen overlopen (m.b.v. </a:t>
+            </a:r>
+            <a:r>
+              <a:rPr lang="nl-BE" dirty="0" err="1"/>
+              <a:t>for</a:t>
+            </a:r>
+            <a:r>
+              <a:rPr lang="nl-BE" dirty="0"/>
+              <a:t>-lus)</a:t>
+            </a:r>
+          </a:p>
+        </p:txBody>
+      </p:sp>
+      <p:sp>
+        <p:nvSpPr>
+          <p:cNvPr id="7" name="Tekstvak 6">
+            <a:extLst>
+              <a:ext uri="{FF2B5EF4-FFF2-40B4-BE49-F238E27FC236}">
+                <a16:creationId xmlns:a16="http://schemas.microsoft.com/office/drawing/2014/main" id="{A4C0ABFC-390F-8652-9867-86BB5B1305BF}"/>
+              </a:ext>
+            </a:extLst>
+          </p:cNvPr>
+          <p:cNvSpPr txBox="1"/>
+          <p:nvPr/>
+        </p:nvSpPr>
+        <p:spPr>
+          <a:xfrm>
+            <a:off x="1811867" y="3429000"/>
+            <a:ext cx="8331200" cy="2338204"/>
+          </a:xfrm>
+          <a:prstGeom prst="rect">
+            <a:avLst/>
+          </a:prstGeom>
+          <a:noFill/>
+        </p:spPr>
+        <p:txBody>
+          <a:bodyPr wrap="square">
+            <a:spAutoFit/>
+          </a:bodyPr>
+          <a:lstStyle/>
+          <a:p>
+            <a:pPr>
+              <a:lnSpc>
+                <a:spcPts val="1425"/>
+              </a:lnSpc>
+              <a:spcAft>
+                <a:spcPts val="600"/>
+              </a:spcAft>
+              <a:buNone/>
+            </a:pPr>
+            <a:r>
+              <a:rPr lang="nl-BE" b="0" dirty="0">
+                <a:solidFill>
+                  <a:srgbClr val="0000FF"/>
+                </a:solidFill>
+                <a:effectLst/>
+                <a:latin typeface="Consolas" panose="020B0609020204030204" pitchFamily="49" charset="0"/>
+              </a:rPr>
+              <a:t>let </a:t>
+            </a:r>
+            <a:r>
+              <a:rPr lang="nl-BE" dirty="0">
+                <a:solidFill>
+                  <a:srgbClr val="000000"/>
+                </a:solidFill>
+                <a:latin typeface="Consolas" panose="020B0609020204030204" pitchFamily="49" charset="0"/>
+              </a:rPr>
+              <a:t>element = </a:t>
+            </a:r>
+            <a:r>
+              <a:rPr lang="nl-BE" dirty="0" err="1">
+                <a:solidFill>
+                  <a:srgbClr val="000000"/>
+                </a:solidFill>
+                <a:latin typeface="Consolas" panose="020B0609020204030204" pitchFamily="49" charset="0"/>
+              </a:rPr>
+              <a:t>document.getElementById</a:t>
+            </a:r>
+            <a:r>
+              <a:rPr lang="nl-BE" dirty="0">
+                <a:solidFill>
+                  <a:srgbClr val="000000"/>
+                </a:solidFill>
+                <a:latin typeface="Consolas" panose="020B0609020204030204" pitchFamily="49" charset="0"/>
+              </a:rPr>
+              <a:t>(“p1”);</a:t>
+            </a:r>
+          </a:p>
+          <a:p>
+            <a:pPr>
+              <a:lnSpc>
+                <a:spcPts val="1425"/>
+              </a:lnSpc>
+              <a:spcAft>
+                <a:spcPts val="600"/>
+              </a:spcAft>
+              <a:buNone/>
+            </a:pPr>
+            <a:endParaRPr lang="nl-BE" b="0" dirty="0">
+              <a:solidFill>
+                <a:srgbClr val="0000FF"/>
+              </a:solidFill>
+              <a:effectLst/>
+              <a:latin typeface="Consolas" panose="020B0609020204030204" pitchFamily="49" charset="0"/>
+            </a:endParaRPr>
+          </a:p>
+          <a:p>
+            <a:pPr>
+              <a:lnSpc>
+                <a:spcPts val="1425"/>
+              </a:lnSpc>
+              <a:spcAft>
+                <a:spcPts val="600"/>
+              </a:spcAft>
+              <a:buNone/>
+            </a:pPr>
+            <a:r>
+              <a:rPr lang="nl-BE" b="0" dirty="0">
+                <a:solidFill>
+                  <a:srgbClr val="0000FF"/>
+                </a:solidFill>
+                <a:effectLst/>
+                <a:latin typeface="Consolas" panose="020B0609020204030204" pitchFamily="49" charset="0"/>
+              </a:rPr>
+              <a:t>let</a:t>
+            </a:r>
+            <a:r>
+              <a:rPr lang="nl-BE" b="0" dirty="0">
+                <a:solidFill>
+                  <a:srgbClr val="000000"/>
+                </a:solidFill>
+                <a:effectLst/>
+                <a:latin typeface="Consolas" panose="020B0609020204030204" pitchFamily="49" charset="0"/>
+              </a:rPr>
+              <a:t> </a:t>
+            </a:r>
+            <a:r>
+              <a:rPr lang="nl-BE" b="0" dirty="0" err="1">
+                <a:solidFill>
+                  <a:srgbClr val="000000"/>
+                </a:solidFill>
+                <a:effectLst/>
+                <a:latin typeface="Consolas" panose="020B0609020204030204" pitchFamily="49" charset="0"/>
+              </a:rPr>
+              <a:t>kindelementen</a:t>
+            </a:r>
+            <a:r>
+              <a:rPr lang="nl-BE" b="0" dirty="0">
+                <a:solidFill>
+                  <a:srgbClr val="000000"/>
+                </a:solidFill>
+                <a:effectLst/>
+                <a:latin typeface="Consolas" panose="020B0609020204030204" pitchFamily="49" charset="0"/>
+              </a:rPr>
+              <a:t> = </a:t>
+            </a:r>
+            <a:r>
+              <a:rPr lang="nl-BE" b="0" dirty="0" err="1">
+                <a:solidFill>
+                  <a:srgbClr val="000000"/>
+                </a:solidFill>
+                <a:effectLst/>
+                <a:latin typeface="Consolas" panose="020B0609020204030204" pitchFamily="49" charset="0"/>
+              </a:rPr>
+              <a:t>element.children</a:t>
+            </a:r>
+            <a:r>
+              <a:rPr lang="nl-BE" b="0" dirty="0">
+                <a:solidFill>
+                  <a:srgbClr val="000000"/>
+                </a:solidFill>
+                <a:effectLst/>
+                <a:latin typeface="Consolas" panose="020B0609020204030204" pitchFamily="49" charset="0"/>
+              </a:rPr>
+              <a:t>;</a:t>
+            </a:r>
+          </a:p>
+          <a:p>
+            <a:pPr>
+              <a:lnSpc>
+                <a:spcPts val="1425"/>
+              </a:lnSpc>
+              <a:spcAft>
+                <a:spcPts val="600"/>
+              </a:spcAft>
+              <a:buNone/>
+            </a:pPr>
+            <a:r>
+              <a:rPr lang="nl-BE" b="0" dirty="0">
+                <a:solidFill>
+                  <a:srgbClr val="000000"/>
+                </a:solidFill>
+                <a:effectLst/>
+                <a:latin typeface="Consolas" panose="020B0609020204030204" pitchFamily="49" charset="0"/>
+              </a:rPr>
+              <a:t>    </a:t>
+            </a:r>
+          </a:p>
+          <a:p>
+            <a:pPr>
+              <a:lnSpc>
+                <a:spcPts val="1425"/>
+              </a:lnSpc>
+              <a:spcAft>
+                <a:spcPts val="600"/>
+              </a:spcAft>
+              <a:buNone/>
+            </a:pPr>
+            <a:r>
+              <a:rPr lang="nl-BE" b="0" dirty="0" err="1">
+                <a:solidFill>
+                  <a:srgbClr val="0000FF"/>
+                </a:solidFill>
+                <a:effectLst/>
+                <a:latin typeface="Consolas" panose="020B0609020204030204" pitchFamily="49" charset="0"/>
+              </a:rPr>
+              <a:t>for</a:t>
+            </a:r>
+            <a:r>
+              <a:rPr lang="nl-BE" b="0" dirty="0">
+                <a:solidFill>
+                  <a:srgbClr val="000000"/>
+                </a:solidFill>
+                <a:effectLst/>
+                <a:latin typeface="Consolas" panose="020B0609020204030204" pitchFamily="49" charset="0"/>
+              </a:rPr>
+              <a:t>(</a:t>
+            </a:r>
+            <a:r>
+              <a:rPr lang="nl-BE" b="0" dirty="0">
+                <a:solidFill>
+                  <a:srgbClr val="0000FF"/>
+                </a:solidFill>
+                <a:effectLst/>
+                <a:latin typeface="Consolas" panose="020B0609020204030204" pitchFamily="49" charset="0"/>
+              </a:rPr>
+              <a:t>let</a:t>
+            </a:r>
+            <a:r>
+              <a:rPr lang="nl-BE" b="0" dirty="0">
+                <a:solidFill>
+                  <a:srgbClr val="000000"/>
+                </a:solidFill>
+                <a:effectLst/>
+                <a:latin typeface="Consolas" panose="020B0609020204030204" pitchFamily="49" charset="0"/>
+              </a:rPr>
+              <a:t> i = </a:t>
+            </a:r>
+            <a:r>
+              <a:rPr lang="nl-BE" b="0" dirty="0">
+                <a:solidFill>
+                  <a:srgbClr val="098658"/>
+                </a:solidFill>
+                <a:effectLst/>
+                <a:latin typeface="Consolas" panose="020B0609020204030204" pitchFamily="49" charset="0"/>
+              </a:rPr>
+              <a:t>0</a:t>
+            </a:r>
+            <a:r>
+              <a:rPr lang="nl-BE" b="0" dirty="0">
+                <a:solidFill>
+                  <a:srgbClr val="000000"/>
+                </a:solidFill>
+                <a:effectLst/>
+                <a:latin typeface="Consolas" panose="020B0609020204030204" pitchFamily="49" charset="0"/>
+              </a:rPr>
+              <a:t>; i &lt; </a:t>
+            </a:r>
+            <a:r>
+              <a:rPr lang="nl-BE" dirty="0" err="1">
+                <a:solidFill>
+                  <a:srgbClr val="000000"/>
+                </a:solidFill>
+                <a:latin typeface="Consolas" panose="020B0609020204030204" pitchFamily="49" charset="0"/>
+              </a:rPr>
+              <a:t>kindelementen</a:t>
+            </a:r>
+            <a:r>
+              <a:rPr lang="nl-BE" b="0" dirty="0" err="1">
+                <a:solidFill>
+                  <a:srgbClr val="000000"/>
+                </a:solidFill>
+                <a:effectLst/>
+                <a:latin typeface="Consolas" panose="020B0609020204030204" pitchFamily="49" charset="0"/>
+              </a:rPr>
+              <a:t>.length</a:t>
+            </a:r>
+            <a:r>
+              <a:rPr lang="nl-BE" b="0" dirty="0">
+                <a:solidFill>
+                  <a:srgbClr val="000000"/>
+                </a:solidFill>
+                <a:effectLst/>
+                <a:latin typeface="Consolas" panose="020B0609020204030204" pitchFamily="49" charset="0"/>
+              </a:rPr>
+              <a:t>; i++){</a:t>
+            </a:r>
+          </a:p>
+          <a:p>
+            <a:pPr>
+              <a:lnSpc>
+                <a:spcPts val="1425"/>
+              </a:lnSpc>
+              <a:spcAft>
+                <a:spcPts val="600"/>
+              </a:spcAft>
+              <a:buNone/>
+            </a:pPr>
+            <a:r>
+              <a:rPr lang="nl-BE" dirty="0">
+                <a:solidFill>
+                  <a:srgbClr val="000000"/>
+                </a:solidFill>
+                <a:latin typeface="Consolas" panose="020B0609020204030204" pitchFamily="49" charset="0"/>
+              </a:rPr>
+              <a:t>	</a:t>
+            </a:r>
+          </a:p>
+          <a:p>
+            <a:pPr>
+              <a:lnSpc>
+                <a:spcPts val="1425"/>
+              </a:lnSpc>
+              <a:spcAft>
+                <a:spcPts val="600"/>
+              </a:spcAft>
+              <a:buNone/>
+            </a:pPr>
+            <a:r>
+              <a:rPr lang="nl-BE" b="0" dirty="0">
+                <a:solidFill>
+                  <a:srgbClr val="000000"/>
+                </a:solidFill>
+                <a:effectLst/>
+                <a:latin typeface="Consolas" panose="020B0609020204030204" pitchFamily="49" charset="0"/>
+              </a:rPr>
+              <a:t>	</a:t>
+            </a:r>
+            <a:r>
+              <a:rPr lang="nl-BE" dirty="0">
+                <a:solidFill>
+                  <a:srgbClr val="000000"/>
+                </a:solidFill>
+                <a:latin typeface="Consolas" panose="020B0609020204030204" pitchFamily="49" charset="0"/>
+              </a:rPr>
+              <a:t> </a:t>
+            </a:r>
+            <a:r>
+              <a:rPr lang="nl-BE" dirty="0" err="1">
+                <a:solidFill>
+                  <a:srgbClr val="000000"/>
+                </a:solidFill>
+                <a:latin typeface="Consolas" panose="020B0609020204030204" pitchFamily="49" charset="0"/>
+              </a:rPr>
+              <a:t>kindelementen</a:t>
+            </a:r>
+            <a:r>
+              <a:rPr lang="nl-BE" b="0" dirty="0">
+                <a:solidFill>
+                  <a:srgbClr val="000000"/>
+                </a:solidFill>
+                <a:effectLst/>
+                <a:latin typeface="Consolas" panose="020B0609020204030204" pitchFamily="49" charset="0"/>
+              </a:rPr>
+              <a:t>[i].</a:t>
+            </a:r>
+            <a:r>
+              <a:rPr lang="nl-BE" b="0" dirty="0" err="1">
+                <a:solidFill>
+                  <a:srgbClr val="000000"/>
+                </a:solidFill>
+                <a:effectLst/>
+                <a:latin typeface="Consolas" panose="020B0609020204030204" pitchFamily="49" charset="0"/>
+              </a:rPr>
+              <a:t>setAttribute</a:t>
+            </a:r>
+            <a:r>
+              <a:rPr lang="nl-BE" b="0" dirty="0">
+                <a:solidFill>
+                  <a:srgbClr val="000000"/>
+                </a:solidFill>
+                <a:effectLst/>
+                <a:latin typeface="Consolas" panose="020B0609020204030204" pitchFamily="49" charset="0"/>
+              </a:rPr>
+              <a:t>(</a:t>
+            </a:r>
+            <a:r>
+              <a:rPr lang="nl-BE" b="0" dirty="0">
+                <a:solidFill>
+                  <a:srgbClr val="A31515"/>
+                </a:solidFill>
+                <a:effectLst/>
+                <a:latin typeface="Consolas" panose="020B0609020204030204" pitchFamily="49" charset="0"/>
+              </a:rPr>
+              <a:t>"data-waarde", "1"</a:t>
+            </a:r>
+            <a:r>
+              <a:rPr lang="nl-BE" b="0" dirty="0">
+                <a:solidFill>
+                  <a:srgbClr val="000000"/>
+                </a:solidFill>
+                <a:effectLst/>
+                <a:latin typeface="Consolas" panose="020B0609020204030204" pitchFamily="49" charset="0"/>
+              </a:rPr>
+              <a:t>);</a:t>
+            </a:r>
+          </a:p>
+          <a:p>
+            <a:pPr>
+              <a:lnSpc>
+                <a:spcPts val="1425"/>
+              </a:lnSpc>
+              <a:spcAft>
+                <a:spcPts val="600"/>
+              </a:spcAft>
+              <a:buNone/>
+            </a:pPr>
+            <a:endParaRPr lang="nl-BE" dirty="0">
+              <a:solidFill>
+                <a:srgbClr val="000000"/>
+              </a:solidFill>
+              <a:latin typeface="Consolas" panose="020B0609020204030204" pitchFamily="49" charset="0"/>
+            </a:endParaRPr>
+          </a:p>
+          <a:p>
+            <a:pPr>
+              <a:lnSpc>
+                <a:spcPts val="1425"/>
+              </a:lnSpc>
+              <a:spcAft>
+                <a:spcPts val="600"/>
+              </a:spcAft>
+              <a:buNone/>
+            </a:pPr>
+            <a:r>
+              <a:rPr lang="nl-BE" b="0" dirty="0">
+                <a:solidFill>
+                  <a:srgbClr val="000000"/>
+                </a:solidFill>
+                <a:effectLst/>
+                <a:latin typeface="Consolas" panose="020B0609020204030204" pitchFamily="49" charset="0"/>
+              </a:rPr>
+              <a:t>}</a:t>
+            </a:r>
+          </a:p>
+        </p:txBody>
+      </p:sp>
+    </p:spTree>
+    <p:extLst>
+      <p:ext uri="{BB962C8B-B14F-4D97-AF65-F5344CB8AC3E}">
+        <p14:creationId xmlns:p14="http://schemas.microsoft.com/office/powerpoint/2010/main" val="723633610"/>
+      </p:ext>
+    </p:extLst>
+  </p:cSld>
+  <p:clrMapOvr>
+    <a:masterClrMapping/>
+  </p:clrMapOvr>
+</p:sld>
+</file>
+
+<file path=ppt/slides/slide65.xml><?xml version="1.0" encoding="utf-8"?>
+<p:sld xmlns:a="http://schemas.openxmlformats.org/drawingml/2006/main" xmlns:r="http://schemas.openxmlformats.org/officeDocument/2006/relationships" xmlns:p="http://schemas.openxmlformats.org/presentationml/2006/main">
+  <p:cSld>
+    <p:spTree>
+      <p:nvGrpSpPr>
+        <p:cNvPr id="1" name=""/>
+        <p:cNvGrpSpPr/>
+        <p:nvPr/>
+      </p:nvGrpSpPr>
+      <p:grpSpPr>
+        <a:xfrm>
+          <a:off x="0" y="0"/>
+          <a:ext cx="0" cy="0"/>
+          <a:chOff x="0" y="0"/>
+          <a:chExt cx="0" cy="0"/>
+        </a:xfrm>
+      </p:grpSpPr>
+      <p:sp>
+        <p:nvSpPr>
+          <p:cNvPr id="2" name="Titel 1">
+            <a:extLst>
+              <a:ext uri="{FF2B5EF4-FFF2-40B4-BE49-F238E27FC236}">
+                <a16:creationId xmlns:a16="http://schemas.microsoft.com/office/drawing/2014/main" id="{C252A94B-7D43-C610-5D1F-A82D2EE54D82}"/>
+              </a:ext>
+            </a:extLst>
+          </p:cNvPr>
+          <p:cNvSpPr>
+            <a:spLocks noGrp="1"/>
+          </p:cNvSpPr>
+          <p:nvPr>
+            <p:ph type="title"/>
+          </p:nvPr>
+        </p:nvSpPr>
+        <p:spPr/>
+        <p:txBody>
+          <a:bodyPr/>
+          <a:lstStyle/>
+          <a:p>
+            <a:r>
+              <a:rPr lang="nl-BE" dirty="0"/>
+              <a:t>Elementen evalueren (M.b.v. </a:t>
+            </a:r>
+            <a:r>
+              <a:rPr lang="nl-BE" dirty="0" err="1"/>
+              <a:t>if-else</a:t>
+            </a:r>
+            <a:r>
+              <a:rPr lang="nl-BE" dirty="0"/>
+              <a:t>)</a:t>
+            </a:r>
+          </a:p>
+        </p:txBody>
+      </p:sp>
+      <p:sp>
+        <p:nvSpPr>
+          <p:cNvPr id="5" name="Tekstvak 4">
+            <a:extLst>
+              <a:ext uri="{FF2B5EF4-FFF2-40B4-BE49-F238E27FC236}">
+                <a16:creationId xmlns:a16="http://schemas.microsoft.com/office/drawing/2014/main" id="{CC30B339-17E8-3DC1-5998-6C8B1D75AEDF}"/>
+              </a:ext>
+            </a:extLst>
+          </p:cNvPr>
+          <p:cNvSpPr txBox="1"/>
+          <p:nvPr/>
+        </p:nvSpPr>
+        <p:spPr>
+          <a:xfrm>
+            <a:off x="2498652" y="2705865"/>
+            <a:ext cx="8601739" cy="3364126"/>
+          </a:xfrm>
+          <a:prstGeom prst="rect">
+            <a:avLst/>
+          </a:prstGeom>
+          <a:noFill/>
+        </p:spPr>
+        <p:txBody>
+          <a:bodyPr wrap="square">
+            <a:spAutoFit/>
+          </a:bodyPr>
+          <a:lstStyle/>
+          <a:p>
+            <a:pPr>
+              <a:lnSpc>
+                <a:spcPts val="1425"/>
+              </a:lnSpc>
+              <a:spcAft>
+                <a:spcPts val="600"/>
+              </a:spcAft>
+              <a:buNone/>
+            </a:pPr>
+            <a:r>
+              <a:rPr lang="nl-BE" b="0" dirty="0" err="1">
+                <a:solidFill>
+                  <a:srgbClr val="0000FF"/>
+                </a:solidFill>
+                <a:effectLst/>
+                <a:latin typeface="Consolas" panose="020B0609020204030204" pitchFamily="49" charset="0"/>
+              </a:rPr>
+              <a:t>function</a:t>
+            </a:r>
+            <a:r>
+              <a:rPr lang="nl-BE" b="0" dirty="0">
+                <a:solidFill>
+                  <a:srgbClr val="000000"/>
+                </a:solidFill>
+                <a:effectLst/>
+                <a:latin typeface="Consolas" panose="020B0609020204030204" pitchFamily="49" charset="0"/>
+              </a:rPr>
+              <a:t> test(e){</a:t>
+            </a:r>
+          </a:p>
+          <a:p>
+            <a:pPr>
+              <a:lnSpc>
+                <a:spcPts val="1425"/>
+              </a:lnSpc>
+              <a:spcAft>
+                <a:spcPts val="600"/>
+              </a:spcAft>
+              <a:buNone/>
+            </a:pPr>
+            <a:endParaRPr lang="nl-BE" b="0" dirty="0">
+              <a:solidFill>
+                <a:srgbClr val="000000"/>
+              </a:solidFill>
+              <a:effectLst/>
+              <a:latin typeface="Consolas" panose="020B0609020204030204" pitchFamily="49" charset="0"/>
+            </a:endParaRPr>
+          </a:p>
+          <a:p>
+            <a:pPr>
+              <a:lnSpc>
+                <a:spcPts val="1425"/>
+              </a:lnSpc>
+              <a:spcAft>
+                <a:spcPts val="600"/>
+              </a:spcAft>
+              <a:buNone/>
+            </a:pPr>
+            <a:r>
+              <a:rPr lang="nl-BE" b="0" dirty="0">
+                <a:solidFill>
+                  <a:srgbClr val="0000FF"/>
+                </a:solidFill>
+                <a:effectLst/>
+                <a:latin typeface="Consolas" panose="020B0609020204030204" pitchFamily="49" charset="0"/>
+              </a:rPr>
+              <a:t>	let</a:t>
+            </a:r>
+            <a:r>
+              <a:rPr lang="nl-BE" b="0" dirty="0">
+                <a:solidFill>
+                  <a:srgbClr val="000000"/>
+                </a:solidFill>
+                <a:effectLst/>
+                <a:latin typeface="Consolas" panose="020B0609020204030204" pitchFamily="49" charset="0"/>
+              </a:rPr>
+              <a:t> p1 = </a:t>
+            </a:r>
+            <a:r>
+              <a:rPr lang="nl-BE" b="0" dirty="0" err="1">
+                <a:solidFill>
+                  <a:srgbClr val="000000"/>
+                </a:solidFill>
+                <a:effectLst/>
+                <a:latin typeface="Consolas" panose="020B0609020204030204" pitchFamily="49" charset="0"/>
+              </a:rPr>
+              <a:t>document.getElementById</a:t>
+            </a:r>
+            <a:r>
+              <a:rPr lang="nl-BE" b="0" dirty="0">
+                <a:solidFill>
+                  <a:srgbClr val="000000"/>
+                </a:solidFill>
+                <a:effectLst/>
+                <a:latin typeface="Consolas" panose="020B0609020204030204" pitchFamily="49" charset="0"/>
+              </a:rPr>
+              <a:t>(</a:t>
+            </a:r>
+            <a:r>
+              <a:rPr lang="nl-BE" b="0" dirty="0">
+                <a:solidFill>
+                  <a:srgbClr val="A31515"/>
+                </a:solidFill>
+                <a:effectLst/>
+                <a:latin typeface="Consolas" panose="020B0609020204030204" pitchFamily="49" charset="0"/>
+              </a:rPr>
+              <a:t>"p1"</a:t>
+            </a:r>
+            <a:r>
+              <a:rPr lang="nl-BE" b="0" dirty="0">
+                <a:solidFill>
+                  <a:srgbClr val="000000"/>
+                </a:solidFill>
+                <a:effectLst/>
+                <a:latin typeface="Consolas" panose="020B0609020204030204" pitchFamily="49" charset="0"/>
+              </a:rPr>
+              <a:t>);</a:t>
+            </a:r>
+          </a:p>
+          <a:p>
+            <a:pPr>
+              <a:lnSpc>
+                <a:spcPts val="1425"/>
+              </a:lnSpc>
+              <a:spcAft>
+                <a:spcPts val="600"/>
+              </a:spcAft>
+              <a:buNone/>
+            </a:pPr>
+            <a:r>
+              <a:rPr lang="nl-BE" b="0" dirty="0">
+                <a:solidFill>
+                  <a:srgbClr val="000000"/>
+                </a:solidFill>
+                <a:effectLst/>
+                <a:latin typeface="Consolas" panose="020B0609020204030204" pitchFamily="49" charset="0"/>
+              </a:rPr>
+              <a:t>    </a:t>
+            </a:r>
+          </a:p>
+          <a:p>
+            <a:pPr>
+              <a:lnSpc>
+                <a:spcPts val="1425"/>
+              </a:lnSpc>
+              <a:spcAft>
+                <a:spcPts val="600"/>
+              </a:spcAft>
+              <a:buNone/>
+            </a:pPr>
+            <a:r>
+              <a:rPr lang="nl-BE" dirty="0">
+                <a:solidFill>
+                  <a:srgbClr val="000000"/>
+                </a:solidFill>
+                <a:latin typeface="Consolas" panose="020B0609020204030204" pitchFamily="49" charset="0"/>
+              </a:rPr>
+              <a:t>	</a:t>
+            </a:r>
+            <a:r>
+              <a:rPr lang="nl-BE" b="0" dirty="0" err="1">
+                <a:solidFill>
+                  <a:srgbClr val="0000FF"/>
+                </a:solidFill>
+                <a:effectLst/>
+                <a:latin typeface="Consolas" panose="020B0609020204030204" pitchFamily="49" charset="0"/>
+              </a:rPr>
+              <a:t>if</a:t>
+            </a:r>
+            <a:r>
+              <a:rPr lang="nl-BE" b="0" dirty="0">
+                <a:solidFill>
+                  <a:srgbClr val="000000"/>
+                </a:solidFill>
+                <a:effectLst/>
+                <a:latin typeface="Consolas" panose="020B0609020204030204" pitchFamily="49" charset="0"/>
+              </a:rPr>
+              <a:t>(p1.getAttribute(</a:t>
+            </a:r>
+            <a:r>
+              <a:rPr lang="nl-BE" b="0" dirty="0">
+                <a:solidFill>
+                  <a:srgbClr val="A31515"/>
+                </a:solidFill>
+                <a:effectLst/>
+                <a:latin typeface="Consolas" panose="020B0609020204030204" pitchFamily="49" charset="0"/>
+              </a:rPr>
+              <a:t>"data-waarde"</a:t>
+            </a:r>
+            <a:r>
+              <a:rPr lang="nl-BE" b="0" dirty="0">
+                <a:solidFill>
+                  <a:srgbClr val="000000"/>
+                </a:solidFill>
+                <a:effectLst/>
+                <a:latin typeface="Consolas" panose="020B0609020204030204" pitchFamily="49" charset="0"/>
+              </a:rPr>
+              <a:t>) == </a:t>
+            </a:r>
+            <a:r>
+              <a:rPr lang="nl-BE" b="0" dirty="0">
+                <a:solidFill>
+                  <a:srgbClr val="A31515"/>
+                </a:solidFill>
+                <a:effectLst/>
+                <a:latin typeface="Consolas" panose="020B0609020204030204" pitchFamily="49" charset="0"/>
+              </a:rPr>
+              <a:t>"A"</a:t>
+            </a:r>
+            <a:r>
+              <a:rPr lang="nl-BE" b="0" dirty="0">
+                <a:solidFill>
+                  <a:srgbClr val="000000"/>
+                </a:solidFill>
+                <a:effectLst/>
+                <a:latin typeface="Consolas" panose="020B0609020204030204" pitchFamily="49" charset="0"/>
+              </a:rPr>
+              <a:t>)</a:t>
+            </a:r>
+          </a:p>
+          <a:p>
+            <a:pPr>
+              <a:lnSpc>
+                <a:spcPts val="1425"/>
+              </a:lnSpc>
+              <a:spcAft>
+                <a:spcPts val="600"/>
+              </a:spcAft>
+              <a:buNone/>
+            </a:pPr>
+            <a:r>
+              <a:rPr lang="nl-BE" dirty="0">
+                <a:solidFill>
+                  <a:srgbClr val="000000"/>
+                </a:solidFill>
+                <a:latin typeface="Consolas" panose="020B0609020204030204" pitchFamily="49" charset="0"/>
+              </a:rPr>
+              <a:t>	{</a:t>
+            </a:r>
+            <a:endParaRPr lang="nl-BE" b="0" dirty="0">
+              <a:solidFill>
+                <a:srgbClr val="000000"/>
+              </a:solidFill>
+              <a:effectLst/>
+              <a:latin typeface="Consolas" panose="020B0609020204030204" pitchFamily="49" charset="0"/>
+            </a:endParaRPr>
+          </a:p>
+          <a:p>
+            <a:pPr>
+              <a:lnSpc>
+                <a:spcPts val="1425"/>
+              </a:lnSpc>
+              <a:spcAft>
+                <a:spcPts val="600"/>
+              </a:spcAft>
+              <a:buNone/>
+            </a:pPr>
+            <a:r>
+              <a:rPr lang="nl-BE" dirty="0">
+                <a:solidFill>
+                  <a:srgbClr val="000000"/>
+                </a:solidFill>
+                <a:latin typeface="Consolas" panose="020B0609020204030204" pitchFamily="49" charset="0"/>
+              </a:rPr>
+              <a:t>		</a:t>
+            </a:r>
+            <a:r>
+              <a:rPr lang="nl-BE" b="0" dirty="0">
+                <a:solidFill>
+                  <a:srgbClr val="000000"/>
+                </a:solidFill>
+                <a:effectLst/>
+                <a:latin typeface="Consolas" panose="020B0609020204030204" pitchFamily="49" charset="0"/>
+              </a:rPr>
+              <a:t>p1.innerText = </a:t>
+            </a:r>
+            <a:r>
+              <a:rPr lang="nl-BE" b="0" dirty="0">
+                <a:solidFill>
+                  <a:srgbClr val="A31515"/>
+                </a:solidFill>
+                <a:effectLst/>
+                <a:latin typeface="Consolas" panose="020B0609020204030204" pitchFamily="49" charset="0"/>
+              </a:rPr>
+              <a:t>"A"</a:t>
+            </a:r>
+            <a:r>
+              <a:rPr lang="nl-BE" b="0" dirty="0">
+                <a:solidFill>
+                  <a:srgbClr val="000000"/>
+                </a:solidFill>
+                <a:effectLst/>
+                <a:latin typeface="Consolas" panose="020B0609020204030204" pitchFamily="49" charset="0"/>
+              </a:rPr>
+              <a:t>;</a:t>
+            </a:r>
+          </a:p>
+          <a:p>
+            <a:pPr>
+              <a:lnSpc>
+                <a:spcPts val="1425"/>
+              </a:lnSpc>
+              <a:spcAft>
+                <a:spcPts val="600"/>
+              </a:spcAft>
+              <a:buNone/>
+            </a:pPr>
+            <a:r>
+              <a:rPr lang="nl-BE" b="0" dirty="0">
+                <a:solidFill>
+                  <a:srgbClr val="000000"/>
+                </a:solidFill>
+                <a:effectLst/>
+                <a:latin typeface="Consolas" panose="020B0609020204030204" pitchFamily="49" charset="0"/>
+              </a:rPr>
+              <a:t>    	}</a:t>
+            </a:r>
+          </a:p>
+          <a:p>
+            <a:pPr>
+              <a:lnSpc>
+                <a:spcPts val="1425"/>
+              </a:lnSpc>
+              <a:spcAft>
+                <a:spcPts val="600"/>
+              </a:spcAft>
+              <a:buNone/>
+            </a:pPr>
+            <a:r>
+              <a:rPr lang="nl-BE" dirty="0">
+                <a:solidFill>
+                  <a:srgbClr val="000000"/>
+                </a:solidFill>
+                <a:latin typeface="Consolas" panose="020B0609020204030204" pitchFamily="49" charset="0"/>
+              </a:rPr>
+              <a:t>	</a:t>
+            </a:r>
+            <a:r>
+              <a:rPr lang="nl-BE" b="0" dirty="0" err="1">
+                <a:solidFill>
+                  <a:srgbClr val="0000FF"/>
+                </a:solidFill>
+                <a:effectLst/>
+                <a:latin typeface="Consolas" panose="020B0609020204030204" pitchFamily="49" charset="0"/>
+              </a:rPr>
+              <a:t>else</a:t>
+            </a:r>
+            <a:endParaRPr lang="nl-BE" b="0" dirty="0">
+              <a:solidFill>
+                <a:srgbClr val="000000"/>
+              </a:solidFill>
+              <a:effectLst/>
+              <a:latin typeface="Consolas" panose="020B0609020204030204" pitchFamily="49" charset="0"/>
+            </a:endParaRPr>
+          </a:p>
+          <a:p>
+            <a:pPr>
+              <a:lnSpc>
+                <a:spcPts val="1425"/>
+              </a:lnSpc>
+              <a:spcAft>
+                <a:spcPts val="600"/>
+              </a:spcAft>
+              <a:buNone/>
+            </a:pPr>
+            <a:r>
+              <a:rPr lang="nl-BE" b="0" dirty="0">
+                <a:solidFill>
+                  <a:srgbClr val="000000"/>
+                </a:solidFill>
+                <a:effectLst/>
+                <a:latin typeface="Consolas" panose="020B0609020204030204" pitchFamily="49" charset="0"/>
+              </a:rPr>
+              <a:t>       {</a:t>
+            </a:r>
+          </a:p>
+          <a:p>
+            <a:pPr>
+              <a:lnSpc>
+                <a:spcPts val="1425"/>
+              </a:lnSpc>
+              <a:spcAft>
+                <a:spcPts val="600"/>
+              </a:spcAft>
+              <a:buNone/>
+            </a:pPr>
+            <a:r>
+              <a:rPr lang="nl-BE" dirty="0">
+                <a:solidFill>
+                  <a:srgbClr val="000000"/>
+                </a:solidFill>
+                <a:latin typeface="Consolas" panose="020B0609020204030204" pitchFamily="49" charset="0"/>
+              </a:rPr>
+              <a:t>		</a:t>
+            </a:r>
+            <a:r>
+              <a:rPr lang="nl-BE" b="0" dirty="0">
+                <a:solidFill>
+                  <a:srgbClr val="000000"/>
+                </a:solidFill>
+                <a:effectLst/>
+                <a:latin typeface="Consolas" panose="020B0609020204030204" pitchFamily="49" charset="0"/>
+              </a:rPr>
+              <a:t>p1.innerText = </a:t>
+            </a:r>
+            <a:r>
+              <a:rPr lang="nl-BE" b="0" dirty="0">
+                <a:solidFill>
+                  <a:srgbClr val="A31515"/>
+                </a:solidFill>
+                <a:effectLst/>
+                <a:latin typeface="Consolas" panose="020B0609020204030204" pitchFamily="49" charset="0"/>
+              </a:rPr>
+              <a:t>"B"</a:t>
+            </a:r>
+            <a:r>
+              <a:rPr lang="nl-BE" b="0" dirty="0">
+                <a:solidFill>
+                  <a:srgbClr val="000000"/>
+                </a:solidFill>
+                <a:effectLst/>
+                <a:latin typeface="Consolas" panose="020B0609020204030204" pitchFamily="49" charset="0"/>
+              </a:rPr>
+              <a:t>;</a:t>
+            </a:r>
+          </a:p>
+          <a:p>
+            <a:pPr>
+              <a:lnSpc>
+                <a:spcPts val="1425"/>
+              </a:lnSpc>
+              <a:spcAft>
+                <a:spcPts val="600"/>
+              </a:spcAft>
+              <a:buNone/>
+            </a:pPr>
+            <a:r>
+              <a:rPr lang="nl-BE" b="0" dirty="0">
+                <a:solidFill>
+                  <a:srgbClr val="000000"/>
+                </a:solidFill>
+                <a:effectLst/>
+                <a:latin typeface="Consolas" panose="020B0609020204030204" pitchFamily="49" charset="0"/>
+              </a:rPr>
+              <a:t>	}</a:t>
+            </a:r>
+          </a:p>
+          <a:p>
+            <a:pPr>
+              <a:lnSpc>
+                <a:spcPts val="1425"/>
+              </a:lnSpc>
+              <a:spcAft>
+                <a:spcPts val="600"/>
+              </a:spcAft>
+              <a:buNone/>
+            </a:pPr>
+            <a:r>
+              <a:rPr lang="nl-BE" b="0" dirty="0">
+                <a:solidFill>
+                  <a:srgbClr val="000000"/>
+                </a:solidFill>
+                <a:effectLst/>
+                <a:latin typeface="Consolas" panose="020B0609020204030204" pitchFamily="49" charset="0"/>
+              </a:rPr>
+              <a:t>}</a:t>
+            </a:r>
+          </a:p>
+        </p:txBody>
+      </p:sp>
+    </p:spTree>
+    <p:extLst>
+      <p:ext uri="{BB962C8B-B14F-4D97-AF65-F5344CB8AC3E}">
+        <p14:creationId xmlns:p14="http://schemas.microsoft.com/office/powerpoint/2010/main" val="3005535933"/>
+      </p:ext>
+    </p:extLst>
+  </p:cSld>
+  <p:clrMapOvr>
+    <a:masterClrMapping/>
+  </p:clrMapOvr>
+</p:sld>
+</file>
+
+<file path=ppt/slides/slide66.xml><?xml version="1.0" encoding="utf-8"?>
+<p:sld xmlns:a="http://schemas.openxmlformats.org/drawingml/2006/main" xmlns:r="http://schemas.openxmlformats.org/officeDocument/2006/relationships" xmlns:p="http://schemas.openxmlformats.org/presentationml/2006/main">
+  <p:cSld>
+    <p:spTree>
+      <p:nvGrpSpPr>
+        <p:cNvPr id="1" name=""/>
+        <p:cNvGrpSpPr/>
+        <p:nvPr/>
+      </p:nvGrpSpPr>
+      <p:grpSpPr>
+        <a:xfrm>
+          <a:off x="0" y="0"/>
+          <a:ext cx="0" cy="0"/>
+          <a:chOff x="0" y="0"/>
+          <a:chExt cx="0" cy="0"/>
+        </a:xfrm>
+      </p:grpSpPr>
+      <p:sp>
+        <p:nvSpPr>
+          <p:cNvPr id="2" name="Titel 1">
+            <a:extLst>
+              <a:ext uri="{FF2B5EF4-FFF2-40B4-BE49-F238E27FC236}">
+                <a16:creationId xmlns:a16="http://schemas.microsoft.com/office/drawing/2014/main" id="{8A1E1CD1-4679-4258-9F5A-8A87F23CD8E9}"/>
+              </a:ext>
+            </a:extLst>
+          </p:cNvPr>
+          <p:cNvSpPr>
+            <a:spLocks noGrp="1"/>
+          </p:cNvSpPr>
+          <p:nvPr>
+            <p:ph type="title"/>
+          </p:nvPr>
+        </p:nvSpPr>
+        <p:spPr/>
+        <p:txBody>
+          <a:bodyPr/>
+          <a:lstStyle/>
+          <a:p>
+            <a:r>
+              <a:rPr lang="nl-BE" dirty="0"/>
+              <a:t>Opdrachten</a:t>
+            </a:r>
+          </a:p>
+        </p:txBody>
+      </p:sp>
+      <p:sp>
+        <p:nvSpPr>
+          <p:cNvPr id="3" name="Tijdelijke aanduiding voor inhoud 2">
+            <a:extLst>
+              <a:ext uri="{FF2B5EF4-FFF2-40B4-BE49-F238E27FC236}">
+                <a16:creationId xmlns:a16="http://schemas.microsoft.com/office/drawing/2014/main" id="{88043A32-EE52-64EB-FCD5-5DBAEF80E0ED}"/>
+              </a:ext>
+            </a:extLst>
+          </p:cNvPr>
+          <p:cNvSpPr>
+            <a:spLocks noGrp="1"/>
+          </p:cNvSpPr>
+          <p:nvPr>
+            <p:ph idx="1"/>
+          </p:nvPr>
+        </p:nvSpPr>
+        <p:spPr>
+          <a:xfrm>
+            <a:off x="581192" y="1890876"/>
+            <a:ext cx="11029615" cy="4967124"/>
+          </a:xfrm>
+        </p:spPr>
+        <p:txBody>
+          <a:bodyPr>
+            <a:normAutofit/>
+          </a:bodyPr>
+          <a:lstStyle/>
+          <a:p>
+            <a:pPr>
+              <a:spcAft>
+                <a:spcPts val="3000"/>
+              </a:spcAft>
+            </a:pPr>
+            <a:r>
+              <a:rPr lang="nl-BE" dirty="0"/>
+              <a:t>Maak een webpagina met een paragraaf en een knop. Zorg ervoor dat als je op de knop klikt, de volgende tekst in de paragraaf komt: "Op de knop geklikt“.</a:t>
+            </a:r>
+          </a:p>
+          <a:p>
+            <a:pPr>
+              <a:spcAft>
+                <a:spcPts val="3000"/>
+              </a:spcAft>
+            </a:pPr>
+            <a:r>
+              <a:rPr lang="nl-BE" dirty="0"/>
+              <a:t>Breid de vorige oefening uit, waarbij je nu toont hoeveel keer er op de knop werd geklikt. Bv. “1 keer geklikt”, “2 keer geklikt”, …</a:t>
+            </a:r>
+          </a:p>
+          <a:p>
+            <a:pPr>
+              <a:spcAft>
+                <a:spcPts val="3000"/>
+              </a:spcAft>
+            </a:pPr>
+            <a:r>
+              <a:rPr lang="nl-BE" dirty="0"/>
+              <a:t>Maak een webpagina met een paragraaf, met een zelfgekozen zin (minstens 5 woorden). Zorg ervoor dat als je met de muis over de paragraaf beweegt, alle woorden worden getoond. Als je muis de paragraaf verlaat, toon je slechts de eerste 3 woorden.</a:t>
+            </a:r>
+          </a:p>
+          <a:p>
+            <a:pPr>
+              <a:spcAft>
+                <a:spcPts val="3000"/>
+              </a:spcAft>
+            </a:pPr>
+            <a:r>
+              <a:rPr lang="nl-BE" dirty="0"/>
+              <a:t>Maak een webpagina met 2 div-elementen. Neem in elk div-element 3 paragraaf-elementen op, met tekst. Zorg ervoor dat als je op een paragraaf klikt, de andere verdwijnen binnen deze div.</a:t>
+            </a:r>
+          </a:p>
+        </p:txBody>
+      </p:sp>
+    </p:spTree>
+    <p:extLst>
+      <p:ext uri="{BB962C8B-B14F-4D97-AF65-F5344CB8AC3E}">
+        <p14:creationId xmlns:p14="http://schemas.microsoft.com/office/powerpoint/2010/main" val="2505658942"/>
+      </p:ext>
+    </p:extLst>
+  </p:cSld>
+  <p:clrMapOvr>
+    <a:masterClrMapping/>
+  </p:clrMapOvr>
+</p:sld>
+</file>
+
+<file path=ppt/slides/slide67.xml><?xml version="1.0" encoding="utf-8"?>
+<p:sld xmlns:a="http://schemas.openxmlformats.org/drawingml/2006/main" xmlns:r="http://schemas.openxmlformats.org/officeDocument/2006/relationships" xmlns:p="http://schemas.openxmlformats.org/presentationml/2006/main">
+  <p:cSld>
+    <p:spTree>
+      <p:nvGrpSpPr>
         <p:cNvPr id="1" name="">
           <a:extLst>
             <a:ext uri="{FF2B5EF4-FFF2-40B4-BE49-F238E27FC236}">
@@ -23021,7 +24964,7 @@
 </p:sld>
 </file>
 
-<file path=ppt/slides/slide61.xml><?xml version="1.0" encoding="utf-8"?>
+<file path=ppt/slides/slide68.xml><?xml version="1.0" encoding="utf-8"?>
 <p:sld xmlns:a="http://schemas.openxmlformats.org/drawingml/2006/main" xmlns:r="http://schemas.openxmlformats.org/officeDocument/2006/relationships" xmlns:p="http://schemas.openxmlformats.org/presentationml/2006/main">
   <p:cSld>
     <p:spTree>
@@ -23208,7 +25151,7 @@
 </p:sld>
 </file>
 
-<file path=ppt/slides/slide62.xml><?xml version="1.0" encoding="utf-8"?>
+<file path=ppt/slides/slide69.xml><?xml version="1.0" encoding="utf-8"?>
 <p:sld xmlns:a="http://schemas.openxmlformats.org/drawingml/2006/main" xmlns:r="http://schemas.openxmlformats.org/officeDocument/2006/relationships" xmlns:p="http://schemas.openxmlformats.org/presentationml/2006/main">
   <p:cSld>
     <p:spTree>
@@ -23450,7 +25393,96 @@
 </p:sld>
 </file>
 
-<file path=ppt/slides/slide63.xml><?xml version="1.0" encoding="utf-8"?>
+<file path=ppt/slides/slide7.xml><?xml version="1.0" encoding="utf-8"?>
+<p:sld xmlns:a="http://schemas.openxmlformats.org/drawingml/2006/main" xmlns:r="http://schemas.openxmlformats.org/officeDocument/2006/relationships" xmlns:p="http://schemas.openxmlformats.org/presentationml/2006/main">
+  <p:cSld>
+    <p:spTree>
+      <p:nvGrpSpPr>
+        <p:cNvPr id="1" name=""/>
+        <p:cNvGrpSpPr/>
+        <p:nvPr/>
+      </p:nvGrpSpPr>
+      <p:grpSpPr>
+        <a:xfrm>
+          <a:off x="0" y="0"/>
+          <a:ext cx="0" cy="0"/>
+          <a:chOff x="0" y="0"/>
+          <a:chExt cx="0" cy="0"/>
+        </a:xfrm>
+      </p:grpSpPr>
+      <p:sp>
+        <p:nvSpPr>
+          <p:cNvPr id="2" name="Titel 1">
+            <a:extLst>
+              <a:ext uri="{FF2B5EF4-FFF2-40B4-BE49-F238E27FC236}">
+                <a16:creationId xmlns:a16="http://schemas.microsoft.com/office/drawing/2014/main" id="{2529517A-FF61-5846-7877-09ED4A04A126}"/>
+              </a:ext>
+            </a:extLst>
+          </p:cNvPr>
+          <p:cNvSpPr>
+            <a:spLocks noGrp="1"/>
+          </p:cNvSpPr>
+          <p:nvPr>
+            <p:ph type="title"/>
+          </p:nvPr>
+        </p:nvSpPr>
+        <p:spPr/>
+        <p:txBody>
+          <a:bodyPr/>
+          <a:lstStyle/>
+          <a:p>
+            <a:r>
+              <a:rPr lang="nl-BE" dirty="0"/>
+              <a:t>Body</a:t>
+            </a:r>
+          </a:p>
+        </p:txBody>
+      </p:sp>
+      <p:sp>
+        <p:nvSpPr>
+          <p:cNvPr id="3" name="Tijdelijke aanduiding voor inhoud 2">
+            <a:extLst>
+              <a:ext uri="{FF2B5EF4-FFF2-40B4-BE49-F238E27FC236}">
+                <a16:creationId xmlns:a16="http://schemas.microsoft.com/office/drawing/2014/main" id="{97B92B6B-1398-4761-1242-7AFDE6D920F3}"/>
+              </a:ext>
+            </a:extLst>
+          </p:cNvPr>
+          <p:cNvSpPr>
+            <a:spLocks noGrp="1"/>
+          </p:cNvSpPr>
+          <p:nvPr>
+            <p:ph idx="1"/>
+          </p:nvPr>
+        </p:nvSpPr>
+        <p:spPr/>
+        <p:txBody>
+          <a:bodyPr/>
+          <a:lstStyle/>
+          <a:p>
+            <a:pPr marL="0" indent="0">
+              <a:buNone/>
+            </a:pPr>
+            <a:r>
+              <a:rPr lang="nl-BE" dirty="0"/>
+              <a:t>Bevat alle tags die zichtbaar zijn op de webpagina</a:t>
+            </a:r>
+          </a:p>
+        </p:txBody>
+      </p:sp>
+    </p:spTree>
+    <p:extLst>
+      <p:ext uri="{BB962C8B-B14F-4D97-AF65-F5344CB8AC3E}">
+        <p14:creationId xmlns:p14="http://schemas.microsoft.com/office/powerpoint/2010/main" val="1708897472"/>
+      </p:ext>
+    </p:extLst>
+  </p:cSld>
+  <p:clrMapOvr>
+    <a:masterClrMapping/>
+  </p:clrMapOvr>
+</p:sld>
+</file>
+
+<file path=ppt/slides/slide70.xml><?xml version="1.0" encoding="utf-8"?>
 <p:sld xmlns:a="http://schemas.openxmlformats.org/drawingml/2006/main" xmlns:r="http://schemas.openxmlformats.org/officeDocument/2006/relationships" xmlns:p="http://schemas.openxmlformats.org/presentationml/2006/main">
   <p:cSld>
     <p:spTree>
@@ -23596,7 +25628,7 @@
 </p:sld>
 </file>
 
-<file path=ppt/slides/slide64.xml><?xml version="1.0" encoding="utf-8"?>
+<file path=ppt/slides/slide71.xml><?xml version="1.0" encoding="utf-8"?>
 <p:sld xmlns:a="http://schemas.openxmlformats.org/drawingml/2006/main" xmlns:r="http://schemas.openxmlformats.org/officeDocument/2006/relationships" xmlns:p="http://schemas.openxmlformats.org/presentationml/2006/main">
   <p:cSld>
     <p:spTree>
@@ -23854,7 +25886,7 @@
 </p:sld>
 </file>
 
-<file path=ppt/slides/slide65.xml><?xml version="1.0" encoding="utf-8"?>
+<file path=ppt/slides/slide72.xml><?xml version="1.0" encoding="utf-8"?>
 <p:sld xmlns:a="http://schemas.openxmlformats.org/drawingml/2006/main" xmlns:r="http://schemas.openxmlformats.org/officeDocument/2006/relationships" xmlns:p="http://schemas.openxmlformats.org/presentationml/2006/main">
   <p:cSld>
     <p:spTree>
@@ -24291,7 +26323,7 @@
 </p:sld>
 </file>
 
-<file path=ppt/slides/slide66.xml><?xml version="1.0" encoding="utf-8"?>
+<file path=ppt/slides/slide73.xml><?xml version="1.0" encoding="utf-8"?>
 <p:sld xmlns:a="http://schemas.openxmlformats.org/drawingml/2006/main" xmlns:r="http://schemas.openxmlformats.org/officeDocument/2006/relationships" xmlns:p="http://schemas.openxmlformats.org/presentationml/2006/main">
   <p:cSld>
     <p:spTree>
@@ -24544,7 +26576,7 @@
 </p:sld>
 </file>
 
-<file path=ppt/slides/slide67.xml><?xml version="1.0" encoding="utf-8"?>
+<file path=ppt/slides/slide74.xml><?xml version="1.0" encoding="utf-8"?>
 <p:sld xmlns:a="http://schemas.openxmlformats.org/drawingml/2006/main" xmlns:r="http://schemas.openxmlformats.org/officeDocument/2006/relationships" xmlns:p="http://schemas.openxmlformats.org/presentationml/2006/main">
   <p:cSld>
     <p:spTree>
@@ -24728,95 +26760,6 @@
     <p:extLst>
       <p:ext uri="{BB962C8B-B14F-4D97-AF65-F5344CB8AC3E}">
         <p14:creationId xmlns:p14="http://schemas.microsoft.com/office/powerpoint/2010/main" val="139032914"/>
-      </p:ext>
-    </p:extLst>
-  </p:cSld>
-  <p:clrMapOvr>
-    <a:masterClrMapping/>
-  </p:clrMapOvr>
-</p:sld>
-</file>
-
-<file path=ppt/slides/slide7.xml><?xml version="1.0" encoding="utf-8"?>
-<p:sld xmlns:a="http://schemas.openxmlformats.org/drawingml/2006/main" xmlns:r="http://schemas.openxmlformats.org/officeDocument/2006/relationships" xmlns:p="http://schemas.openxmlformats.org/presentationml/2006/main">
-  <p:cSld>
-    <p:spTree>
-      <p:nvGrpSpPr>
-        <p:cNvPr id="1" name=""/>
-        <p:cNvGrpSpPr/>
-        <p:nvPr/>
-      </p:nvGrpSpPr>
-      <p:grpSpPr>
-        <a:xfrm>
-          <a:off x="0" y="0"/>
-          <a:ext cx="0" cy="0"/>
-          <a:chOff x="0" y="0"/>
-          <a:chExt cx="0" cy="0"/>
-        </a:xfrm>
-      </p:grpSpPr>
-      <p:sp>
-        <p:nvSpPr>
-          <p:cNvPr id="2" name="Titel 1">
-            <a:extLst>
-              <a:ext uri="{FF2B5EF4-FFF2-40B4-BE49-F238E27FC236}">
-                <a16:creationId xmlns:a16="http://schemas.microsoft.com/office/drawing/2014/main" id="{2529517A-FF61-5846-7877-09ED4A04A126}"/>
-              </a:ext>
-            </a:extLst>
-          </p:cNvPr>
-          <p:cNvSpPr>
-            <a:spLocks noGrp="1"/>
-          </p:cNvSpPr>
-          <p:nvPr>
-            <p:ph type="title"/>
-          </p:nvPr>
-        </p:nvSpPr>
-        <p:spPr/>
-        <p:txBody>
-          <a:bodyPr/>
-          <a:lstStyle/>
-          <a:p>
-            <a:r>
-              <a:rPr lang="nl-BE" dirty="0"/>
-              <a:t>Body</a:t>
-            </a:r>
-          </a:p>
-        </p:txBody>
-      </p:sp>
-      <p:sp>
-        <p:nvSpPr>
-          <p:cNvPr id="3" name="Tijdelijke aanduiding voor inhoud 2">
-            <a:extLst>
-              <a:ext uri="{FF2B5EF4-FFF2-40B4-BE49-F238E27FC236}">
-                <a16:creationId xmlns:a16="http://schemas.microsoft.com/office/drawing/2014/main" id="{97B92B6B-1398-4761-1242-7AFDE6D920F3}"/>
-              </a:ext>
-            </a:extLst>
-          </p:cNvPr>
-          <p:cNvSpPr>
-            <a:spLocks noGrp="1"/>
-          </p:cNvSpPr>
-          <p:nvPr>
-            <p:ph idx="1"/>
-          </p:nvPr>
-        </p:nvSpPr>
-        <p:spPr/>
-        <p:txBody>
-          <a:bodyPr/>
-          <a:lstStyle/>
-          <a:p>
-            <a:pPr marL="0" indent="0">
-              <a:buNone/>
-            </a:pPr>
-            <a:r>
-              <a:rPr lang="nl-BE" dirty="0"/>
-              <a:t>Bevat alle tags die zichtbaar zijn op de webpagina</a:t>
-            </a:r>
-          </a:p>
-        </p:txBody>
-      </p:sp>
-    </p:spTree>
-    <p:extLst>
-      <p:ext uri="{BB962C8B-B14F-4D97-AF65-F5344CB8AC3E}">
-        <p14:creationId xmlns:p14="http://schemas.microsoft.com/office/powerpoint/2010/main" val="1708897472"/>
       </p:ext>
     </p:extLst>
   </p:cSld>
